--- a/RFQ Doc/2026.05.18 PDE Digitalization/Master Roadmap/Maaden ARGP - Master Roadmap - Visual Deck.pptx
+++ b/RFQ Doc/2026.05.18 PDE Digitalization/Master Roadmap/Maaden ARGP - Master Roadmap - Visual Deck.pptx
@@ -1,5 +1,109 @@
 
-<file path=ppt/presentation.xml><?xml version="1.0" encoding="utf-8"?>
+<file path=docProps\app.xml><?xml version="1.0" encoding="utf-8"?>
+<Properties xmlns="http://schemas.openxmlformats.org/officeDocument/2006/extended-properties" xmlns:vt="http://schemas.openxmlformats.org/officeDocument/2006/docPropsVTypes">
+  <TotalTime>1</TotalTime>
+  <Words>3069</Words>
+  <Application>Microsoft Office PowerPoint</Application>
+  <PresentationFormat>Widescreen</PresentationFormat>
+  <Paragraphs>743</Paragraphs>
+  <Slides>22</Slides>
+  <Notes>0</Notes>
+  <HiddenSlides>0</HiddenSlides>
+  <MMClips>0</MMClips>
+  <ScaleCrop>false</ScaleCrop>
+  <HeadingPairs>
+    <vt:vector size="6" baseType="variant">
+      <vt:variant>
+        <vt:lpstr>Fonts Used</vt:lpstr>
+      </vt:variant>
+      <vt:variant>
+        <vt:i4>2</vt:i4>
+      </vt:variant>
+      <vt:variant>
+        <vt:lpstr>Theme</vt:lpstr>
+      </vt:variant>
+      <vt:variant>
+        <vt:i4>1</vt:i4>
+      </vt:variant>
+      <vt:variant>
+        <vt:lpstr>Slide Titles</vt:lpstr>
+      </vt:variant>
+      <vt:variant>
+        <vt:i4>22</vt:i4>
+      </vt:variant>
+    </vt:vector>
+  </HeadingPairs>
+  <TitlesOfParts>
+    <vt:vector size="25" baseType="lpstr">
+      <vt:lpstr>Arial</vt:lpstr>
+      <vt:lpstr>Calibri</vt:lpstr>
+      <vt:lpstr>Office Theme</vt:lpstr>
+      <vt:lpstr>PowerPoint Presentation</vt:lpstr>
+      <vt:lpstr>PowerPoint Presentation</vt:lpstr>
+      <vt:lpstr>PowerPoint Presentation</vt:lpstr>
+      <vt:lpstr>PowerPoint Presentation</vt:lpstr>
+      <vt:lpstr>PowerPoint Presentation</vt:lpstr>
+      <vt:lpstr>PowerPoint Presentation</vt:lpstr>
+      <vt:lpstr>PowerPoint Presentation</vt:lpstr>
+      <vt:lpstr>PowerPoint Presentation</vt:lpstr>
+      <vt:lpstr>PowerPoint Presentation</vt:lpstr>
+      <vt:lpstr>PowerPoint Presentation</vt:lpstr>
+      <vt:lpstr>PowerPoint Presentation</vt:lpstr>
+      <vt:lpstr>PowerPoint Presentation</vt:lpstr>
+      <vt:lpstr>PowerPoint Presentation</vt:lpstr>
+      <vt:lpstr>PowerPoint Presentation</vt:lpstr>
+      <vt:lpstr>PowerPoint Presentation</vt:lpstr>
+      <vt:lpstr>PowerPoint Presentation</vt:lpstr>
+      <vt:lpstr>PowerPoint Presentation</vt:lpstr>
+      <vt:lpstr>PowerPoint Presentation</vt:lpstr>
+      <vt:lpstr>PowerPoint Presentation</vt:lpstr>
+      <vt:lpstr>PowerPoint Presentation</vt:lpstr>
+      <vt:lpstr>PowerPoint Presentation</vt:lpstr>
+      <vt:lpstr>PowerPoint Presentation</vt:lpstr>
+    </vt:vector>
+  </TitlesOfParts>
+  <Manager/>
+  <Company/>
+  <LinksUpToDate>false</LinksUpToDate>
+  <SharedDoc>false</SharedDoc>
+  <HyperlinkBase/>
+  <HyperlinksChanged>false</HyperlinksChanged>
+  <AppVersion>16.0000</AppVersion>
+</Properties>
+</file>
+
+<file path=docProps\core.xml><?xml version="1.0" encoding="utf-8"?>
+<cp:coreProperties xmlns:cp="http://schemas.openxmlformats.org/package/2006/metadata/core-properties" xmlns:dc="http://purl.org/dc/elements/1.1/" xmlns:dcterms="http://purl.org/dc/terms/" xmlns:dcmitype="http://purl.org/dc/dcmitype/" xmlns:xsi="http://www.w3.org/2001/XMLSchema-instance">
+  <dc:title/>
+  <dc:subject/>
+  <dc:creator/>
+  <cp:keywords/>
+  <dc:description>generated using python-pptx</dc:description>
+  <cp:lastModifiedBy>Angel Balilo</cp:lastModifiedBy>
+  <cp:revision>2</cp:revision>
+  <dcterms:created xsi:type="dcterms:W3CDTF">2013-01-27T09:14:16Z</dcterms:created>
+  <dcterms:modified xsi:type="dcterms:W3CDTF">2026-07-06T06:32:07Z</dcterms:modified>
+  <cp:category/>
+</cp:coreProperties>
+</file>
+
+<file path=ppt\presProps.xml><?xml version="1.0" encoding="utf-8"?>
+<p:presentationPr xmlns:a="http://schemas.openxmlformats.org/drawingml/2006/main" xmlns:r="http://schemas.openxmlformats.org/officeDocument/2006/relationships" xmlns:p="http://schemas.openxmlformats.org/presentationml/2006/main">
+  <p:extLst>
+    <p:ext uri="{E76CE94A-603C-4142-B9EB-6D1370010A27}">
+      <p14:discardImageEditData xmlns:p14="http://schemas.microsoft.com/office/powerpoint/2010/main" val="0"/>
+    </p:ext>
+    <p:ext uri="{D31A062A-798A-4329-ABDD-BBA856620510}">
+      <p14:defaultImageDpi xmlns:p14="http://schemas.microsoft.com/office/powerpoint/2010/main" val="0"/>
+    </p:ext>
+    <p:ext uri="{FD5EFAAD-0ECE-453E-9831-46B23BE46B34}">
+      <p15:chartTrackingRefBased xmlns:p15="http://schemas.microsoft.com/office/powerpoint/2012/main" val="0"/>
+    </p:ext>
+  </p:extLst>
+</p:presentationPr>
+</file>
+
+<file path=ppt\presentation.xml><?xml version="1.0" encoding="utf-8"?>
 <p:presentation xmlns:a="http://schemas.openxmlformats.org/drawingml/2006/main" xmlns:r="http://schemas.openxmlformats.org/officeDocument/2006/relationships" xmlns:p="http://schemas.openxmlformats.org/presentationml/2006/main" saveSubsetFonts="1" autoCompressPictures="0">
   <p:sldMasterIdLst>
     <p:sldMasterId id="2147483648" r:id="rId1"/>
@@ -144,7 +248,7 @@
 </p:presentation>
 </file>
 
-<file path=ppt/slideLayouts/slideLayout1.xml><?xml version="1.0" encoding="utf-8"?>
+<file path=ppt\slideLayouts\slideLayout1.xml><?xml version="1.0" encoding="utf-8"?>
 <p:sldLayout xmlns:a="http://schemas.openxmlformats.org/drawingml/2006/main" xmlns:r="http://schemas.openxmlformats.org/officeDocument/2006/relationships" xmlns:p="http://schemas.openxmlformats.org/presentationml/2006/main" type="title" preserve="1">
   <p:cSld name="Title Slide">
     <p:spTree>
@@ -384,7 +488,7 @@
 </p:sldLayout>
 </file>
 
-<file path=ppt/slideLayouts/slideLayout10.xml><?xml version="1.0" encoding="utf-8"?>
+<file path=ppt\slideLayouts\slideLayout10.xml><?xml version="1.0" encoding="utf-8"?>
 <p:sldLayout xmlns:a="http://schemas.openxmlformats.org/drawingml/2006/main" xmlns:r="http://schemas.openxmlformats.org/officeDocument/2006/relationships" xmlns:p="http://schemas.openxmlformats.org/presentationml/2006/main" type="vertTx" preserve="1">
   <p:cSld name="Title and Vertical Text">
     <p:spTree>
@@ -552,7 +656,7 @@
 </p:sldLayout>
 </file>
 
-<file path=ppt/slideLayouts/slideLayout11.xml><?xml version="1.0" encoding="utf-8"?>
+<file path=ppt\slideLayouts\slideLayout11.xml><?xml version="1.0" encoding="utf-8"?>
 <p:sldLayout xmlns:a="http://schemas.openxmlformats.org/drawingml/2006/main" xmlns:r="http://schemas.openxmlformats.org/officeDocument/2006/relationships" xmlns:p="http://schemas.openxmlformats.org/presentationml/2006/main" type="vertTitleAndTx" preserve="1">
   <p:cSld name="Vertical Title and Text">
     <p:spTree>
@@ -730,7 +834,7 @@
 </p:sldLayout>
 </file>
 
-<file path=ppt/slideLayouts/slideLayout2.xml><?xml version="1.0" encoding="utf-8"?>
+<file path=ppt\slideLayouts\slideLayout2.xml><?xml version="1.0" encoding="utf-8"?>
 <p:sldLayout xmlns:a="http://schemas.openxmlformats.org/drawingml/2006/main" xmlns:r="http://schemas.openxmlformats.org/officeDocument/2006/relationships" xmlns:p="http://schemas.openxmlformats.org/presentationml/2006/main" type="obj" preserve="1">
   <p:cSld name="Title and Content">
     <p:spTree>
@@ -898,7 +1002,7 @@
 </p:sldLayout>
 </file>
 
-<file path=ppt/slideLayouts/slideLayout3.xml><?xml version="1.0" encoding="utf-8"?>
+<file path=ppt\slideLayouts\slideLayout3.xml><?xml version="1.0" encoding="utf-8"?>
 <p:sldLayout xmlns:a="http://schemas.openxmlformats.org/drawingml/2006/main" xmlns:r="http://schemas.openxmlformats.org/officeDocument/2006/relationships" xmlns:p="http://schemas.openxmlformats.org/presentationml/2006/main" type="secHead" preserve="1">
   <p:cSld name="Section Header">
     <p:spTree>
@@ -1143,7 +1247,7 @@
 </p:sldLayout>
 </file>
 
-<file path=ppt/slideLayouts/slideLayout4.xml><?xml version="1.0" encoding="utf-8"?>
+<file path=ppt\slideLayouts\slideLayout4.xml><?xml version="1.0" encoding="utf-8"?>
 <p:sldLayout xmlns:a="http://schemas.openxmlformats.org/drawingml/2006/main" xmlns:r="http://schemas.openxmlformats.org/officeDocument/2006/relationships" xmlns:p="http://schemas.openxmlformats.org/presentationml/2006/main" type="twoObj" preserve="1">
   <p:cSld name="Two Content">
     <p:spTree>
@@ -1428,7 +1532,7 @@
 </p:sldLayout>
 </file>
 
-<file path=ppt/slideLayouts/slideLayout5.xml><?xml version="1.0" encoding="utf-8"?>
+<file path=ppt\slideLayouts\slideLayout5.xml><?xml version="1.0" encoding="utf-8"?>
 <p:sldLayout xmlns:a="http://schemas.openxmlformats.org/drawingml/2006/main" xmlns:r="http://schemas.openxmlformats.org/officeDocument/2006/relationships" xmlns:p="http://schemas.openxmlformats.org/presentationml/2006/main" type="twoTxTwoObj" preserve="1">
   <p:cSld name="Comparison">
     <p:spTree>
@@ -1847,7 +1951,7 @@
 </p:sldLayout>
 </file>
 
-<file path=ppt/slideLayouts/slideLayout6.xml><?xml version="1.0" encoding="utf-8"?>
+<file path=ppt\slideLayouts\slideLayout6.xml><?xml version="1.0" encoding="utf-8"?>
 <p:sldLayout xmlns:a="http://schemas.openxmlformats.org/drawingml/2006/main" xmlns:r="http://schemas.openxmlformats.org/officeDocument/2006/relationships" xmlns:p="http://schemas.openxmlformats.org/presentationml/2006/main" type="titleOnly" preserve="1">
   <p:cSld name="Title Only">
     <p:spTree>
@@ -1964,7 +2068,7 @@
 </p:sldLayout>
 </file>
 
-<file path=ppt/slideLayouts/slideLayout7.xml><?xml version="1.0" encoding="utf-8"?>
+<file path=ppt\slideLayouts\slideLayout7.xml><?xml version="1.0" encoding="utf-8"?>
 <p:sldLayout xmlns:a="http://schemas.openxmlformats.org/drawingml/2006/main" xmlns:r="http://schemas.openxmlformats.org/officeDocument/2006/relationships" xmlns:p="http://schemas.openxmlformats.org/presentationml/2006/main" type="blank" preserve="1">
   <p:cSld name="Blank">
     <p:spTree>
@@ -2059,7 +2163,7 @@
 </p:sldLayout>
 </file>
 
-<file path=ppt/slideLayouts/slideLayout8.xml><?xml version="1.0" encoding="utf-8"?>
+<file path=ppt\slideLayouts\slideLayout8.xml><?xml version="1.0" encoding="utf-8"?>
 <p:sldLayout xmlns:a="http://schemas.openxmlformats.org/drawingml/2006/main" xmlns:r="http://schemas.openxmlformats.org/officeDocument/2006/relationships" xmlns:p="http://schemas.openxmlformats.org/presentationml/2006/main" type="objTx" preserve="1">
   <p:cSld name="Content with Caption">
     <p:spTree>
@@ -2334,7 +2438,7 @@
 </p:sldLayout>
 </file>
 
-<file path=ppt/slideLayouts/slideLayout9.xml><?xml version="1.0" encoding="utf-8"?>
+<file path=ppt\slideLayouts\slideLayout9.xml><?xml version="1.0" encoding="utf-8"?>
 <p:sldLayout xmlns:a="http://schemas.openxmlformats.org/drawingml/2006/main" xmlns:r="http://schemas.openxmlformats.org/officeDocument/2006/relationships" xmlns:p="http://schemas.openxmlformats.org/presentationml/2006/main" type="picTx" preserve="1">
   <p:cSld name="Picture with Caption">
     <p:spTree>
@@ -2586,7 +2690,7 @@
 </p:sldLayout>
 </file>
 
-<file path=ppt/slideMasters/slideMaster1.xml><?xml version="1.0" encoding="utf-8"?>
+<file path=ppt\slideMasters\slideMaster1.xml><?xml version="1.0" encoding="utf-8"?>
 <p:sldMaster xmlns:a="http://schemas.openxmlformats.org/drawingml/2006/main" xmlns:r="http://schemas.openxmlformats.org/officeDocument/2006/relationships" xmlns:p="http://schemas.openxmlformats.org/presentationml/2006/main">
   <p:cSld>
     <p:bg>
@@ -3094,7 +3198,7 @@
 </p:sldMaster>
 </file>
 
-<file path=ppt/slides/slide1.xml><?xml version="1.0" encoding="utf-8"?>
+<file path=ppt\slides\slide1.xml><?xml version="1.0" encoding="utf-8"?>
 <p:sld xmlns:a="http://schemas.openxmlformats.org/drawingml/2006/main" xmlns:r="http://schemas.openxmlformats.org/officeDocument/2006/relationships" xmlns:p="http://schemas.openxmlformats.org/presentationml/2006/main">
   <p:cSld>
     <p:spTree>
@@ -3126,7 +3230,7 @@
             <a:avLst/>
           </a:prstGeom>
           <a:solidFill>
-            <a:srgbClr val="0F1433"/>
+            <a:srgbClr val="16171B"/>
           </a:solidFill>
           <a:ln>
             <a:noFill/>
@@ -3181,7 +3285,7 @@
             <a:r>
               <a:rPr sz="1400" b="1" i="0">
                 <a:solidFill>
-                  <a:srgbClr val="D4AF37"/>
+                  <a:srgbClr val="C9A227"/>
                 </a:solidFill>
                 <a:latin typeface="Calibri"/>
               </a:rPr>
@@ -3251,7 +3355,7 @@
             <a:r>
               <a:rPr sz="2800" b="0" i="1">
                 <a:solidFill>
-                  <a:srgbClr val="CADCFC"/>
+                  <a:srgbClr val="C8C9D0"/>
                 </a:solidFill>
                 <a:latin typeface="Calibri"/>
               </a:rPr>
@@ -3275,7 +3379,7 @@
             <a:avLst/>
           </a:prstGeom>
           <a:solidFill>
-            <a:srgbClr val="D4AF37"/>
+            <a:srgbClr val="C9A227"/>
           </a:solidFill>
           <a:ln>
             <a:noFill/>
@@ -3330,7 +3434,7 @@
             <a:r>
               <a:rPr sz="1500" b="0" i="0">
                 <a:solidFill>
-                  <a:srgbClr val="CADCFC"/>
+                  <a:srgbClr val="C8C9D0"/>
                 </a:solidFill>
                 <a:latin typeface="Calibri"/>
               </a:rPr>
@@ -3365,7 +3469,7 @@
             <a:r>
               <a:rPr sz="1500" b="0" i="0">
                 <a:solidFill>
-                  <a:srgbClr val="CADCFC"/>
+                  <a:srgbClr val="C8C9D0"/>
                 </a:solidFill>
                 <a:latin typeface="Calibri"/>
               </a:rPr>
@@ -3400,7 +3504,7 @@
             <a:r>
               <a:rPr sz="1500" b="0" i="0">
                 <a:solidFill>
-                  <a:srgbClr val="CADCFC"/>
+                  <a:srgbClr val="C8C9D0"/>
                 </a:solidFill>
                 <a:latin typeface="Calibri"/>
               </a:rPr>
@@ -3435,7 +3539,7 @@
             <a:r>
               <a:rPr sz="1500" b="0" i="0">
                 <a:solidFill>
-                  <a:srgbClr val="CADCFC"/>
+                  <a:srgbClr val="C8C9D0"/>
                 </a:solidFill>
                 <a:latin typeface="Calibri"/>
               </a:rPr>
@@ -3470,11 +3574,11 @@
             <a:r>
               <a:rPr sz="1300" b="0" i="0">
                 <a:solidFill>
-                  <a:srgbClr val="CADCFC"/>
-                </a:solidFill>
-                <a:latin typeface="Calibri"/>
-              </a:rPr>
-              <a:t>Version 1.0  ·  02 July 2026</a:t>
+                  <a:srgbClr val="C8C9D0"/>
+                </a:solidFill>
+                <a:latin typeface="Calibri"/>
+              </a:rPr>
+              <a:t>Version 1.0  |  02 July 2026</a:t>
             </a:r>
           </a:p>
         </p:txBody>
@@ -3494,7 +3598,7 @@
             <a:avLst/>
           </a:prstGeom>
           <a:solidFill>
-            <a:srgbClr val="1E2761"/>
+            <a:srgbClr val="23242A"/>
           </a:solidFill>
           <a:ln>
             <a:noFill/>
@@ -3549,11 +3653,11 @@
             <a:r>
               <a:rPr sz="1100" b="0" i="1">
                 <a:solidFill>
-                  <a:srgbClr val="CADCFC"/>
-                </a:solidFill>
-                <a:latin typeface="Calibri"/>
-              </a:rPr>
-              <a:t>XD House LLC FZ  ·  Digital Construction Consultancy  ·  London . Dubai</a:t>
+                  <a:srgbClr val="C8C9D0"/>
+                </a:solidFill>
+                <a:latin typeface="Calibri"/>
+              </a:rPr>
+              <a:t>XD House LLC FZ  |  Digital Construction Consultancy  |  London . Dubai</a:t>
             </a:r>
           </a:p>
         </p:txBody>
@@ -3584,7 +3688,7 @@
             <a:r>
               <a:rPr sz="1100" b="0" i="1">
                 <a:solidFill>
-                  <a:srgbClr val="D4AF37"/>
+                  <a:srgbClr val="C9A227"/>
                 </a:solidFill>
                 <a:latin typeface="Calibri"/>
               </a:rPr>
@@ -3631,7 +3735,7 @@
 </p:sld>
 </file>
 
-<file path=ppt/slides/slide10.xml><?xml version="1.0" encoding="utf-8"?>
+<file path=ppt\slides\slide10.xml><?xml version="1.0" encoding="utf-8"?>
 <p:sld xmlns:a="http://schemas.openxmlformats.org/drawingml/2006/main" xmlns:r="http://schemas.openxmlformats.org/officeDocument/2006/relationships" xmlns:p="http://schemas.openxmlformats.org/presentationml/2006/main">
   <p:cSld>
     <p:spTree>
@@ -3663,7 +3767,7 @@
             <a:avLst/>
           </a:prstGeom>
           <a:solidFill>
-            <a:srgbClr val="1E2761"/>
+            <a:srgbClr val="23242A"/>
           </a:solidFill>
           <a:ln>
             <a:noFill/>
@@ -3753,7 +3857,7 @@
             <a:r>
               <a:rPr sz="1200" b="0" i="1">
                 <a:solidFill>
-                  <a:srgbClr val="CADCFC"/>
+                  <a:srgbClr val="C8C9D0"/>
                 </a:solidFill>
                 <a:latin typeface="Calibri"/>
               </a:rPr>
@@ -3777,7 +3881,7 @@
             <a:avLst/>
           </a:prstGeom>
           <a:solidFill>
-            <a:srgbClr val="D4AF37"/>
+            <a:srgbClr val="C9A227"/>
           </a:solidFill>
           <a:ln>
             <a:noFill/>
@@ -3832,7 +3936,7 @@
             <a:r>
               <a:rPr sz="1200" b="1" i="0">
                 <a:solidFill>
-                  <a:srgbClr val="1E2761"/>
+                  <a:srgbClr val="23242A"/>
                 </a:solidFill>
                 <a:latin typeface="Calibri"/>
               </a:rPr>
@@ -3867,7 +3971,7 @@
             <a:r>
               <a:rPr sz="2200" b="1" i="0">
                 <a:solidFill>
-                  <a:srgbClr val="1E2761"/>
+                  <a:srgbClr val="23242A"/>
                 </a:solidFill>
                 <a:latin typeface="Calibri"/>
               </a:rPr>
@@ -3902,7 +4006,7 @@
             <a:r>
               <a:rPr sz="900" b="0" i="1">
                 <a:solidFill>
-                  <a:srgbClr val="1E2761"/>
+                  <a:srgbClr val="23242A"/>
                 </a:solidFill>
                 <a:latin typeface="Calibri"/>
               </a:rPr>
@@ -3926,7 +4030,7 @@
             <a:avLst/>
           </a:prstGeom>
           <a:solidFill>
-            <a:srgbClr val="2196F3"/>
+            <a:srgbClr val="2C5F8A"/>
           </a:solidFill>
           <a:ln>
             <a:noFill/>
@@ -4040,7 +4144,7 @@
             <a:avLst/>
           </a:prstGeom>
           <a:solidFill>
-            <a:srgbClr val="4CAF50"/>
+            <a:srgbClr val="2E7D32"/>
           </a:solidFill>
           <a:ln>
             <a:noFill/>
@@ -4154,7 +4258,7 @@
             <a:avLst/>
           </a:prstGeom>
           <a:solidFill>
-            <a:srgbClr val="E97132"/>
+            <a:srgbClr val="B26A00"/>
           </a:solidFill>
           <a:ln>
             <a:noFill/>
@@ -4268,7 +4372,7 @@
             <a:avLst/>
           </a:prstGeom>
           <a:solidFill>
-            <a:srgbClr val="9C27B0"/>
+            <a:srgbClr val="6A3D9A"/>
           </a:solidFill>
           <a:ln>
             <a:noFill/>
@@ -4382,7 +4486,7 @@
             <a:avLst/>
           </a:prstGeom>
           <a:solidFill>
-            <a:srgbClr val="E53935"/>
+            <a:srgbClr val="C62828"/>
           </a:solidFill>
           <a:ln>
             <a:noFill/>
@@ -4496,7 +4600,7 @@
             <a:avLst/>
           </a:prstGeom>
           <a:solidFill>
-            <a:srgbClr val="606060"/>
+            <a:srgbClr val="6B6D76"/>
           </a:solidFill>
           <a:ln>
             <a:noFill/>
@@ -4610,7 +4714,7 @@
             <a:avLst/>
           </a:prstGeom>
           <a:solidFill>
-            <a:srgbClr val="FFC107"/>
+            <a:srgbClr val="C9A227"/>
           </a:solidFill>
           <a:ln>
             <a:noFill/>
@@ -4724,7 +4828,7 @@
             <a:avLst/>
           </a:prstGeom>
           <a:solidFill>
-            <a:srgbClr val="00BCD4"/>
+            <a:srgbClr val="2C5F8A"/>
           </a:solidFill>
           <a:ln>
             <a:noFill/>
@@ -4838,7 +4942,7 @@
             <a:avLst/>
           </a:prstGeom>
           <a:solidFill>
-            <a:srgbClr val="1E2761"/>
+            <a:srgbClr val="23242A"/>
           </a:solidFill>
           <a:ln>
             <a:noFill/>
@@ -4952,7 +5056,7 @@
             <a:avLst/>
           </a:prstGeom>
           <a:solidFill>
-            <a:srgbClr val="0F1433"/>
+            <a:srgbClr val="16171B"/>
           </a:solidFill>
           <a:ln>
             <a:noFill/>
@@ -5077,7 +5181,7 @@
             <a:r>
               <a:rPr sz="1000" b="0" i="1">
                 <a:solidFill>
-                  <a:srgbClr val="606060"/>
+                  <a:srgbClr val="6B6D76"/>
                 </a:solidFill>
                 <a:latin typeface="Calibri"/>
               </a:rPr>
@@ -5112,7 +5216,7 @@
             <a:r>
               <a:rPr sz="900" b="0" i="0">
                 <a:solidFill>
-                  <a:srgbClr val="606060"/>
+                  <a:srgbClr val="6B6D76"/>
                 </a:solidFill>
                 <a:latin typeface="Calibri"/>
               </a:rPr>
@@ -5129,7 +5233,7 @@
 </p:sld>
 </file>
 
-<file path=ppt/slides/slide11.xml><?xml version="1.0" encoding="utf-8"?>
+<file path=ppt\slides\slide11.xml><?xml version="1.0" encoding="utf-8"?>
 <p:sld xmlns:a="http://schemas.openxmlformats.org/drawingml/2006/main" xmlns:r="http://schemas.openxmlformats.org/officeDocument/2006/relationships" xmlns:p="http://schemas.openxmlformats.org/presentationml/2006/main">
   <p:cSld>
     <p:spTree>
@@ -5161,7 +5265,7 @@
             <a:avLst/>
           </a:prstGeom>
           <a:solidFill>
-            <a:srgbClr val="1E2761"/>
+            <a:srgbClr val="23242A"/>
           </a:solidFill>
           <a:ln>
             <a:noFill/>
@@ -5251,7 +5355,7 @@
             <a:r>
               <a:rPr sz="1200" b="0" i="1">
                 <a:solidFill>
-                  <a:srgbClr val="CADCFC"/>
+                  <a:srgbClr val="C8C9D0"/>
                 </a:solidFill>
                 <a:latin typeface="Calibri"/>
               </a:rPr>
@@ -5275,7 +5379,7 @@
             <a:avLst/>
           </a:prstGeom>
           <a:solidFill>
-            <a:srgbClr val="F0F0F0"/>
+            <a:srgbClr val="F4F3F0"/>
           </a:solidFill>
           <a:ln>
             <a:noFill/>
@@ -5319,7 +5423,7 @@
             <a:avLst/>
           </a:prstGeom>
           <a:solidFill>
-            <a:srgbClr val="2196F3"/>
+            <a:srgbClr val="2C5F8A"/>
           </a:solidFill>
           <a:ln>
             <a:noFill/>
@@ -5409,7 +5513,7 @@
             <a:r>
               <a:rPr sz="1500" b="1" i="0">
                 <a:solidFill>
-                  <a:srgbClr val="1E2761"/>
+                  <a:srgbClr val="23242A"/>
                 </a:solidFill>
                 <a:latin typeface="Calibri"/>
               </a:rPr>
@@ -5444,7 +5548,7 @@
             <a:r>
               <a:rPr sz="1000" b="0" i="1">
                 <a:solidFill>
-                  <a:srgbClr val="2196F3"/>
+                  <a:srgbClr val="2C5F8A"/>
                 </a:solidFill>
                 <a:latin typeface="Calibri"/>
               </a:rPr>
@@ -5479,7 +5583,7 @@
             <a:r>
               <a:rPr sz="1100" b="0" i="0">
                 <a:solidFill>
-                  <a:srgbClr val="0F1433"/>
+                  <a:srgbClr val="16171B"/>
                 </a:solidFill>
                 <a:latin typeface="Calibri"/>
               </a:rPr>
@@ -5503,7 +5607,7 @@
             <a:avLst/>
           </a:prstGeom>
           <a:solidFill>
-            <a:srgbClr val="F0F0F0"/>
+            <a:srgbClr val="F4F3F0"/>
           </a:solidFill>
           <a:ln>
             <a:noFill/>
@@ -5547,7 +5651,7 @@
             <a:avLst/>
           </a:prstGeom>
           <a:solidFill>
-            <a:srgbClr val="D4AF37"/>
+            <a:srgbClr val="C9A227"/>
           </a:solidFill>
           <a:ln>
             <a:noFill/>
@@ -5637,7 +5741,7 @@
             <a:r>
               <a:rPr sz="1500" b="1" i="0">
                 <a:solidFill>
-                  <a:srgbClr val="1E2761"/>
+                  <a:srgbClr val="23242A"/>
                 </a:solidFill>
                 <a:latin typeface="Calibri"/>
               </a:rPr>
@@ -5672,7 +5776,7 @@
             <a:r>
               <a:rPr sz="1000" b="0" i="1">
                 <a:solidFill>
-                  <a:srgbClr val="D4AF37"/>
+                  <a:srgbClr val="C9A227"/>
                 </a:solidFill>
                 <a:latin typeface="Calibri"/>
               </a:rPr>
@@ -5707,7 +5811,7 @@
             <a:r>
               <a:rPr sz="1100" b="0" i="0">
                 <a:solidFill>
-                  <a:srgbClr val="0F1433"/>
+                  <a:srgbClr val="16171B"/>
                 </a:solidFill>
                 <a:latin typeface="Calibri"/>
               </a:rPr>
@@ -5731,7 +5835,7 @@
             <a:avLst/>
           </a:prstGeom>
           <a:solidFill>
-            <a:srgbClr val="F0F0F0"/>
+            <a:srgbClr val="F4F3F0"/>
           </a:solidFill>
           <a:ln>
             <a:noFill/>
@@ -5775,7 +5879,7 @@
             <a:avLst/>
           </a:prstGeom>
           <a:solidFill>
-            <a:srgbClr val="9C27B0"/>
+            <a:srgbClr val="6A3D9A"/>
           </a:solidFill>
           <a:ln>
             <a:noFill/>
@@ -5865,7 +5969,7 @@
             <a:r>
               <a:rPr sz="1500" b="1" i="0">
                 <a:solidFill>
-                  <a:srgbClr val="1E2761"/>
+                  <a:srgbClr val="23242A"/>
                 </a:solidFill>
                 <a:latin typeface="Calibri"/>
               </a:rPr>
@@ -5900,7 +6004,7 @@
             <a:r>
               <a:rPr sz="1000" b="0" i="1">
                 <a:solidFill>
-                  <a:srgbClr val="9C27B0"/>
+                  <a:srgbClr val="6A3D9A"/>
                 </a:solidFill>
                 <a:latin typeface="Calibri"/>
               </a:rPr>
@@ -5935,7 +6039,7 @@
             <a:r>
               <a:rPr sz="1100" b="0" i="0">
                 <a:solidFill>
-                  <a:srgbClr val="0F1433"/>
+                  <a:srgbClr val="16171B"/>
                 </a:solidFill>
                 <a:latin typeface="Calibri"/>
               </a:rPr>
@@ -5959,7 +6063,7 @@
             <a:avLst/>
           </a:prstGeom>
           <a:solidFill>
-            <a:srgbClr val="F0F0F0"/>
+            <a:srgbClr val="F4F3F0"/>
           </a:solidFill>
           <a:ln>
             <a:noFill/>
@@ -6003,7 +6107,7 @@
             <a:avLst/>
           </a:prstGeom>
           <a:solidFill>
-            <a:srgbClr val="E53935"/>
+            <a:srgbClr val="C62828"/>
           </a:solidFill>
           <a:ln>
             <a:noFill/>
@@ -6093,7 +6197,7 @@
             <a:r>
               <a:rPr sz="1500" b="1" i="0">
                 <a:solidFill>
-                  <a:srgbClr val="1E2761"/>
+                  <a:srgbClr val="23242A"/>
                 </a:solidFill>
                 <a:latin typeface="Calibri"/>
               </a:rPr>
@@ -6128,7 +6232,7 @@
             <a:r>
               <a:rPr sz="1000" b="0" i="1">
                 <a:solidFill>
-                  <a:srgbClr val="E53935"/>
+                  <a:srgbClr val="C62828"/>
                 </a:solidFill>
                 <a:latin typeface="Calibri"/>
               </a:rPr>
@@ -6163,7 +6267,7 @@
             <a:r>
               <a:rPr sz="1100" b="0" i="0">
                 <a:solidFill>
-                  <a:srgbClr val="0F1433"/>
+                  <a:srgbClr val="16171B"/>
                 </a:solidFill>
                 <a:latin typeface="Calibri"/>
               </a:rPr>
@@ -6198,7 +6302,7 @@
             <a:r>
               <a:rPr sz="900" b="0" i="0">
                 <a:solidFill>
-                  <a:srgbClr val="606060"/>
+                  <a:srgbClr val="6B6D76"/>
                 </a:solidFill>
                 <a:latin typeface="Calibri"/>
               </a:rPr>
@@ -6215,7 +6319,7 @@
 </p:sld>
 </file>
 
-<file path=ppt/slides/slide12.xml><?xml version="1.0" encoding="utf-8"?>
+<file path=ppt\slides\slide12.xml><?xml version="1.0" encoding="utf-8"?>
 <p:sld xmlns:a="http://schemas.openxmlformats.org/drawingml/2006/main" xmlns:r="http://schemas.openxmlformats.org/officeDocument/2006/relationships" xmlns:p="http://schemas.openxmlformats.org/presentationml/2006/main">
   <p:cSld>
     <p:spTree>
@@ -6247,7 +6351,7 @@
             <a:avLst/>
           </a:prstGeom>
           <a:solidFill>
-            <a:srgbClr val="1E2761"/>
+            <a:srgbClr val="23242A"/>
           </a:solidFill>
           <a:ln>
             <a:noFill/>
@@ -6337,7 +6441,7 @@
             <a:r>
               <a:rPr sz="1200" b="0" i="1">
                 <a:solidFill>
-                  <a:srgbClr val="CADCFC"/>
+                  <a:srgbClr val="C8C9D0"/>
                 </a:solidFill>
                 <a:latin typeface="Calibri"/>
               </a:rPr>
@@ -6361,7 +6465,7 @@
             <a:avLst/>
           </a:prstGeom>
           <a:solidFill>
-            <a:srgbClr val="E53935"/>
+            <a:srgbClr val="C62828"/>
           </a:solidFill>
           <a:ln>
             <a:noFill/>
@@ -6554,7 +6658,7 @@
             <a:avLst/>
           </a:prstGeom>
           <a:solidFill>
-            <a:srgbClr val="0F1433"/>
+            <a:srgbClr val="16171B"/>
           </a:solidFill>
           <a:ln>
             <a:noFill/>
@@ -6609,7 +6713,7 @@
             <a:r>
               <a:rPr sz="900" b="1" i="0">
                 <a:solidFill>
-                  <a:srgbClr val="D4AF37"/>
+                  <a:srgbClr val="C9A227"/>
                 </a:solidFill>
                 <a:latin typeface="Calibri"/>
               </a:rPr>
@@ -6703,7 +6807,7 @@
             <a:avLst/>
           </a:prstGeom>
           <a:solidFill>
-            <a:srgbClr val="9C27B0"/>
+            <a:srgbClr val="6A3D9A"/>
           </a:solidFill>
           <a:ln>
             <a:noFill/>
@@ -6896,7 +7000,7 @@
             <a:avLst/>
           </a:prstGeom>
           <a:solidFill>
-            <a:srgbClr val="0F1433"/>
+            <a:srgbClr val="16171B"/>
           </a:solidFill>
           <a:ln>
             <a:noFill/>
@@ -6951,7 +7055,7 @@
             <a:r>
               <a:rPr sz="900" b="1" i="0">
                 <a:solidFill>
-                  <a:srgbClr val="D4AF37"/>
+                  <a:srgbClr val="C9A227"/>
                 </a:solidFill>
                 <a:latin typeface="Calibri"/>
               </a:rPr>
@@ -7045,7 +7149,7 @@
             <a:avLst/>
           </a:prstGeom>
           <a:solidFill>
-            <a:srgbClr val="2196F3"/>
+            <a:srgbClr val="2C5F8A"/>
           </a:solidFill>
           <a:ln>
             <a:noFill/>
@@ -7238,7 +7342,7 @@
             <a:avLst/>
           </a:prstGeom>
           <a:solidFill>
-            <a:srgbClr val="0F1433"/>
+            <a:srgbClr val="16171B"/>
           </a:solidFill>
           <a:ln>
             <a:noFill/>
@@ -7293,7 +7397,7 @@
             <a:r>
               <a:rPr sz="900" b="1" i="0">
                 <a:solidFill>
-                  <a:srgbClr val="D4AF37"/>
+                  <a:srgbClr val="C9A227"/>
                 </a:solidFill>
                 <a:latin typeface="Calibri"/>
               </a:rPr>
@@ -7387,7 +7491,7 @@
             <a:avLst/>
           </a:prstGeom>
           <a:solidFill>
-            <a:srgbClr val="D4AF37"/>
+            <a:srgbClr val="C9A227"/>
           </a:solidFill>
           <a:ln>
             <a:noFill/>
@@ -7580,7 +7684,7 @@
             <a:avLst/>
           </a:prstGeom>
           <a:solidFill>
-            <a:srgbClr val="0F1433"/>
+            <a:srgbClr val="16171B"/>
           </a:solidFill>
           <a:ln>
             <a:noFill/>
@@ -7635,7 +7739,7 @@
             <a:r>
               <a:rPr sz="900" b="1" i="0">
                 <a:solidFill>
-                  <a:srgbClr val="D4AF37"/>
+                  <a:srgbClr val="C9A227"/>
                 </a:solidFill>
                 <a:latin typeface="Calibri"/>
               </a:rPr>
@@ -7740,7 +7844,7 @@
             <a:r>
               <a:rPr sz="1100" b="0" i="1">
                 <a:solidFill>
-                  <a:srgbClr val="606060"/>
+                  <a:srgbClr val="6B6D76"/>
                 </a:solidFill>
                 <a:latin typeface="Calibri"/>
               </a:rPr>
@@ -7775,7 +7879,7 @@
             <a:r>
               <a:rPr sz="900" b="0" i="0">
                 <a:solidFill>
-                  <a:srgbClr val="606060"/>
+                  <a:srgbClr val="6B6D76"/>
                 </a:solidFill>
                 <a:latin typeface="Calibri"/>
               </a:rPr>
@@ -7792,7 +7896,7 @@
 </p:sld>
 </file>
 
-<file path=ppt/slides/slide13.xml><?xml version="1.0" encoding="utf-8"?>
+<file path=ppt\slides\slide13.xml><?xml version="1.0" encoding="utf-8"?>
 <p:sld xmlns:a="http://schemas.openxmlformats.org/drawingml/2006/main" xmlns:r="http://schemas.openxmlformats.org/officeDocument/2006/relationships" xmlns:p="http://schemas.openxmlformats.org/presentationml/2006/main">
   <p:cSld>
     <p:spTree>
@@ -7824,7 +7928,7 @@
             <a:avLst/>
           </a:prstGeom>
           <a:solidFill>
-            <a:srgbClr val="1E2761"/>
+            <a:srgbClr val="23242A"/>
           </a:solidFill>
           <a:ln>
             <a:noFill/>
@@ -7883,7 +7987,7 @@
                 </a:solidFill>
                 <a:latin typeface="Calibri"/>
               </a:rPr>
-              <a:t>6 Quality Gates  ·  Payment Milestones</a:t>
+              <a:t>6 Quality Gates  |  Payment Milestones</a:t>
             </a:r>
           </a:p>
         </p:txBody>
@@ -7914,7 +8018,7 @@
             <a:r>
               <a:rPr sz="1200" b="0" i="1">
                 <a:solidFill>
-                  <a:srgbClr val="CADCFC"/>
+                  <a:srgbClr val="C8C9D0"/>
                 </a:solidFill>
                 <a:latin typeface="Calibri"/>
               </a:rPr>
@@ -7938,7 +8042,7 @@
             <a:avLst/>
           </a:prstGeom>
           <a:solidFill>
-            <a:srgbClr val="2196F3"/>
+            <a:srgbClr val="2C5F8A"/>
           </a:solidFill>
           <a:ln>
             <a:noFill/>
@@ -8017,7 +8121,7 @@
             <a:avLst/>
           </a:prstGeom>
           <a:solidFill>
-            <a:srgbClr val="0F1433"/>
+            <a:srgbClr val="16171B"/>
           </a:solidFill>
           <a:ln>
             <a:noFill/>
@@ -8072,7 +8176,7 @@
             <a:r>
               <a:rPr sz="2000" b="1" i="0">
                 <a:solidFill>
-                  <a:srgbClr val="D4AF37"/>
+                  <a:srgbClr val="C9A227"/>
                 </a:solidFill>
                 <a:latin typeface="Calibri"/>
               </a:rPr>
@@ -8096,7 +8200,7 @@
             <a:avLst/>
           </a:prstGeom>
           <a:solidFill>
-            <a:srgbClr val="F0F0F0"/>
+            <a:srgbClr val="F4F3F0"/>
           </a:solidFill>
           <a:ln>
             <a:noFill/>
@@ -8151,7 +8255,7 @@
             <a:r>
               <a:rPr sz="1300" b="1" i="0">
                 <a:solidFill>
-                  <a:srgbClr val="1E2761"/>
+                  <a:srgbClr val="23242A"/>
                 </a:solidFill>
                 <a:latin typeface="Calibri"/>
               </a:rPr>
@@ -8186,7 +8290,7 @@
             <a:r>
               <a:rPr sz="1000" b="0" i="0">
                 <a:solidFill>
-                  <a:srgbClr val="0F1433"/>
+                  <a:srgbClr val="16171B"/>
                 </a:solidFill>
                 <a:latin typeface="Calibri"/>
               </a:rPr>
@@ -8210,7 +8314,7 @@
             <a:avLst/>
           </a:prstGeom>
           <a:solidFill>
-            <a:srgbClr val="D4AF37"/>
+            <a:srgbClr val="C9A227"/>
           </a:solidFill>
           <a:ln>
             <a:noFill/>
@@ -8265,7 +8369,7 @@
             <a:r>
               <a:rPr sz="2400" b="1" i="0">
                 <a:solidFill>
-                  <a:srgbClr val="1E2761"/>
+                  <a:srgbClr val="23242A"/>
                 </a:solidFill>
                 <a:latin typeface="Calibri"/>
               </a:rPr>
@@ -8289,7 +8393,7 @@
             <a:avLst/>
           </a:prstGeom>
           <a:solidFill>
-            <a:srgbClr val="4CAF50"/>
+            <a:srgbClr val="2E7D32"/>
           </a:solidFill>
           <a:ln>
             <a:noFill/>
@@ -8368,7 +8472,7 @@
             <a:avLst/>
           </a:prstGeom>
           <a:solidFill>
-            <a:srgbClr val="0F1433"/>
+            <a:srgbClr val="16171B"/>
           </a:solidFill>
           <a:ln>
             <a:noFill/>
@@ -8423,7 +8527,7 @@
             <a:r>
               <a:rPr sz="2000" b="1" i="0">
                 <a:solidFill>
-                  <a:srgbClr val="D4AF37"/>
+                  <a:srgbClr val="C9A227"/>
                 </a:solidFill>
                 <a:latin typeface="Calibri"/>
               </a:rPr>
@@ -8447,7 +8551,7 @@
             <a:avLst/>
           </a:prstGeom>
           <a:solidFill>
-            <a:srgbClr val="F0F0F0"/>
+            <a:srgbClr val="F4F3F0"/>
           </a:solidFill>
           <a:ln>
             <a:noFill/>
@@ -8502,7 +8606,7 @@
             <a:r>
               <a:rPr sz="1300" b="1" i="0">
                 <a:solidFill>
-                  <a:srgbClr val="1E2761"/>
+                  <a:srgbClr val="23242A"/>
                 </a:solidFill>
                 <a:latin typeface="Calibri"/>
               </a:rPr>
@@ -8537,7 +8641,7 @@
             <a:r>
               <a:rPr sz="1000" b="0" i="0">
                 <a:solidFill>
-                  <a:srgbClr val="0F1433"/>
+                  <a:srgbClr val="16171B"/>
                 </a:solidFill>
                 <a:latin typeface="Calibri"/>
               </a:rPr>
@@ -8561,7 +8665,7 @@
             <a:avLst/>
           </a:prstGeom>
           <a:solidFill>
-            <a:srgbClr val="D4AF37"/>
+            <a:srgbClr val="C9A227"/>
           </a:solidFill>
           <a:ln>
             <a:noFill/>
@@ -8616,7 +8720,7 @@
             <a:r>
               <a:rPr sz="2400" b="1" i="0">
                 <a:solidFill>
-                  <a:srgbClr val="1E2761"/>
+                  <a:srgbClr val="23242A"/>
                 </a:solidFill>
                 <a:latin typeface="Calibri"/>
               </a:rPr>
@@ -8640,7 +8744,7 @@
             <a:avLst/>
           </a:prstGeom>
           <a:solidFill>
-            <a:srgbClr val="D4AF37"/>
+            <a:srgbClr val="C9A227"/>
           </a:solidFill>
           <a:ln>
             <a:noFill/>
@@ -8719,7 +8823,7 @@
             <a:avLst/>
           </a:prstGeom>
           <a:solidFill>
-            <a:srgbClr val="0F1433"/>
+            <a:srgbClr val="16171B"/>
           </a:solidFill>
           <a:ln>
             <a:noFill/>
@@ -8774,7 +8878,7 @@
             <a:r>
               <a:rPr sz="2000" b="1" i="0">
                 <a:solidFill>
-                  <a:srgbClr val="D4AF37"/>
+                  <a:srgbClr val="C9A227"/>
                 </a:solidFill>
                 <a:latin typeface="Calibri"/>
               </a:rPr>
@@ -8798,7 +8902,7 @@
             <a:avLst/>
           </a:prstGeom>
           <a:solidFill>
-            <a:srgbClr val="F0F0F0"/>
+            <a:srgbClr val="F4F3F0"/>
           </a:solidFill>
           <a:ln>
             <a:noFill/>
@@ -8853,7 +8957,7 @@
             <a:r>
               <a:rPr sz="1300" b="1" i="0">
                 <a:solidFill>
-                  <a:srgbClr val="1E2761"/>
+                  <a:srgbClr val="23242A"/>
                 </a:solidFill>
                 <a:latin typeface="Calibri"/>
               </a:rPr>
@@ -8888,7 +8992,7 @@
             <a:r>
               <a:rPr sz="1000" b="0" i="0">
                 <a:solidFill>
-                  <a:srgbClr val="0F1433"/>
+                  <a:srgbClr val="16171B"/>
                 </a:solidFill>
                 <a:latin typeface="Calibri"/>
               </a:rPr>
@@ -8912,7 +9016,7 @@
             <a:avLst/>
           </a:prstGeom>
           <a:solidFill>
-            <a:srgbClr val="D4AF37"/>
+            <a:srgbClr val="C9A227"/>
           </a:solidFill>
           <a:ln>
             <a:noFill/>
@@ -8967,7 +9071,7 @@
             <a:r>
               <a:rPr sz="2400" b="1" i="0">
                 <a:solidFill>
-                  <a:srgbClr val="1E2761"/>
+                  <a:srgbClr val="23242A"/>
                 </a:solidFill>
                 <a:latin typeface="Calibri"/>
               </a:rPr>
@@ -8991,7 +9095,7 @@
             <a:avLst/>
           </a:prstGeom>
           <a:solidFill>
-            <a:srgbClr val="E97132"/>
+            <a:srgbClr val="B26A00"/>
           </a:solidFill>
           <a:ln>
             <a:noFill/>
@@ -9070,7 +9174,7 @@
             <a:avLst/>
           </a:prstGeom>
           <a:solidFill>
-            <a:srgbClr val="0F1433"/>
+            <a:srgbClr val="16171B"/>
           </a:solidFill>
           <a:ln>
             <a:noFill/>
@@ -9125,7 +9229,7 @@
             <a:r>
               <a:rPr sz="2000" b="1" i="0">
                 <a:solidFill>
-                  <a:srgbClr val="D4AF37"/>
+                  <a:srgbClr val="C9A227"/>
                 </a:solidFill>
                 <a:latin typeface="Calibri"/>
               </a:rPr>
@@ -9149,7 +9253,7 @@
             <a:avLst/>
           </a:prstGeom>
           <a:solidFill>
-            <a:srgbClr val="F0F0F0"/>
+            <a:srgbClr val="F4F3F0"/>
           </a:solidFill>
           <a:ln>
             <a:noFill/>
@@ -9204,7 +9308,7 @@
             <a:r>
               <a:rPr sz="1300" b="1" i="0">
                 <a:solidFill>
-                  <a:srgbClr val="1E2761"/>
+                  <a:srgbClr val="23242A"/>
                 </a:solidFill>
                 <a:latin typeface="Calibri"/>
               </a:rPr>
@@ -9239,7 +9343,7 @@
             <a:r>
               <a:rPr sz="1000" b="0" i="0">
                 <a:solidFill>
-                  <a:srgbClr val="0F1433"/>
+                  <a:srgbClr val="16171B"/>
                 </a:solidFill>
                 <a:latin typeface="Calibri"/>
               </a:rPr>
@@ -9263,7 +9367,7 @@
             <a:avLst/>
           </a:prstGeom>
           <a:solidFill>
-            <a:srgbClr val="D4AF37"/>
+            <a:srgbClr val="C9A227"/>
           </a:solidFill>
           <a:ln>
             <a:noFill/>
@@ -9318,7 +9422,7 @@
             <a:r>
               <a:rPr sz="2400" b="1" i="0">
                 <a:solidFill>
-                  <a:srgbClr val="1E2761"/>
+                  <a:srgbClr val="23242A"/>
                 </a:solidFill>
                 <a:latin typeface="Calibri"/>
               </a:rPr>
@@ -9342,7 +9446,7 @@
             <a:avLst/>
           </a:prstGeom>
           <a:solidFill>
-            <a:srgbClr val="9C27B0"/>
+            <a:srgbClr val="6A3D9A"/>
           </a:solidFill>
           <a:ln>
             <a:noFill/>
@@ -9421,7 +9525,7 @@
             <a:avLst/>
           </a:prstGeom>
           <a:solidFill>
-            <a:srgbClr val="0F1433"/>
+            <a:srgbClr val="16171B"/>
           </a:solidFill>
           <a:ln>
             <a:noFill/>
@@ -9476,7 +9580,7 @@
             <a:r>
               <a:rPr sz="2000" b="1" i="0">
                 <a:solidFill>
-                  <a:srgbClr val="D4AF37"/>
+                  <a:srgbClr val="C9A227"/>
                 </a:solidFill>
                 <a:latin typeface="Calibri"/>
               </a:rPr>
@@ -9500,7 +9604,7 @@
             <a:avLst/>
           </a:prstGeom>
           <a:solidFill>
-            <a:srgbClr val="F0F0F0"/>
+            <a:srgbClr val="F4F3F0"/>
           </a:solidFill>
           <a:ln>
             <a:noFill/>
@@ -9555,7 +9659,7 @@
             <a:r>
               <a:rPr sz="1300" b="1" i="0">
                 <a:solidFill>
-                  <a:srgbClr val="1E2761"/>
+                  <a:srgbClr val="23242A"/>
                 </a:solidFill>
                 <a:latin typeface="Calibri"/>
               </a:rPr>
@@ -9590,7 +9694,7 @@
             <a:r>
               <a:rPr sz="1000" b="0" i="0">
                 <a:solidFill>
-                  <a:srgbClr val="0F1433"/>
+                  <a:srgbClr val="16171B"/>
                 </a:solidFill>
                 <a:latin typeface="Calibri"/>
               </a:rPr>
@@ -9614,7 +9718,7 @@
             <a:avLst/>
           </a:prstGeom>
           <a:solidFill>
-            <a:srgbClr val="D4AF37"/>
+            <a:srgbClr val="C9A227"/>
           </a:solidFill>
           <a:ln>
             <a:noFill/>
@@ -9669,7 +9773,7 @@
             <a:r>
               <a:rPr sz="2400" b="1" i="0">
                 <a:solidFill>
-                  <a:srgbClr val="1E2761"/>
+                  <a:srgbClr val="23242A"/>
                 </a:solidFill>
                 <a:latin typeface="Calibri"/>
               </a:rPr>
@@ -9693,7 +9797,7 @@
             <a:avLst/>
           </a:prstGeom>
           <a:solidFill>
-            <a:srgbClr val="E53935"/>
+            <a:srgbClr val="C62828"/>
           </a:solidFill>
           <a:ln>
             <a:noFill/>
@@ -9772,7 +9876,7 @@
             <a:avLst/>
           </a:prstGeom>
           <a:solidFill>
-            <a:srgbClr val="0F1433"/>
+            <a:srgbClr val="16171B"/>
           </a:solidFill>
           <a:ln>
             <a:noFill/>
@@ -9827,7 +9931,7 @@
             <a:r>
               <a:rPr sz="2000" b="1" i="0">
                 <a:solidFill>
-                  <a:srgbClr val="D4AF37"/>
+                  <a:srgbClr val="C9A227"/>
                 </a:solidFill>
                 <a:latin typeface="Calibri"/>
               </a:rPr>
@@ -9851,7 +9955,7 @@
             <a:avLst/>
           </a:prstGeom>
           <a:solidFill>
-            <a:srgbClr val="F0F0F0"/>
+            <a:srgbClr val="F4F3F0"/>
           </a:solidFill>
           <a:ln>
             <a:noFill/>
@@ -9906,7 +10010,7 @@
             <a:r>
               <a:rPr sz="1300" b="1" i="0">
                 <a:solidFill>
-                  <a:srgbClr val="1E2761"/>
+                  <a:srgbClr val="23242A"/>
                 </a:solidFill>
                 <a:latin typeface="Calibri"/>
               </a:rPr>
@@ -9941,7 +10045,7 @@
             <a:r>
               <a:rPr sz="1000" b="0" i="0">
                 <a:solidFill>
-                  <a:srgbClr val="0F1433"/>
+                  <a:srgbClr val="16171B"/>
                 </a:solidFill>
                 <a:latin typeface="Calibri"/>
               </a:rPr>
@@ -9965,7 +10069,7 @@
             <a:avLst/>
           </a:prstGeom>
           <a:solidFill>
-            <a:srgbClr val="D4AF37"/>
+            <a:srgbClr val="C9A227"/>
           </a:solidFill>
           <a:ln>
             <a:noFill/>
@@ -10020,7 +10124,7 @@
             <a:r>
               <a:rPr sz="2400" b="1" i="0">
                 <a:solidFill>
-                  <a:srgbClr val="1E2761"/>
+                  <a:srgbClr val="23242A"/>
                 </a:solidFill>
                 <a:latin typeface="Calibri"/>
               </a:rPr>
@@ -10055,7 +10159,7 @@
             <a:r>
               <a:rPr sz="900" b="0" i="0">
                 <a:solidFill>
-                  <a:srgbClr val="606060"/>
+                  <a:srgbClr val="6B6D76"/>
                 </a:solidFill>
                 <a:latin typeface="Calibri"/>
               </a:rPr>
@@ -10072,7 +10176,7 @@
 </p:sld>
 </file>
 
-<file path=ppt/slides/slide14.xml><?xml version="1.0" encoding="utf-8"?>
+<file path=ppt\slides\slide14.xml><?xml version="1.0" encoding="utf-8"?>
 <p:sld xmlns:a="http://schemas.openxmlformats.org/drawingml/2006/main" xmlns:r="http://schemas.openxmlformats.org/officeDocument/2006/relationships" xmlns:p="http://schemas.openxmlformats.org/presentationml/2006/main">
   <p:cSld>
     <p:spTree>
@@ -10104,7 +10208,7 @@
             <a:avLst/>
           </a:prstGeom>
           <a:solidFill>
-            <a:srgbClr val="1E2761"/>
+            <a:srgbClr val="23242A"/>
           </a:solidFill>
           <a:ln>
             <a:noFill/>
@@ -10163,7 +10267,7 @@
                 </a:solidFill>
                 <a:latin typeface="Calibri"/>
               </a:rPr>
-              <a:t>Payment Distribution  ·  Year 1</a:t>
+              <a:t>Payment Distribution  |  Year 1</a:t>
             </a:r>
           </a:p>
         </p:txBody>
@@ -10194,7 +10298,7 @@
             <a:r>
               <a:rPr sz="1200" b="0" i="1">
                 <a:solidFill>
-                  <a:srgbClr val="CADCFC"/>
+                  <a:srgbClr val="C8C9D0"/>
                 </a:solidFill>
                 <a:latin typeface="Calibri"/>
               </a:rPr>
@@ -10229,7 +10333,7 @@
             <a:r>
               <a:rPr sz="1400" b="1" i="0">
                 <a:solidFill>
-                  <a:srgbClr val="1E2761"/>
+                  <a:srgbClr val="23242A"/>
                 </a:solidFill>
                 <a:latin typeface="Calibri"/>
               </a:rPr>
@@ -10253,7 +10357,7 @@
             <a:avLst/>
           </a:prstGeom>
           <a:solidFill>
-            <a:srgbClr val="F0F0F0"/>
+            <a:srgbClr val="F4F3F0"/>
           </a:solidFill>
           <a:ln>
             <a:noFill/>
@@ -10297,7 +10401,7 @@
             <a:avLst/>
           </a:prstGeom>
           <a:solidFill>
-            <a:srgbClr val="D4AF37"/>
+            <a:srgbClr val="C9A227"/>
           </a:solidFill>
           <a:ln>
             <a:noFill/>
@@ -10352,7 +10456,7 @@
             <a:r>
               <a:rPr sz="1000" b="1" i="0">
                 <a:solidFill>
-                  <a:srgbClr val="1E2761"/>
+                  <a:srgbClr val="23242A"/>
                 </a:solidFill>
                 <a:latin typeface="Calibri"/>
               </a:rPr>
@@ -10387,7 +10491,7 @@
             <a:r>
               <a:rPr sz="1000" b="0" i="0">
                 <a:solidFill>
-                  <a:srgbClr val="0F1433"/>
+                  <a:srgbClr val="16171B"/>
                 </a:solidFill>
                 <a:latin typeface="Calibri"/>
               </a:rPr>
@@ -10422,7 +10526,7 @@
             <a:r>
               <a:rPr sz="1100" b="1" i="0">
                 <a:solidFill>
-                  <a:srgbClr val="1E2761"/>
+                  <a:srgbClr val="23242A"/>
                 </a:solidFill>
                 <a:latin typeface="Calibri"/>
               </a:rPr>
@@ -10457,7 +10561,7 @@
             <a:r>
               <a:rPr sz="1000" b="0" i="1">
                 <a:solidFill>
-                  <a:srgbClr val="606060"/>
+                  <a:srgbClr val="6B6D76"/>
                 </a:solidFill>
                 <a:latin typeface="Calibri"/>
               </a:rPr>
@@ -10481,7 +10585,7 @@
             <a:avLst/>
           </a:prstGeom>
           <a:solidFill>
-            <a:srgbClr val="F0F0F0"/>
+            <a:srgbClr val="F4F3F0"/>
           </a:solidFill>
           <a:ln>
             <a:noFill/>
@@ -10525,7 +10629,7 @@
             <a:avLst/>
           </a:prstGeom>
           <a:solidFill>
-            <a:srgbClr val="D4AF37"/>
+            <a:srgbClr val="C9A227"/>
           </a:solidFill>
           <a:ln>
             <a:noFill/>
@@ -10580,7 +10684,7 @@
             <a:r>
               <a:rPr sz="1000" b="1" i="0">
                 <a:solidFill>
-                  <a:srgbClr val="1E2761"/>
+                  <a:srgbClr val="23242A"/>
                 </a:solidFill>
                 <a:latin typeface="Calibri"/>
               </a:rPr>
@@ -10615,7 +10719,7 @@
             <a:r>
               <a:rPr sz="1000" b="0" i="0">
                 <a:solidFill>
-                  <a:srgbClr val="0F1433"/>
+                  <a:srgbClr val="16171B"/>
                 </a:solidFill>
                 <a:latin typeface="Calibri"/>
               </a:rPr>
@@ -10650,7 +10754,7 @@
             <a:r>
               <a:rPr sz="1100" b="1" i="0">
                 <a:solidFill>
-                  <a:srgbClr val="1E2761"/>
+                  <a:srgbClr val="23242A"/>
                 </a:solidFill>
                 <a:latin typeface="Calibri"/>
               </a:rPr>
@@ -10685,7 +10789,7 @@
             <a:r>
               <a:rPr sz="1000" b="0" i="1">
                 <a:solidFill>
-                  <a:srgbClr val="606060"/>
+                  <a:srgbClr val="6B6D76"/>
                 </a:solidFill>
                 <a:latin typeface="Calibri"/>
               </a:rPr>
@@ -10709,7 +10813,7 @@
             <a:avLst/>
           </a:prstGeom>
           <a:solidFill>
-            <a:srgbClr val="F0F0F0"/>
+            <a:srgbClr val="F4F3F0"/>
           </a:solidFill>
           <a:ln>
             <a:noFill/>
@@ -10753,7 +10857,7 @@
             <a:avLst/>
           </a:prstGeom>
           <a:solidFill>
-            <a:srgbClr val="D4AF37"/>
+            <a:srgbClr val="C9A227"/>
           </a:solidFill>
           <a:ln>
             <a:noFill/>
@@ -10808,7 +10912,7 @@
             <a:r>
               <a:rPr sz="1000" b="1" i="0">
                 <a:solidFill>
-                  <a:srgbClr val="1E2761"/>
+                  <a:srgbClr val="23242A"/>
                 </a:solidFill>
                 <a:latin typeface="Calibri"/>
               </a:rPr>
@@ -10843,7 +10947,7 @@
             <a:r>
               <a:rPr sz="1000" b="0" i="0">
                 <a:solidFill>
-                  <a:srgbClr val="0F1433"/>
+                  <a:srgbClr val="16171B"/>
                 </a:solidFill>
                 <a:latin typeface="Calibri"/>
               </a:rPr>
@@ -10878,7 +10982,7 @@
             <a:r>
               <a:rPr sz="1100" b="1" i="0">
                 <a:solidFill>
-                  <a:srgbClr val="1E2761"/>
+                  <a:srgbClr val="23242A"/>
                 </a:solidFill>
                 <a:latin typeface="Calibri"/>
               </a:rPr>
@@ -10913,7 +11017,7 @@
             <a:r>
               <a:rPr sz="1000" b="0" i="1">
                 <a:solidFill>
-                  <a:srgbClr val="606060"/>
+                  <a:srgbClr val="6B6D76"/>
                 </a:solidFill>
                 <a:latin typeface="Calibri"/>
               </a:rPr>
@@ -10937,7 +11041,7 @@
             <a:avLst/>
           </a:prstGeom>
           <a:solidFill>
-            <a:srgbClr val="F0F0F0"/>
+            <a:srgbClr val="F4F3F0"/>
           </a:solidFill>
           <a:ln>
             <a:noFill/>
@@ -10981,7 +11085,7 @@
             <a:avLst/>
           </a:prstGeom>
           <a:solidFill>
-            <a:srgbClr val="D4AF37"/>
+            <a:srgbClr val="C9A227"/>
           </a:solidFill>
           <a:ln>
             <a:noFill/>
@@ -11036,7 +11140,7 @@
             <a:r>
               <a:rPr sz="1000" b="1" i="0">
                 <a:solidFill>
-                  <a:srgbClr val="1E2761"/>
+                  <a:srgbClr val="23242A"/>
                 </a:solidFill>
                 <a:latin typeface="Calibri"/>
               </a:rPr>
@@ -11071,7 +11175,7 @@
             <a:r>
               <a:rPr sz="1000" b="0" i="0">
                 <a:solidFill>
-                  <a:srgbClr val="0F1433"/>
+                  <a:srgbClr val="16171B"/>
                 </a:solidFill>
                 <a:latin typeface="Calibri"/>
               </a:rPr>
@@ -11106,7 +11210,7 @@
             <a:r>
               <a:rPr sz="1100" b="1" i="0">
                 <a:solidFill>
-                  <a:srgbClr val="1E2761"/>
+                  <a:srgbClr val="23242A"/>
                 </a:solidFill>
                 <a:latin typeface="Calibri"/>
               </a:rPr>
@@ -11141,7 +11245,7 @@
             <a:r>
               <a:rPr sz="1000" b="0" i="1">
                 <a:solidFill>
-                  <a:srgbClr val="606060"/>
+                  <a:srgbClr val="6B6D76"/>
                 </a:solidFill>
                 <a:latin typeface="Calibri"/>
               </a:rPr>
@@ -11165,7 +11269,7 @@
             <a:avLst/>
           </a:prstGeom>
           <a:solidFill>
-            <a:srgbClr val="F0F0F0"/>
+            <a:srgbClr val="F4F3F0"/>
           </a:solidFill>
           <a:ln>
             <a:noFill/>
@@ -11209,7 +11313,7 @@
             <a:avLst/>
           </a:prstGeom>
           <a:solidFill>
-            <a:srgbClr val="D4AF37"/>
+            <a:srgbClr val="C9A227"/>
           </a:solidFill>
           <a:ln>
             <a:noFill/>
@@ -11264,7 +11368,7 @@
             <a:r>
               <a:rPr sz="1000" b="1" i="0">
                 <a:solidFill>
-                  <a:srgbClr val="1E2761"/>
+                  <a:srgbClr val="23242A"/>
                 </a:solidFill>
                 <a:latin typeface="Calibri"/>
               </a:rPr>
@@ -11299,7 +11403,7 @@
             <a:r>
               <a:rPr sz="1000" b="0" i="0">
                 <a:solidFill>
-                  <a:srgbClr val="0F1433"/>
+                  <a:srgbClr val="16171B"/>
                 </a:solidFill>
                 <a:latin typeface="Calibri"/>
               </a:rPr>
@@ -11334,7 +11438,7 @@
             <a:r>
               <a:rPr sz="1100" b="1" i="0">
                 <a:solidFill>
-                  <a:srgbClr val="1E2761"/>
+                  <a:srgbClr val="23242A"/>
                 </a:solidFill>
                 <a:latin typeface="Calibri"/>
               </a:rPr>
@@ -11369,7 +11473,7 @@
             <a:r>
               <a:rPr sz="1000" b="0" i="1">
                 <a:solidFill>
-                  <a:srgbClr val="606060"/>
+                  <a:srgbClr val="6B6D76"/>
                 </a:solidFill>
                 <a:latin typeface="Calibri"/>
               </a:rPr>
@@ -11393,7 +11497,7 @@
             <a:avLst/>
           </a:prstGeom>
           <a:solidFill>
-            <a:srgbClr val="F0F0F0"/>
+            <a:srgbClr val="F4F3F0"/>
           </a:solidFill>
           <a:ln>
             <a:noFill/>
@@ -11437,7 +11541,7 @@
             <a:avLst/>
           </a:prstGeom>
           <a:solidFill>
-            <a:srgbClr val="D4AF37"/>
+            <a:srgbClr val="C9A227"/>
           </a:solidFill>
           <a:ln>
             <a:noFill/>
@@ -11492,7 +11596,7 @@
             <a:r>
               <a:rPr sz="1000" b="1" i="0">
                 <a:solidFill>
-                  <a:srgbClr val="1E2761"/>
+                  <a:srgbClr val="23242A"/>
                 </a:solidFill>
                 <a:latin typeface="Calibri"/>
               </a:rPr>
@@ -11527,7 +11631,7 @@
             <a:r>
               <a:rPr sz="1000" b="0" i="0">
                 <a:solidFill>
-                  <a:srgbClr val="0F1433"/>
+                  <a:srgbClr val="16171B"/>
                 </a:solidFill>
                 <a:latin typeface="Calibri"/>
               </a:rPr>
@@ -11562,7 +11666,7 @@
             <a:r>
               <a:rPr sz="1100" b="1" i="0">
                 <a:solidFill>
-                  <a:srgbClr val="1E2761"/>
+                  <a:srgbClr val="23242A"/>
                 </a:solidFill>
                 <a:latin typeface="Calibri"/>
               </a:rPr>
@@ -11597,7 +11701,7 @@
             <a:r>
               <a:rPr sz="1000" b="0" i="1">
                 <a:solidFill>
-                  <a:srgbClr val="606060"/>
+                  <a:srgbClr val="6B6D76"/>
                 </a:solidFill>
                 <a:latin typeface="Calibri"/>
               </a:rPr>
@@ -11621,7 +11725,7 @@
             <a:avLst/>
           </a:prstGeom>
           <a:solidFill>
-            <a:srgbClr val="F0F0F0"/>
+            <a:srgbClr val="F4F3F0"/>
           </a:solidFill>
           <a:ln>
             <a:noFill/>
@@ -11665,7 +11769,7 @@
             <a:avLst/>
           </a:prstGeom>
           <a:solidFill>
-            <a:srgbClr val="D4AF37"/>
+            <a:srgbClr val="C9A227"/>
           </a:solidFill>
           <a:ln>
             <a:noFill/>
@@ -11720,7 +11824,7 @@
             <a:r>
               <a:rPr sz="1000" b="1" i="0">
                 <a:solidFill>
-                  <a:srgbClr val="1E2761"/>
+                  <a:srgbClr val="23242A"/>
                 </a:solidFill>
                 <a:latin typeface="Calibri"/>
               </a:rPr>
@@ -11755,7 +11859,7 @@
             <a:r>
               <a:rPr sz="1000" b="0" i="0">
                 <a:solidFill>
-                  <a:srgbClr val="0F1433"/>
+                  <a:srgbClr val="16171B"/>
                 </a:solidFill>
                 <a:latin typeface="Calibri"/>
               </a:rPr>
@@ -11790,7 +11894,7 @@
             <a:r>
               <a:rPr sz="1100" b="1" i="0">
                 <a:solidFill>
-                  <a:srgbClr val="1E2761"/>
+                  <a:srgbClr val="23242A"/>
                 </a:solidFill>
                 <a:latin typeface="Calibri"/>
               </a:rPr>
@@ -11825,7 +11929,7 @@
             <a:r>
               <a:rPr sz="1000" b="0" i="1">
                 <a:solidFill>
-                  <a:srgbClr val="606060"/>
+                  <a:srgbClr val="6B6D76"/>
                 </a:solidFill>
                 <a:latin typeface="Calibri"/>
               </a:rPr>
@@ -11849,7 +11953,7 @@
             <a:avLst/>
           </a:prstGeom>
           <a:solidFill>
-            <a:srgbClr val="F0F0F0"/>
+            <a:srgbClr val="F4F3F0"/>
           </a:solidFill>
           <a:ln>
             <a:noFill/>
@@ -11893,7 +11997,7 @@
             <a:avLst/>
           </a:prstGeom>
           <a:solidFill>
-            <a:srgbClr val="D4AF37"/>
+            <a:srgbClr val="C9A227"/>
           </a:solidFill>
           <a:ln>
             <a:noFill/>
@@ -11948,7 +12052,7 @@
             <a:r>
               <a:rPr sz="1000" b="1" i="0">
                 <a:solidFill>
-                  <a:srgbClr val="1E2761"/>
+                  <a:srgbClr val="23242A"/>
                 </a:solidFill>
                 <a:latin typeface="Calibri"/>
               </a:rPr>
@@ -11983,7 +12087,7 @@
             <a:r>
               <a:rPr sz="1000" b="0" i="0">
                 <a:solidFill>
-                  <a:srgbClr val="0F1433"/>
+                  <a:srgbClr val="16171B"/>
                 </a:solidFill>
                 <a:latin typeface="Calibri"/>
               </a:rPr>
@@ -12018,7 +12122,7 @@
             <a:r>
               <a:rPr sz="1100" b="1" i="0">
                 <a:solidFill>
-                  <a:srgbClr val="1E2761"/>
+                  <a:srgbClr val="23242A"/>
                 </a:solidFill>
                 <a:latin typeface="Calibri"/>
               </a:rPr>
@@ -12053,7 +12157,7 @@
             <a:r>
               <a:rPr sz="1000" b="0" i="1">
                 <a:solidFill>
-                  <a:srgbClr val="606060"/>
+                  <a:srgbClr val="6B6D76"/>
                 </a:solidFill>
                 <a:latin typeface="Calibri"/>
               </a:rPr>
@@ -12077,7 +12181,7 @@
             <a:avLst/>
           </a:prstGeom>
           <a:solidFill>
-            <a:srgbClr val="1E2761"/>
+            <a:srgbClr val="23242A"/>
           </a:solidFill>
           <a:ln>
             <a:noFill/>
@@ -12132,7 +12236,7 @@
             <a:r>
               <a:rPr sz="1100" b="1" i="0">
                 <a:solidFill>
-                  <a:srgbClr val="D4AF37"/>
+                  <a:srgbClr val="C9A227"/>
                 </a:solidFill>
                 <a:latin typeface="Calibri"/>
               </a:rPr>
@@ -12167,7 +12271,7 @@
             <a:r>
               <a:rPr sz="1200" b="1" i="0">
                 <a:solidFill>
-                  <a:srgbClr val="D4AF37"/>
+                  <a:srgbClr val="C9A227"/>
                 </a:solidFill>
                 <a:latin typeface="Calibri"/>
               </a:rPr>
@@ -12226,7 +12330,7 @@
             <a:avLst/>
           </a:prstGeom>
           <a:solidFill>
-            <a:srgbClr val="1E2761"/>
+            <a:srgbClr val="23242A"/>
           </a:solidFill>
           <a:ln>
             <a:noFill/>
@@ -12281,7 +12385,7 @@
             <a:r>
               <a:rPr sz="1300" b="1" i="0">
                 <a:solidFill>
-                  <a:srgbClr val="D4AF37"/>
+                  <a:srgbClr val="C9A227"/>
                 </a:solidFill>
                 <a:latin typeface="Calibri"/>
               </a:rPr>
@@ -12351,7 +12455,7 @@
             <a:r>
               <a:rPr sz="2200" b="0" i="0">
                 <a:solidFill>
-                  <a:srgbClr val="CADCFC"/>
+                  <a:srgbClr val="C8C9D0"/>
                 </a:solidFill>
                 <a:latin typeface="Calibri"/>
               </a:rPr>
@@ -12375,7 +12479,7 @@
             <a:avLst/>
           </a:prstGeom>
           <a:solidFill>
-            <a:srgbClr val="D4AF37"/>
+            <a:srgbClr val="C9A227"/>
           </a:solidFill>
           <a:ln>
             <a:noFill/>
@@ -12430,7 +12534,7 @@
             <a:r>
               <a:rPr sz="1200" b="0" i="1">
                 <a:solidFill>
-                  <a:srgbClr val="CADCFC"/>
+                  <a:srgbClr val="C8C9D0"/>
                 </a:solidFill>
                 <a:latin typeface="Calibri"/>
               </a:rPr>
@@ -12465,7 +12569,7 @@
             <a:r>
               <a:rPr sz="1200" b="0" i="1">
                 <a:solidFill>
-                  <a:srgbClr val="CADCFC"/>
+                  <a:srgbClr val="C8C9D0"/>
                 </a:solidFill>
                 <a:latin typeface="Calibri"/>
               </a:rPr>
@@ -12489,7 +12593,7 @@
             <a:avLst/>
           </a:prstGeom>
           <a:solidFill>
-            <a:srgbClr val="D4AF37"/>
+            <a:srgbClr val="C9A227"/>
           </a:solidFill>
           <a:ln>
             <a:noFill/>
@@ -12544,7 +12648,7 @@
             <a:r>
               <a:rPr sz="1100" b="1" i="0">
                 <a:solidFill>
-                  <a:srgbClr val="1E2761"/>
+                  <a:srgbClr val="23242A"/>
                 </a:solidFill>
                 <a:latin typeface="Calibri"/>
               </a:rPr>
@@ -12579,7 +12683,7 @@
             <a:r>
               <a:rPr sz="1000" b="0" i="0">
                 <a:solidFill>
-                  <a:srgbClr val="1E2761"/>
+                  <a:srgbClr val="23242A"/>
                 </a:solidFill>
                 <a:latin typeface="Calibri"/>
               </a:rPr>
@@ -12614,7 +12718,7 @@
             <a:r>
               <a:rPr sz="900" b="0" i="0">
                 <a:solidFill>
-                  <a:srgbClr val="606060"/>
+                  <a:srgbClr val="6B6D76"/>
                 </a:solidFill>
                 <a:latin typeface="Calibri"/>
               </a:rPr>
@@ -12631,7 +12735,7 @@
 </p:sld>
 </file>
 
-<file path=ppt/slides/slide15.xml><?xml version="1.0" encoding="utf-8"?>
+<file path=ppt\slides\slide15.xml><?xml version="1.0" encoding="utf-8"?>
 <p:sld xmlns:a="http://schemas.openxmlformats.org/drawingml/2006/main" xmlns:r="http://schemas.openxmlformats.org/officeDocument/2006/relationships" xmlns:p="http://schemas.openxmlformats.org/presentationml/2006/main">
   <p:cSld>
     <p:spTree>
@@ -12663,7 +12767,7 @@
             <a:avLst/>
           </a:prstGeom>
           <a:solidFill>
-            <a:srgbClr val="1E2761"/>
+            <a:srgbClr val="23242A"/>
           </a:solidFill>
           <a:ln>
             <a:noFill/>
@@ -12722,7 +12826,7 @@
                 </a:solidFill>
                 <a:latin typeface="Calibri"/>
               </a:rPr>
-              <a:t>Risk Heat Map  ·  Top 25 Risks</a:t>
+              <a:t>Risk Heat Map  |  Top 25 Risks</a:t>
             </a:r>
           </a:p>
         </p:txBody>
@@ -12753,7 +12857,7 @@
             <a:r>
               <a:rPr sz="1200" b="0" i="1">
                 <a:solidFill>
-                  <a:srgbClr val="CADCFC"/>
+                  <a:srgbClr val="C8C9D0"/>
                 </a:solidFill>
                 <a:latin typeface="Calibri"/>
               </a:rPr>
@@ -12788,7 +12892,7 @@
             <a:r>
               <a:rPr sz="1000" b="1" i="0">
                 <a:solidFill>
-                  <a:srgbClr val="0F1433"/>
+                  <a:srgbClr val="16171B"/>
                 </a:solidFill>
                 <a:latin typeface="Calibri"/>
               </a:rPr>
@@ -12823,7 +12927,7 @@
             <a:r>
               <a:rPr sz="1000" b="1" i="0">
                 <a:solidFill>
-                  <a:srgbClr val="0F1433"/>
+                  <a:srgbClr val="16171B"/>
                 </a:solidFill>
                 <a:latin typeface="Calibri"/>
               </a:rPr>
@@ -12858,7 +12962,7 @@
             <a:r>
               <a:rPr sz="1000" b="1" i="0">
                 <a:solidFill>
-                  <a:srgbClr val="0F1433"/>
+                  <a:srgbClr val="16171B"/>
                 </a:solidFill>
                 <a:latin typeface="Calibri"/>
               </a:rPr>
@@ -12893,7 +12997,7 @@
             <a:r>
               <a:rPr sz="1100" b="1" i="0">
                 <a:solidFill>
-                  <a:srgbClr val="1E2761"/>
+                  <a:srgbClr val="23242A"/>
                 </a:solidFill>
                 <a:latin typeface="Calibri"/>
               </a:rPr>
@@ -12928,7 +13032,7 @@
             <a:r>
               <a:rPr sz="1000" b="1" i="0">
                 <a:solidFill>
-                  <a:srgbClr val="0F1433"/>
+                  <a:srgbClr val="16171B"/>
                 </a:solidFill>
                 <a:latin typeface="Calibri"/>
               </a:rPr>
@@ -12963,7 +13067,7 @@
             <a:r>
               <a:rPr sz="1000" b="1" i="0">
                 <a:solidFill>
-                  <a:srgbClr val="0F1433"/>
+                  <a:srgbClr val="16171B"/>
                 </a:solidFill>
                 <a:latin typeface="Calibri"/>
               </a:rPr>
@@ -12998,7 +13102,7 @@
             <a:r>
               <a:rPr sz="1000" b="1" i="0">
                 <a:solidFill>
-                  <a:srgbClr val="0F1433"/>
+                  <a:srgbClr val="16171B"/>
                 </a:solidFill>
                 <a:latin typeface="Calibri"/>
               </a:rPr>
@@ -13033,7 +13137,7 @@
             <a:r>
               <a:rPr sz="1100" b="1" i="0">
                 <a:solidFill>
-                  <a:srgbClr val="1E2761"/>
+                  <a:srgbClr val="23242A"/>
                 </a:solidFill>
                 <a:latin typeface="Calibri"/>
               </a:rPr>
@@ -13057,7 +13161,7 @@
             <a:avLst/>
           </a:prstGeom>
           <a:solidFill>
-            <a:srgbClr val="FFC107"/>
+            <a:srgbClr val="C9A227"/>
           </a:solidFill>
           <a:ln>
             <a:noFill/>
@@ -13101,7 +13205,7 @@
             <a:avLst/>
           </a:prstGeom>
           <a:solidFill>
-            <a:srgbClr val="E97132"/>
+            <a:srgbClr val="B26A00"/>
           </a:solidFill>
           <a:ln>
             <a:noFill/>
@@ -13145,7 +13249,7 @@
             <a:avLst/>
           </a:prstGeom>
           <a:solidFill>
-            <a:srgbClr val="E53935"/>
+            <a:srgbClr val="C62828"/>
           </a:solidFill>
           <a:ln>
             <a:noFill/>
@@ -13189,7 +13293,7 @@
             <a:avLst/>
           </a:prstGeom>
           <a:solidFill>
-            <a:srgbClr val="4CAF50"/>
+            <a:srgbClr val="2E7D32"/>
           </a:solidFill>
           <a:ln>
             <a:noFill/>
@@ -13233,7 +13337,7 @@
             <a:avLst/>
           </a:prstGeom>
           <a:solidFill>
-            <a:srgbClr val="FFC107"/>
+            <a:srgbClr val="C9A227"/>
           </a:solidFill>
           <a:ln>
             <a:noFill/>
@@ -13277,7 +13381,7 @@
             <a:avLst/>
           </a:prstGeom>
           <a:solidFill>
-            <a:srgbClr val="E97132"/>
+            <a:srgbClr val="B26A00"/>
           </a:solidFill>
           <a:ln>
             <a:noFill/>
@@ -13321,7 +13425,7 @@
             <a:avLst/>
           </a:prstGeom>
           <a:solidFill>
-            <a:srgbClr val="4CAF50"/>
+            <a:srgbClr val="2E7D32"/>
           </a:solidFill>
           <a:ln>
             <a:noFill/>
@@ -13365,7 +13469,7 @@
             <a:avLst/>
           </a:prstGeom>
           <a:solidFill>
-            <a:srgbClr val="4CAF50"/>
+            <a:srgbClr val="2E7D32"/>
           </a:solidFill>
           <a:ln>
             <a:noFill/>
@@ -13409,7 +13513,7 @@
             <a:avLst/>
           </a:prstGeom>
           <a:solidFill>
-            <a:srgbClr val="FFC107"/>
+            <a:srgbClr val="C9A227"/>
           </a:solidFill>
           <a:ln>
             <a:noFill/>
@@ -13453,7 +13557,7 @@
             <a:avLst/>
           </a:prstGeom>
           <a:solidFill>
-            <a:srgbClr val="0F1433"/>
+            <a:srgbClr val="16171B"/>
           </a:solidFill>
           <a:ln>
             <a:noFill/>
@@ -13532,7 +13636,7 @@
             <a:avLst/>
           </a:prstGeom>
           <a:solidFill>
-            <a:srgbClr val="0F1433"/>
+            <a:srgbClr val="16171B"/>
           </a:solidFill>
           <a:ln>
             <a:noFill/>
@@ -13611,7 +13715,7 @@
             <a:avLst/>
           </a:prstGeom>
           <a:solidFill>
-            <a:srgbClr val="0F1433"/>
+            <a:srgbClr val="16171B"/>
           </a:solidFill>
           <a:ln>
             <a:noFill/>
@@ -13690,7 +13794,7 @@
             <a:avLst/>
           </a:prstGeom>
           <a:solidFill>
-            <a:srgbClr val="0F1433"/>
+            <a:srgbClr val="16171B"/>
           </a:solidFill>
           <a:ln>
             <a:noFill/>
@@ -13769,7 +13873,7 @@
             <a:avLst/>
           </a:prstGeom>
           <a:solidFill>
-            <a:srgbClr val="0F1433"/>
+            <a:srgbClr val="16171B"/>
           </a:solidFill>
           <a:ln>
             <a:noFill/>
@@ -13848,7 +13952,7 @@
             <a:avLst/>
           </a:prstGeom>
           <a:solidFill>
-            <a:srgbClr val="0F1433"/>
+            <a:srgbClr val="16171B"/>
           </a:solidFill>
           <a:ln>
             <a:noFill/>
@@ -13927,7 +14031,7 @@
             <a:avLst/>
           </a:prstGeom>
           <a:solidFill>
-            <a:srgbClr val="0F1433"/>
+            <a:srgbClr val="16171B"/>
           </a:solidFill>
           <a:ln>
             <a:noFill/>
@@ -14006,7 +14110,7 @@
             <a:avLst/>
           </a:prstGeom>
           <a:solidFill>
-            <a:srgbClr val="0F1433"/>
+            <a:srgbClr val="16171B"/>
           </a:solidFill>
           <a:ln>
             <a:noFill/>
@@ -14085,7 +14189,7 @@
             <a:avLst/>
           </a:prstGeom>
           <a:solidFill>
-            <a:srgbClr val="0F1433"/>
+            <a:srgbClr val="16171B"/>
           </a:solidFill>
           <a:ln>
             <a:noFill/>
@@ -14164,7 +14268,7 @@
             <a:avLst/>
           </a:prstGeom>
           <a:solidFill>
-            <a:srgbClr val="F0F0F0"/>
+            <a:srgbClr val="F4F3F0"/>
           </a:solidFill>
           <a:ln>
             <a:noFill/>
@@ -14219,7 +14323,7 @@
             <a:r>
               <a:rPr sz="1400" b="1" i="0">
                 <a:solidFill>
-                  <a:srgbClr val="1E2761"/>
+                  <a:srgbClr val="23242A"/>
                 </a:solidFill>
                 <a:latin typeface="Calibri"/>
               </a:rPr>
@@ -14287,7 +14391,7 @@
             <a:avLst/>
           </a:prstGeom>
           <a:solidFill>
-            <a:srgbClr val="2196F3"/>
+            <a:srgbClr val="2C5F8A"/>
           </a:solidFill>
           <a:ln>
             <a:noFill/>
@@ -14377,7 +14481,7 @@
             <a:r>
               <a:rPr sz="1100" b="1" i="0">
                 <a:solidFill>
-                  <a:srgbClr val="1E2761"/>
+                  <a:srgbClr val="23242A"/>
                 </a:solidFill>
                 <a:latin typeface="Calibri"/>
               </a:rPr>
@@ -14412,7 +14516,7 @@
             <a:r>
               <a:rPr sz="900" b="0" i="0">
                 <a:solidFill>
-                  <a:srgbClr val="0F1433"/>
+                  <a:srgbClr val="16171B"/>
                 </a:solidFill>
                 <a:latin typeface="Calibri"/>
               </a:rPr>
@@ -14480,7 +14584,7 @@
             <a:avLst/>
           </a:prstGeom>
           <a:solidFill>
-            <a:srgbClr val="4CAF50"/>
+            <a:srgbClr val="2E7D32"/>
           </a:solidFill>
           <a:ln>
             <a:noFill/>
@@ -14570,7 +14674,7 @@
             <a:r>
               <a:rPr sz="1100" b="1" i="0">
                 <a:solidFill>
-                  <a:srgbClr val="1E2761"/>
+                  <a:srgbClr val="23242A"/>
                 </a:solidFill>
                 <a:latin typeface="Calibri"/>
               </a:rPr>
@@ -14605,7 +14709,7 @@
             <a:r>
               <a:rPr sz="900" b="0" i="0">
                 <a:solidFill>
-                  <a:srgbClr val="0F1433"/>
+                  <a:srgbClr val="16171B"/>
                 </a:solidFill>
                 <a:latin typeface="Calibri"/>
               </a:rPr>
@@ -14673,7 +14777,7 @@
             <a:avLst/>
           </a:prstGeom>
           <a:solidFill>
-            <a:srgbClr val="E53935"/>
+            <a:srgbClr val="C62828"/>
           </a:solidFill>
           <a:ln>
             <a:noFill/>
@@ -14763,7 +14867,7 @@
             <a:r>
               <a:rPr sz="1100" b="1" i="0">
                 <a:solidFill>
-                  <a:srgbClr val="1E2761"/>
+                  <a:srgbClr val="23242A"/>
                 </a:solidFill>
                 <a:latin typeface="Calibri"/>
               </a:rPr>
@@ -14798,7 +14902,7 @@
             <a:r>
               <a:rPr sz="900" b="0" i="0">
                 <a:solidFill>
-                  <a:srgbClr val="0F1433"/>
+                  <a:srgbClr val="16171B"/>
                 </a:solidFill>
                 <a:latin typeface="Calibri"/>
               </a:rPr>
@@ -14866,7 +14970,7 @@
             <a:avLst/>
           </a:prstGeom>
           <a:solidFill>
-            <a:srgbClr val="E97132"/>
+            <a:srgbClr val="B26A00"/>
           </a:solidFill>
           <a:ln>
             <a:noFill/>
@@ -14956,7 +15060,7 @@
             <a:r>
               <a:rPr sz="1100" b="1" i="0">
                 <a:solidFill>
-                  <a:srgbClr val="1E2761"/>
+                  <a:srgbClr val="23242A"/>
                 </a:solidFill>
                 <a:latin typeface="Calibri"/>
               </a:rPr>
@@ -14991,7 +15095,7 @@
             <a:r>
               <a:rPr sz="900" b="0" i="0">
                 <a:solidFill>
-                  <a:srgbClr val="0F1433"/>
+                  <a:srgbClr val="16171B"/>
                 </a:solidFill>
                 <a:latin typeface="Calibri"/>
               </a:rPr>
@@ -15059,7 +15163,7 @@
             <a:avLst/>
           </a:prstGeom>
           <a:solidFill>
-            <a:srgbClr val="9C27B0"/>
+            <a:srgbClr val="6A3D9A"/>
           </a:solidFill>
           <a:ln>
             <a:noFill/>
@@ -15149,7 +15253,7 @@
             <a:r>
               <a:rPr sz="1100" b="1" i="0">
                 <a:solidFill>
-                  <a:srgbClr val="1E2761"/>
+                  <a:srgbClr val="23242A"/>
                 </a:solidFill>
                 <a:latin typeface="Calibri"/>
               </a:rPr>
@@ -15184,7 +15288,7 @@
             <a:r>
               <a:rPr sz="900" b="0" i="0">
                 <a:solidFill>
-                  <a:srgbClr val="0F1433"/>
+                  <a:srgbClr val="16171B"/>
                 </a:solidFill>
                 <a:latin typeface="Calibri"/>
               </a:rPr>
@@ -15252,7 +15356,7 @@
             <a:avLst/>
           </a:prstGeom>
           <a:solidFill>
-            <a:srgbClr val="D4AF37"/>
+            <a:srgbClr val="C9A227"/>
           </a:solidFill>
           <a:ln>
             <a:noFill/>
@@ -15342,7 +15446,7 @@
             <a:r>
               <a:rPr sz="1100" b="1" i="0">
                 <a:solidFill>
-                  <a:srgbClr val="1E2761"/>
+                  <a:srgbClr val="23242A"/>
                 </a:solidFill>
                 <a:latin typeface="Calibri"/>
               </a:rPr>
@@ -15377,7 +15481,7 @@
             <a:r>
               <a:rPr sz="900" b="0" i="0">
                 <a:solidFill>
-                  <a:srgbClr val="0F1433"/>
+                  <a:srgbClr val="16171B"/>
                 </a:solidFill>
                 <a:latin typeface="Calibri"/>
               </a:rPr>
@@ -15412,7 +15516,7 @@
             <a:r>
               <a:rPr sz="900" b="0" i="0">
                 <a:solidFill>
-                  <a:srgbClr val="606060"/>
+                  <a:srgbClr val="6B6D76"/>
                 </a:solidFill>
                 <a:latin typeface="Calibri"/>
               </a:rPr>
@@ -15429,7 +15533,7 @@
 </p:sld>
 </file>
 
-<file path=ppt/slides/slide16.xml><?xml version="1.0" encoding="utf-8"?>
+<file path=ppt\slides\slide16.xml><?xml version="1.0" encoding="utf-8"?>
 <p:sld xmlns:a="http://schemas.openxmlformats.org/drawingml/2006/main" xmlns:r="http://schemas.openxmlformats.org/officeDocument/2006/relationships" xmlns:p="http://schemas.openxmlformats.org/presentationml/2006/main">
   <p:cSld>
     <p:spTree>
@@ -15461,7 +15565,7 @@
             <a:avLst/>
           </a:prstGeom>
           <a:solidFill>
-            <a:srgbClr val="1E2761"/>
+            <a:srgbClr val="23242A"/>
           </a:solidFill>
           <a:ln>
             <a:noFill/>
@@ -15520,7 +15624,7 @@
                 </a:solidFill>
                 <a:latin typeface="Calibri"/>
               </a:rPr>
-              <a:t>Deliverables Register  ·  25 Items</a:t>
+              <a:t>Deliverables Register  |  25 Items</a:t>
             </a:r>
           </a:p>
         </p:txBody>
@@ -15551,7 +15655,7 @@
             <a:r>
               <a:rPr sz="1200" b="0" i="1">
                 <a:solidFill>
-                  <a:srgbClr val="CADCFC"/>
+                  <a:srgbClr val="C8C9D0"/>
                 </a:solidFill>
                 <a:latin typeface="Calibri"/>
               </a:rPr>
@@ -15575,7 +15679,7 @@
             <a:avLst/>
           </a:prstGeom>
           <a:solidFill>
-            <a:srgbClr val="F0F0F0"/>
+            <a:srgbClr val="F4F3F0"/>
           </a:solidFill>
           <a:ln>
             <a:noFill/>
@@ -15619,7 +15723,7 @@
             <a:avLst/>
           </a:prstGeom>
           <a:solidFill>
-            <a:srgbClr val="2196F3"/>
+            <a:srgbClr val="2C5F8A"/>
           </a:solidFill>
           <a:ln>
             <a:noFill/>
@@ -15744,7 +15848,7 @@
             <a:r>
               <a:rPr sz="1000" b="1" i="0">
                 <a:solidFill>
-                  <a:srgbClr val="1E2761"/>
+                  <a:srgbClr val="23242A"/>
                 </a:solidFill>
                 <a:latin typeface="Calibri"/>
               </a:rPr>
@@ -15768,7 +15872,7 @@
             <a:avLst/>
           </a:prstGeom>
           <a:solidFill>
-            <a:srgbClr val="F0F0F0"/>
+            <a:srgbClr val="F4F3F0"/>
           </a:solidFill>
           <a:ln>
             <a:noFill/>
@@ -15812,7 +15916,7 @@
             <a:avLst/>
           </a:prstGeom>
           <a:solidFill>
-            <a:srgbClr val="2196F3"/>
+            <a:srgbClr val="2C5F8A"/>
           </a:solidFill>
           <a:ln>
             <a:noFill/>
@@ -15937,7 +16041,7 @@
             <a:r>
               <a:rPr sz="1000" b="1" i="0">
                 <a:solidFill>
-                  <a:srgbClr val="1E2761"/>
+                  <a:srgbClr val="23242A"/>
                 </a:solidFill>
                 <a:latin typeface="Calibri"/>
               </a:rPr>
@@ -15961,7 +16065,7 @@
             <a:avLst/>
           </a:prstGeom>
           <a:solidFill>
-            <a:srgbClr val="F0F0F0"/>
+            <a:srgbClr val="F4F3F0"/>
           </a:solidFill>
           <a:ln>
             <a:noFill/>
@@ -16005,7 +16109,7 @@
             <a:avLst/>
           </a:prstGeom>
           <a:solidFill>
-            <a:srgbClr val="2196F3"/>
+            <a:srgbClr val="2C5F8A"/>
           </a:solidFill>
           <a:ln>
             <a:noFill/>
@@ -16130,7 +16234,7 @@
             <a:r>
               <a:rPr sz="1000" b="1" i="0">
                 <a:solidFill>
-                  <a:srgbClr val="1E2761"/>
+                  <a:srgbClr val="23242A"/>
                 </a:solidFill>
                 <a:latin typeface="Calibri"/>
               </a:rPr>
@@ -16154,7 +16258,7 @@
             <a:avLst/>
           </a:prstGeom>
           <a:solidFill>
-            <a:srgbClr val="F0F0F0"/>
+            <a:srgbClr val="F4F3F0"/>
           </a:solidFill>
           <a:ln>
             <a:noFill/>
@@ -16198,7 +16302,7 @@
             <a:avLst/>
           </a:prstGeom>
           <a:solidFill>
-            <a:srgbClr val="9C27B0"/>
+            <a:srgbClr val="6A3D9A"/>
           </a:solidFill>
           <a:ln>
             <a:noFill/>
@@ -16323,7 +16427,7 @@
             <a:r>
               <a:rPr sz="1000" b="1" i="0">
                 <a:solidFill>
-                  <a:srgbClr val="1E2761"/>
+                  <a:srgbClr val="23242A"/>
                 </a:solidFill>
                 <a:latin typeface="Calibri"/>
               </a:rPr>
@@ -16347,7 +16451,7 @@
             <a:avLst/>
           </a:prstGeom>
           <a:solidFill>
-            <a:srgbClr val="F0F0F0"/>
+            <a:srgbClr val="F4F3F0"/>
           </a:solidFill>
           <a:ln>
             <a:noFill/>
@@ -16391,7 +16495,7 @@
             <a:avLst/>
           </a:prstGeom>
           <a:solidFill>
-            <a:srgbClr val="2196F3"/>
+            <a:srgbClr val="2C5F8A"/>
           </a:solidFill>
           <a:ln>
             <a:noFill/>
@@ -16516,7 +16620,7 @@
             <a:r>
               <a:rPr sz="1000" b="1" i="0">
                 <a:solidFill>
-                  <a:srgbClr val="1E2761"/>
+                  <a:srgbClr val="23242A"/>
                 </a:solidFill>
                 <a:latin typeface="Calibri"/>
               </a:rPr>
@@ -16540,7 +16644,7 @@
             <a:avLst/>
           </a:prstGeom>
           <a:solidFill>
-            <a:srgbClr val="F0F0F0"/>
+            <a:srgbClr val="F4F3F0"/>
           </a:solidFill>
           <a:ln>
             <a:noFill/>
@@ -16584,7 +16688,7 @@
             <a:avLst/>
           </a:prstGeom>
           <a:solidFill>
-            <a:srgbClr val="2196F3"/>
+            <a:srgbClr val="2C5F8A"/>
           </a:solidFill>
           <a:ln>
             <a:noFill/>
@@ -16709,7 +16813,7 @@
             <a:r>
               <a:rPr sz="1000" b="1" i="0">
                 <a:solidFill>
-                  <a:srgbClr val="1E2761"/>
+                  <a:srgbClr val="23242A"/>
                 </a:solidFill>
                 <a:latin typeface="Calibri"/>
               </a:rPr>
@@ -16733,7 +16837,7 @@
             <a:avLst/>
           </a:prstGeom>
           <a:solidFill>
-            <a:srgbClr val="F0F0F0"/>
+            <a:srgbClr val="F4F3F0"/>
           </a:solidFill>
           <a:ln>
             <a:noFill/>
@@ -16777,7 +16881,7 @@
             <a:avLst/>
           </a:prstGeom>
           <a:solidFill>
-            <a:srgbClr val="4CAF50"/>
+            <a:srgbClr val="2E7D32"/>
           </a:solidFill>
           <a:ln>
             <a:noFill/>
@@ -16902,7 +17006,7 @@
             <a:r>
               <a:rPr sz="1000" b="1" i="0">
                 <a:solidFill>
-                  <a:srgbClr val="1E2761"/>
+                  <a:srgbClr val="23242A"/>
                 </a:solidFill>
                 <a:latin typeface="Calibri"/>
               </a:rPr>
@@ -16926,7 +17030,7 @@
             <a:avLst/>
           </a:prstGeom>
           <a:solidFill>
-            <a:srgbClr val="F0F0F0"/>
+            <a:srgbClr val="F4F3F0"/>
           </a:solidFill>
           <a:ln>
             <a:noFill/>
@@ -16970,7 +17074,7 @@
             <a:avLst/>
           </a:prstGeom>
           <a:solidFill>
-            <a:srgbClr val="4CAF50"/>
+            <a:srgbClr val="2E7D32"/>
           </a:solidFill>
           <a:ln>
             <a:noFill/>
@@ -17095,7 +17199,7 @@
             <a:r>
               <a:rPr sz="1000" b="1" i="0">
                 <a:solidFill>
-                  <a:srgbClr val="1E2761"/>
+                  <a:srgbClr val="23242A"/>
                 </a:solidFill>
                 <a:latin typeface="Calibri"/>
               </a:rPr>
@@ -17119,7 +17223,7 @@
             <a:avLst/>
           </a:prstGeom>
           <a:solidFill>
-            <a:srgbClr val="F0F0F0"/>
+            <a:srgbClr val="F4F3F0"/>
           </a:solidFill>
           <a:ln>
             <a:noFill/>
@@ -17163,7 +17267,7 @@
             <a:avLst/>
           </a:prstGeom>
           <a:solidFill>
-            <a:srgbClr val="4CAF50"/>
+            <a:srgbClr val="2E7D32"/>
           </a:solidFill>
           <a:ln>
             <a:noFill/>
@@ -17288,7 +17392,7 @@
             <a:r>
               <a:rPr sz="1000" b="1" i="0">
                 <a:solidFill>
-                  <a:srgbClr val="1E2761"/>
+                  <a:srgbClr val="23242A"/>
                 </a:solidFill>
                 <a:latin typeface="Calibri"/>
               </a:rPr>
@@ -17312,7 +17416,7 @@
             <a:avLst/>
           </a:prstGeom>
           <a:solidFill>
-            <a:srgbClr val="F0F0F0"/>
+            <a:srgbClr val="F4F3F0"/>
           </a:solidFill>
           <a:ln>
             <a:noFill/>
@@ -17356,7 +17460,7 @@
             <a:avLst/>
           </a:prstGeom>
           <a:solidFill>
-            <a:srgbClr val="4CAF50"/>
+            <a:srgbClr val="2E7D32"/>
           </a:solidFill>
           <a:ln>
             <a:noFill/>
@@ -17481,7 +17585,7 @@
             <a:r>
               <a:rPr sz="1000" b="1" i="0">
                 <a:solidFill>
-                  <a:srgbClr val="1E2761"/>
+                  <a:srgbClr val="23242A"/>
                 </a:solidFill>
                 <a:latin typeface="Calibri"/>
               </a:rPr>
@@ -17505,7 +17609,7 @@
             <a:avLst/>
           </a:prstGeom>
           <a:solidFill>
-            <a:srgbClr val="F0F0F0"/>
+            <a:srgbClr val="F4F3F0"/>
           </a:solidFill>
           <a:ln>
             <a:noFill/>
@@ -17549,7 +17653,7 @@
             <a:avLst/>
           </a:prstGeom>
           <a:solidFill>
-            <a:srgbClr val="2196F3"/>
+            <a:srgbClr val="2C5F8A"/>
           </a:solidFill>
           <a:ln>
             <a:noFill/>
@@ -17674,7 +17778,7 @@
             <a:r>
               <a:rPr sz="1000" b="1" i="0">
                 <a:solidFill>
-                  <a:srgbClr val="1E2761"/>
+                  <a:srgbClr val="23242A"/>
                 </a:solidFill>
                 <a:latin typeface="Calibri"/>
               </a:rPr>
@@ -17698,7 +17802,7 @@
             <a:avLst/>
           </a:prstGeom>
           <a:solidFill>
-            <a:srgbClr val="F0F0F0"/>
+            <a:srgbClr val="F4F3F0"/>
           </a:solidFill>
           <a:ln>
             <a:noFill/>
@@ -17742,7 +17846,7 @@
             <a:avLst/>
           </a:prstGeom>
           <a:solidFill>
-            <a:srgbClr val="2196F3"/>
+            <a:srgbClr val="2C5F8A"/>
           </a:solidFill>
           <a:ln>
             <a:noFill/>
@@ -17867,7 +17971,7 @@
             <a:r>
               <a:rPr sz="1000" b="1" i="0">
                 <a:solidFill>
-                  <a:srgbClr val="1E2761"/>
+                  <a:srgbClr val="23242A"/>
                 </a:solidFill>
                 <a:latin typeface="Calibri"/>
               </a:rPr>
@@ -17891,7 +17995,7 @@
             <a:avLst/>
           </a:prstGeom>
           <a:solidFill>
-            <a:srgbClr val="F0F0F0"/>
+            <a:srgbClr val="F4F3F0"/>
           </a:solidFill>
           <a:ln>
             <a:noFill/>
@@ -17935,7 +18039,7 @@
             <a:avLst/>
           </a:prstGeom>
           <a:solidFill>
-            <a:srgbClr val="4CAF50"/>
+            <a:srgbClr val="2E7D32"/>
           </a:solidFill>
           <a:ln>
             <a:noFill/>
@@ -18060,7 +18164,7 @@
             <a:r>
               <a:rPr sz="1000" b="1" i="0">
                 <a:solidFill>
-                  <a:srgbClr val="1E2761"/>
+                  <a:srgbClr val="23242A"/>
                 </a:solidFill>
                 <a:latin typeface="Calibri"/>
               </a:rPr>
@@ -18084,7 +18188,7 @@
             <a:avLst/>
           </a:prstGeom>
           <a:solidFill>
-            <a:srgbClr val="F0F0F0"/>
+            <a:srgbClr val="F4F3F0"/>
           </a:solidFill>
           <a:ln>
             <a:noFill/>
@@ -18128,7 +18232,7 @@
             <a:avLst/>
           </a:prstGeom>
           <a:solidFill>
-            <a:srgbClr val="E97132"/>
+            <a:srgbClr val="B26A00"/>
           </a:solidFill>
           <a:ln>
             <a:noFill/>
@@ -18253,7 +18357,7 @@
             <a:r>
               <a:rPr sz="1000" b="1" i="0">
                 <a:solidFill>
-                  <a:srgbClr val="1E2761"/>
+                  <a:srgbClr val="23242A"/>
                 </a:solidFill>
                 <a:latin typeface="Calibri"/>
               </a:rPr>
@@ -18277,7 +18381,7 @@
             <a:avLst/>
           </a:prstGeom>
           <a:solidFill>
-            <a:srgbClr val="F0F0F0"/>
+            <a:srgbClr val="F4F3F0"/>
           </a:solidFill>
           <a:ln>
             <a:noFill/>
@@ -18321,7 +18425,7 @@
             <a:avLst/>
           </a:prstGeom>
           <a:solidFill>
-            <a:srgbClr val="E97132"/>
+            <a:srgbClr val="B26A00"/>
           </a:solidFill>
           <a:ln>
             <a:noFill/>
@@ -18446,7 +18550,7 @@
             <a:r>
               <a:rPr sz="1000" b="1" i="0">
                 <a:solidFill>
-                  <a:srgbClr val="1E2761"/>
+                  <a:srgbClr val="23242A"/>
                 </a:solidFill>
                 <a:latin typeface="Calibri"/>
               </a:rPr>
@@ -18470,7 +18574,7 @@
             <a:avLst/>
           </a:prstGeom>
           <a:solidFill>
-            <a:srgbClr val="F0F0F0"/>
+            <a:srgbClr val="F4F3F0"/>
           </a:solidFill>
           <a:ln>
             <a:noFill/>
@@ -18514,7 +18618,7 @@
             <a:avLst/>
           </a:prstGeom>
           <a:solidFill>
-            <a:srgbClr val="4CAF50"/>
+            <a:srgbClr val="2E7D32"/>
           </a:solidFill>
           <a:ln>
             <a:noFill/>
@@ -18639,7 +18743,7 @@
             <a:r>
               <a:rPr sz="1000" b="1" i="0">
                 <a:solidFill>
-                  <a:srgbClr val="1E2761"/>
+                  <a:srgbClr val="23242A"/>
                 </a:solidFill>
                 <a:latin typeface="Calibri"/>
               </a:rPr>
@@ -18663,7 +18767,7 @@
             <a:avLst/>
           </a:prstGeom>
           <a:solidFill>
-            <a:srgbClr val="F0F0F0"/>
+            <a:srgbClr val="F4F3F0"/>
           </a:solidFill>
           <a:ln>
             <a:noFill/>
@@ -18707,7 +18811,7 @@
             <a:avLst/>
           </a:prstGeom>
           <a:solidFill>
-            <a:srgbClr val="4CAF50"/>
+            <a:srgbClr val="2E7D32"/>
           </a:solidFill>
           <a:ln>
             <a:noFill/>
@@ -18832,7 +18936,7 @@
             <a:r>
               <a:rPr sz="1000" b="1" i="0">
                 <a:solidFill>
-                  <a:srgbClr val="1E2761"/>
+                  <a:srgbClr val="23242A"/>
                 </a:solidFill>
                 <a:latin typeface="Calibri"/>
               </a:rPr>
@@ -18856,7 +18960,7 @@
             <a:avLst/>
           </a:prstGeom>
           <a:solidFill>
-            <a:srgbClr val="F0F0F0"/>
+            <a:srgbClr val="F4F3F0"/>
           </a:solidFill>
           <a:ln>
             <a:noFill/>
@@ -18900,7 +19004,7 @@
             <a:avLst/>
           </a:prstGeom>
           <a:solidFill>
-            <a:srgbClr val="4CAF50"/>
+            <a:srgbClr val="2E7D32"/>
           </a:solidFill>
           <a:ln>
             <a:noFill/>
@@ -19025,7 +19129,7 @@
             <a:r>
               <a:rPr sz="1000" b="1" i="0">
                 <a:solidFill>
-                  <a:srgbClr val="1E2761"/>
+                  <a:srgbClr val="23242A"/>
                 </a:solidFill>
                 <a:latin typeface="Calibri"/>
               </a:rPr>
@@ -19049,7 +19153,7 @@
             <a:avLst/>
           </a:prstGeom>
           <a:solidFill>
-            <a:srgbClr val="F0F0F0"/>
+            <a:srgbClr val="F4F3F0"/>
           </a:solidFill>
           <a:ln>
             <a:noFill/>
@@ -19093,7 +19197,7 @@
             <a:avLst/>
           </a:prstGeom>
           <a:solidFill>
-            <a:srgbClr val="2196F3"/>
+            <a:srgbClr val="2C5F8A"/>
           </a:solidFill>
           <a:ln>
             <a:noFill/>
@@ -19218,7 +19322,7 @@
             <a:r>
               <a:rPr sz="1000" b="1" i="0">
                 <a:solidFill>
-                  <a:srgbClr val="1E2761"/>
+                  <a:srgbClr val="23242A"/>
                 </a:solidFill>
                 <a:latin typeface="Calibri"/>
               </a:rPr>
@@ -19242,7 +19346,7 @@
             <a:avLst/>
           </a:prstGeom>
           <a:solidFill>
-            <a:srgbClr val="F0F0F0"/>
+            <a:srgbClr val="F4F3F0"/>
           </a:solidFill>
           <a:ln>
             <a:noFill/>
@@ -19286,7 +19390,7 @@
             <a:avLst/>
           </a:prstGeom>
           <a:solidFill>
-            <a:srgbClr val="2196F3"/>
+            <a:srgbClr val="2C5F8A"/>
           </a:solidFill>
           <a:ln>
             <a:noFill/>
@@ -19411,7 +19515,7 @@
             <a:r>
               <a:rPr sz="1000" b="1" i="0">
                 <a:solidFill>
-                  <a:srgbClr val="1E2761"/>
+                  <a:srgbClr val="23242A"/>
                 </a:solidFill>
                 <a:latin typeface="Calibri"/>
               </a:rPr>
@@ -19435,7 +19539,7 @@
             <a:avLst/>
           </a:prstGeom>
           <a:solidFill>
-            <a:srgbClr val="F0F0F0"/>
+            <a:srgbClr val="F4F3F0"/>
           </a:solidFill>
           <a:ln>
             <a:noFill/>
@@ -19479,7 +19583,7 @@
             <a:avLst/>
           </a:prstGeom>
           <a:solidFill>
-            <a:srgbClr val="2196F3"/>
+            <a:srgbClr val="2C5F8A"/>
           </a:solidFill>
           <a:ln>
             <a:noFill/>
@@ -19604,7 +19708,7 @@
             <a:r>
               <a:rPr sz="1000" b="1" i="0">
                 <a:solidFill>
-                  <a:srgbClr val="1E2761"/>
+                  <a:srgbClr val="23242A"/>
                 </a:solidFill>
                 <a:latin typeface="Calibri"/>
               </a:rPr>
@@ -19628,7 +19732,7 @@
             <a:avLst/>
           </a:prstGeom>
           <a:solidFill>
-            <a:srgbClr val="F0F0F0"/>
+            <a:srgbClr val="F4F3F0"/>
           </a:solidFill>
           <a:ln>
             <a:noFill/>
@@ -19672,7 +19776,7 @@
             <a:avLst/>
           </a:prstGeom>
           <a:solidFill>
-            <a:srgbClr val="2196F3"/>
+            <a:srgbClr val="2C5F8A"/>
           </a:solidFill>
           <a:ln>
             <a:noFill/>
@@ -19797,7 +19901,7 @@
             <a:r>
               <a:rPr sz="1000" b="1" i="0">
                 <a:solidFill>
-                  <a:srgbClr val="1E2761"/>
+                  <a:srgbClr val="23242A"/>
                 </a:solidFill>
                 <a:latin typeface="Calibri"/>
               </a:rPr>
@@ -19821,7 +19925,7 @@
             <a:avLst/>
           </a:prstGeom>
           <a:solidFill>
-            <a:srgbClr val="F0F0F0"/>
+            <a:srgbClr val="F4F3F0"/>
           </a:solidFill>
           <a:ln>
             <a:noFill/>
@@ -19865,7 +19969,7 @@
             <a:avLst/>
           </a:prstGeom>
           <a:solidFill>
-            <a:srgbClr val="E97132"/>
+            <a:srgbClr val="B26A00"/>
           </a:solidFill>
           <a:ln>
             <a:noFill/>
@@ -19990,7 +20094,7 @@
             <a:r>
               <a:rPr sz="1000" b="1" i="0">
                 <a:solidFill>
-                  <a:srgbClr val="1E2761"/>
+                  <a:srgbClr val="23242A"/>
                 </a:solidFill>
                 <a:latin typeface="Calibri"/>
               </a:rPr>
@@ -20014,7 +20118,7 @@
             <a:avLst/>
           </a:prstGeom>
           <a:solidFill>
-            <a:srgbClr val="F0F0F0"/>
+            <a:srgbClr val="F4F3F0"/>
           </a:solidFill>
           <a:ln>
             <a:noFill/>
@@ -20058,7 +20162,7 @@
             <a:avLst/>
           </a:prstGeom>
           <a:solidFill>
-            <a:srgbClr val="2196F3"/>
+            <a:srgbClr val="2C5F8A"/>
           </a:solidFill>
           <a:ln>
             <a:noFill/>
@@ -20183,7 +20287,7 @@
             <a:r>
               <a:rPr sz="1000" b="1" i="0">
                 <a:solidFill>
-                  <a:srgbClr val="1E2761"/>
+                  <a:srgbClr val="23242A"/>
                 </a:solidFill>
                 <a:latin typeface="Calibri"/>
               </a:rPr>
@@ -20207,7 +20311,7 @@
             <a:avLst/>
           </a:prstGeom>
           <a:solidFill>
-            <a:srgbClr val="F0F0F0"/>
+            <a:srgbClr val="F4F3F0"/>
           </a:solidFill>
           <a:ln>
             <a:noFill/>
@@ -20251,7 +20355,7 @@
             <a:avLst/>
           </a:prstGeom>
           <a:solidFill>
-            <a:srgbClr val="2196F3"/>
+            <a:srgbClr val="2C5F8A"/>
           </a:solidFill>
           <a:ln>
             <a:noFill/>
@@ -20376,7 +20480,7 @@
             <a:r>
               <a:rPr sz="1000" b="1" i="0">
                 <a:solidFill>
-                  <a:srgbClr val="1E2761"/>
+                  <a:srgbClr val="23242A"/>
                 </a:solidFill>
                 <a:latin typeface="Calibri"/>
               </a:rPr>
@@ -20411,7 +20515,7 @@
             <a:r>
               <a:rPr sz="1100" b="1" i="0">
                 <a:solidFill>
-                  <a:srgbClr val="1E2761"/>
+                  <a:srgbClr val="23242A"/>
                 </a:solidFill>
                 <a:latin typeface="Calibri"/>
               </a:rPr>
@@ -20435,7 +20539,7 @@
             <a:avLst/>
           </a:prstGeom>
           <a:solidFill>
-            <a:srgbClr val="2196F3"/>
+            <a:srgbClr val="2C5F8A"/>
           </a:solidFill>
           <a:ln>
             <a:noFill/>
@@ -20525,7 +20629,7 @@
             <a:r>
               <a:rPr sz="1000" b="0" i="0">
                 <a:solidFill>
-                  <a:srgbClr val="0F1433"/>
+                  <a:srgbClr val="16171B"/>
                 </a:solidFill>
                 <a:latin typeface="Calibri"/>
               </a:rPr>
@@ -20549,7 +20653,7 @@
             <a:avLst/>
           </a:prstGeom>
           <a:solidFill>
-            <a:srgbClr val="4CAF50"/>
+            <a:srgbClr val="2E7D32"/>
           </a:solidFill>
           <a:ln>
             <a:noFill/>
@@ -20639,7 +20743,7 @@
             <a:r>
               <a:rPr sz="1000" b="0" i="0">
                 <a:solidFill>
-                  <a:srgbClr val="0F1433"/>
+                  <a:srgbClr val="16171B"/>
                 </a:solidFill>
                 <a:latin typeface="Calibri"/>
               </a:rPr>
@@ -20663,7 +20767,7 @@
             <a:avLst/>
           </a:prstGeom>
           <a:solidFill>
-            <a:srgbClr val="E97132"/>
+            <a:srgbClr val="B26A00"/>
           </a:solidFill>
           <a:ln>
             <a:noFill/>
@@ -20753,7 +20857,7 @@
             <a:r>
               <a:rPr sz="1000" b="0" i="0">
                 <a:solidFill>
-                  <a:srgbClr val="0F1433"/>
+                  <a:srgbClr val="16171B"/>
                 </a:solidFill>
                 <a:latin typeface="Calibri"/>
               </a:rPr>
@@ -20777,7 +20881,7 @@
             <a:avLst/>
           </a:prstGeom>
           <a:solidFill>
-            <a:srgbClr val="9C27B0"/>
+            <a:srgbClr val="6A3D9A"/>
           </a:solidFill>
           <a:ln>
             <a:noFill/>
@@ -20867,7 +20971,7 @@
             <a:r>
               <a:rPr sz="1000" b="0" i="0">
                 <a:solidFill>
-                  <a:srgbClr val="0F1433"/>
+                  <a:srgbClr val="16171B"/>
                 </a:solidFill>
                 <a:latin typeface="Calibri"/>
               </a:rPr>
@@ -20902,7 +21006,7 @@
             <a:r>
               <a:rPr sz="900" b="0" i="0">
                 <a:solidFill>
-                  <a:srgbClr val="606060"/>
+                  <a:srgbClr val="6B6D76"/>
                 </a:solidFill>
                 <a:latin typeface="Calibri"/>
               </a:rPr>
@@ -20919,7 +21023,7 @@
 </p:sld>
 </file>
 
-<file path=ppt/slides/slide17.xml><?xml version="1.0" encoding="utf-8"?>
+<file path=ppt\slides\slide17.xml><?xml version="1.0" encoding="utf-8"?>
 <p:sld xmlns:a="http://schemas.openxmlformats.org/drawingml/2006/main" xmlns:r="http://schemas.openxmlformats.org/officeDocument/2006/relationships" xmlns:p="http://schemas.openxmlformats.org/presentationml/2006/main">
   <p:cSld>
     <p:spTree>
@@ -20951,7 +21055,7 @@
             <a:avLst/>
           </a:prstGeom>
           <a:solidFill>
-            <a:srgbClr val="1E2761"/>
+            <a:srgbClr val="23242A"/>
           </a:solidFill>
           <a:ln>
             <a:noFill/>
@@ -21041,7 +21145,7 @@
             <a:r>
               <a:rPr sz="1200" b="0" i="1">
                 <a:solidFill>
-                  <a:srgbClr val="CADCFC"/>
+                  <a:srgbClr val="C8C9D0"/>
                 </a:solidFill>
                 <a:latin typeface="Calibri"/>
               </a:rPr>
@@ -21076,11 +21180,11 @@
             <a:r>
               <a:rPr sz="1400" b="1" i="0">
                 <a:solidFill>
-                  <a:srgbClr val="1E2761"/>
-                </a:solidFill>
-                <a:latin typeface="Calibri"/>
-              </a:rPr>
-              <a:t>SUPPORT TIERS  ·  L1/L2/L3</a:t>
+                  <a:srgbClr val="23242A"/>
+                </a:solidFill>
+                <a:latin typeface="Calibri"/>
+              </a:rPr>
+              <a:t>SUPPORT TIERS  |  L1/L2/L3</a:t>
             </a:r>
           </a:p>
         </p:txBody>
@@ -21100,7 +21204,7 @@
             <a:avLst/>
           </a:prstGeom>
           <a:solidFill>
-            <a:srgbClr val="F0F0F0"/>
+            <a:srgbClr val="F4F3F0"/>
           </a:solidFill>
           <a:ln>
             <a:noFill/>
@@ -21144,7 +21248,7 @@
             <a:avLst/>
           </a:prstGeom>
           <a:solidFill>
-            <a:srgbClr val="2196F3"/>
+            <a:srgbClr val="2C5F8A"/>
           </a:solidFill>
           <a:ln>
             <a:noFill/>
@@ -21234,7 +21338,7 @@
             <a:r>
               <a:rPr sz="1300" b="1" i="0">
                 <a:solidFill>
-                  <a:srgbClr val="1E2761"/>
+                  <a:srgbClr val="23242A"/>
                 </a:solidFill>
                 <a:latin typeface="Calibri"/>
               </a:rPr>
@@ -21269,7 +21373,7 @@
             <a:r>
               <a:rPr sz="1000" b="0" i="0">
                 <a:solidFill>
-                  <a:srgbClr val="0F1433"/>
+                  <a:srgbClr val="16171B"/>
                 </a:solidFill>
                 <a:latin typeface="Calibri"/>
               </a:rPr>
@@ -21304,7 +21408,7 @@
             <a:r>
               <a:rPr sz="900" b="0" i="1">
                 <a:solidFill>
-                  <a:srgbClr val="2196F3"/>
+                  <a:srgbClr val="2C5F8A"/>
                 </a:solidFill>
                 <a:latin typeface="Calibri"/>
               </a:rPr>
@@ -21339,7 +21443,7 @@
             <a:r>
               <a:rPr sz="900" b="0" i="1">
                 <a:solidFill>
-                  <a:srgbClr val="2196F3"/>
+                  <a:srgbClr val="2C5F8A"/>
                 </a:solidFill>
                 <a:latin typeface="Calibri"/>
               </a:rPr>
@@ -21363,7 +21467,7 @@
             <a:avLst/>
           </a:prstGeom>
           <a:solidFill>
-            <a:srgbClr val="F0F0F0"/>
+            <a:srgbClr val="F4F3F0"/>
           </a:solidFill>
           <a:ln>
             <a:noFill/>
@@ -21407,7 +21511,7 @@
             <a:avLst/>
           </a:prstGeom>
           <a:solidFill>
-            <a:srgbClr val="D4AF37"/>
+            <a:srgbClr val="C9A227"/>
           </a:solidFill>
           <a:ln>
             <a:noFill/>
@@ -21497,7 +21601,7 @@
             <a:r>
               <a:rPr sz="1300" b="1" i="0">
                 <a:solidFill>
-                  <a:srgbClr val="1E2761"/>
+                  <a:srgbClr val="23242A"/>
                 </a:solidFill>
                 <a:latin typeface="Calibri"/>
               </a:rPr>
@@ -21532,7 +21636,7 @@
             <a:r>
               <a:rPr sz="1000" b="0" i="0">
                 <a:solidFill>
-                  <a:srgbClr val="0F1433"/>
+                  <a:srgbClr val="16171B"/>
                 </a:solidFill>
                 <a:latin typeface="Calibri"/>
               </a:rPr>
@@ -21567,7 +21671,7 @@
             <a:r>
               <a:rPr sz="900" b="0" i="1">
                 <a:solidFill>
-                  <a:srgbClr val="D4AF37"/>
+                  <a:srgbClr val="C9A227"/>
                 </a:solidFill>
                 <a:latin typeface="Calibri"/>
               </a:rPr>
@@ -21602,7 +21706,7 @@
             <a:r>
               <a:rPr sz="900" b="0" i="1">
                 <a:solidFill>
-                  <a:srgbClr val="D4AF37"/>
+                  <a:srgbClr val="C9A227"/>
                 </a:solidFill>
                 <a:latin typeface="Calibri"/>
               </a:rPr>
@@ -21626,7 +21730,7 @@
             <a:avLst/>
           </a:prstGeom>
           <a:solidFill>
-            <a:srgbClr val="F0F0F0"/>
+            <a:srgbClr val="F4F3F0"/>
           </a:solidFill>
           <a:ln>
             <a:noFill/>
@@ -21670,7 +21774,7 @@
             <a:avLst/>
           </a:prstGeom>
           <a:solidFill>
-            <a:srgbClr val="E53935"/>
+            <a:srgbClr val="C62828"/>
           </a:solidFill>
           <a:ln>
             <a:noFill/>
@@ -21760,7 +21864,7 @@
             <a:r>
               <a:rPr sz="1300" b="1" i="0">
                 <a:solidFill>
-                  <a:srgbClr val="1E2761"/>
+                  <a:srgbClr val="23242A"/>
                 </a:solidFill>
                 <a:latin typeface="Calibri"/>
               </a:rPr>
@@ -21795,7 +21899,7 @@
             <a:r>
               <a:rPr sz="1000" b="0" i="0">
                 <a:solidFill>
-                  <a:srgbClr val="0F1433"/>
+                  <a:srgbClr val="16171B"/>
                 </a:solidFill>
                 <a:latin typeface="Calibri"/>
               </a:rPr>
@@ -21830,7 +21934,7 @@
             <a:r>
               <a:rPr sz="900" b="0" i="1">
                 <a:solidFill>
-                  <a:srgbClr val="E53935"/>
+                  <a:srgbClr val="C62828"/>
                 </a:solidFill>
                 <a:latin typeface="Calibri"/>
               </a:rPr>
@@ -21865,7 +21969,7 @@
             <a:r>
               <a:rPr sz="900" b="0" i="1">
                 <a:solidFill>
-                  <a:srgbClr val="E53935"/>
+                  <a:srgbClr val="C62828"/>
                 </a:solidFill>
                 <a:latin typeface="Calibri"/>
               </a:rPr>
@@ -21900,7 +22004,7 @@
             <a:r>
               <a:rPr sz="1400" b="1" i="0">
                 <a:solidFill>
-                  <a:srgbClr val="1E2761"/>
+                  <a:srgbClr val="23242A"/>
                 </a:solidFill>
                 <a:latin typeface="Calibri"/>
               </a:rPr>
@@ -21924,7 +22028,7 @@
             <a:avLst/>
           </a:prstGeom>
           <a:solidFill>
-            <a:srgbClr val="E97132"/>
+            <a:srgbClr val="B26A00"/>
           </a:solidFill>
           <a:ln>
             <a:noFill/>
@@ -21968,7 +22072,7 @@
             <a:avLst/>
           </a:prstGeom>
           <a:solidFill>
-            <a:srgbClr val="E97132"/>
+            <a:srgbClr val="B26A00"/>
           </a:solidFill>
           <a:ln>
             <a:noFill/>
@@ -22128,7 +22232,7 @@
             <a:r>
               <a:rPr sz="1500" b="1" i="0">
                 <a:solidFill>
-                  <a:srgbClr val="D4AF37"/>
+                  <a:srgbClr val="C9A227"/>
                 </a:solidFill>
                 <a:latin typeface="Calibri"/>
               </a:rPr>
@@ -22152,7 +22256,7 @@
             <a:avLst/>
           </a:prstGeom>
           <a:solidFill>
-            <a:srgbClr val="F0F0F0"/>
+            <a:srgbClr val="F4F3F0"/>
           </a:solidFill>
           <a:ln>
             <a:noFill/>
@@ -22196,7 +22300,7 @@
             <a:avLst/>
           </a:prstGeom>
           <a:solidFill>
-            <a:srgbClr val="1E2761"/>
+            <a:srgbClr val="23242A"/>
           </a:solidFill>
           <a:ln>
             <a:noFill/>
@@ -22286,7 +22390,7 @@
             <a:r>
               <a:rPr sz="1200" b="1" i="0">
                 <a:solidFill>
-                  <a:srgbClr val="1E2761"/>
+                  <a:srgbClr val="23242A"/>
                 </a:solidFill>
                 <a:latin typeface="Calibri"/>
               </a:rPr>
@@ -22321,7 +22425,7 @@
             <a:r>
               <a:rPr sz="900" b="0" i="0">
                 <a:solidFill>
-                  <a:srgbClr val="606060"/>
+                  <a:srgbClr val="6B6D76"/>
                 </a:solidFill>
                 <a:latin typeface="Calibri"/>
               </a:rPr>
@@ -22356,7 +22460,7 @@
             <a:r>
               <a:rPr sz="1500" b="1" i="0">
                 <a:solidFill>
-                  <a:srgbClr val="1E2761"/>
+                  <a:srgbClr val="23242A"/>
                 </a:solidFill>
                 <a:latin typeface="Calibri"/>
               </a:rPr>
@@ -22380,7 +22484,7 @@
             <a:avLst/>
           </a:prstGeom>
           <a:solidFill>
-            <a:srgbClr val="F0F0F0"/>
+            <a:srgbClr val="F4F3F0"/>
           </a:solidFill>
           <a:ln>
             <a:noFill/>
@@ -22424,7 +22528,7 @@
             <a:avLst/>
           </a:prstGeom>
           <a:solidFill>
-            <a:srgbClr val="1E2761"/>
+            <a:srgbClr val="23242A"/>
           </a:solidFill>
           <a:ln>
             <a:noFill/>
@@ -22514,7 +22618,7 @@
             <a:r>
               <a:rPr sz="1200" b="1" i="0">
                 <a:solidFill>
-                  <a:srgbClr val="1E2761"/>
+                  <a:srgbClr val="23242A"/>
                 </a:solidFill>
                 <a:latin typeface="Calibri"/>
               </a:rPr>
@@ -22549,7 +22653,7 @@
             <a:r>
               <a:rPr sz="900" b="0" i="0">
                 <a:solidFill>
-                  <a:srgbClr val="606060"/>
+                  <a:srgbClr val="6B6D76"/>
                 </a:solidFill>
                 <a:latin typeface="Calibri"/>
               </a:rPr>
@@ -22584,7 +22688,7 @@
             <a:r>
               <a:rPr sz="1500" b="1" i="0">
                 <a:solidFill>
-                  <a:srgbClr val="1E2761"/>
+                  <a:srgbClr val="23242A"/>
                 </a:solidFill>
                 <a:latin typeface="Calibri"/>
               </a:rPr>
@@ -22608,7 +22712,7 @@
             <a:avLst/>
           </a:prstGeom>
           <a:solidFill>
-            <a:srgbClr val="F0F0F0"/>
+            <a:srgbClr val="F4F3F0"/>
           </a:solidFill>
           <a:ln>
             <a:noFill/>
@@ -22652,7 +22756,7 @@
             <a:avLst/>
           </a:prstGeom>
           <a:solidFill>
-            <a:srgbClr val="1E2761"/>
+            <a:srgbClr val="23242A"/>
           </a:solidFill>
           <a:ln>
             <a:noFill/>
@@ -22742,7 +22846,7 @@
             <a:r>
               <a:rPr sz="1200" b="1" i="0">
                 <a:solidFill>
-                  <a:srgbClr val="1E2761"/>
+                  <a:srgbClr val="23242A"/>
                 </a:solidFill>
                 <a:latin typeface="Calibri"/>
               </a:rPr>
@@ -22777,7 +22881,7 @@
             <a:r>
               <a:rPr sz="900" b="0" i="0">
                 <a:solidFill>
-                  <a:srgbClr val="606060"/>
+                  <a:srgbClr val="6B6D76"/>
                 </a:solidFill>
                 <a:latin typeface="Calibri"/>
               </a:rPr>
@@ -22812,7 +22916,7 @@
             <a:r>
               <a:rPr sz="1500" b="1" i="0">
                 <a:solidFill>
-                  <a:srgbClr val="1E2761"/>
+                  <a:srgbClr val="23242A"/>
                 </a:solidFill>
                 <a:latin typeface="Calibri"/>
               </a:rPr>
@@ -22836,7 +22940,7 @@
             <a:avLst/>
           </a:prstGeom>
           <a:solidFill>
-            <a:srgbClr val="F0F0F0"/>
+            <a:srgbClr val="F4F3F0"/>
           </a:solidFill>
           <a:ln>
             <a:noFill/>
@@ -22880,7 +22984,7 @@
             <a:avLst/>
           </a:prstGeom>
           <a:solidFill>
-            <a:srgbClr val="1E2761"/>
+            <a:srgbClr val="23242A"/>
           </a:solidFill>
           <a:ln>
             <a:noFill/>
@@ -22970,7 +23074,7 @@
             <a:r>
               <a:rPr sz="1200" b="1" i="0">
                 <a:solidFill>
-                  <a:srgbClr val="1E2761"/>
+                  <a:srgbClr val="23242A"/>
                 </a:solidFill>
                 <a:latin typeface="Calibri"/>
               </a:rPr>
@@ -23005,7 +23109,7 @@
             <a:r>
               <a:rPr sz="900" b="0" i="0">
                 <a:solidFill>
-                  <a:srgbClr val="606060"/>
+                  <a:srgbClr val="6B6D76"/>
                 </a:solidFill>
                 <a:latin typeface="Calibri"/>
               </a:rPr>
@@ -23040,7 +23144,7 @@
             <a:r>
               <a:rPr sz="1500" b="1" i="0">
                 <a:solidFill>
-                  <a:srgbClr val="1E2761"/>
+                  <a:srgbClr val="23242A"/>
                 </a:solidFill>
                 <a:latin typeface="Calibri"/>
               </a:rPr>
@@ -23064,7 +23168,7 @@
             <a:avLst/>
           </a:prstGeom>
           <a:solidFill>
-            <a:srgbClr val="D4AF37"/>
+            <a:srgbClr val="C9A227"/>
           </a:solidFill>
           <a:ln>
             <a:noFill/>
@@ -23119,7 +23223,7 @@
             <a:r>
               <a:rPr sz="1400" b="1" i="0">
                 <a:solidFill>
-                  <a:srgbClr val="1E2761"/>
+                  <a:srgbClr val="23242A"/>
                 </a:solidFill>
                 <a:latin typeface="Calibri"/>
               </a:rPr>
@@ -23154,7 +23258,7 @@
             <a:r>
               <a:rPr sz="1400" b="1" i="0">
                 <a:solidFill>
-                  <a:srgbClr val="1E2761"/>
+                  <a:srgbClr val="23242A"/>
                 </a:solidFill>
                 <a:latin typeface="Calibri"/>
               </a:rPr>
@@ -23189,7 +23293,7 @@
             <a:r>
               <a:rPr sz="900" b="0" i="0">
                 <a:solidFill>
-                  <a:srgbClr val="606060"/>
+                  <a:srgbClr val="6B6D76"/>
                 </a:solidFill>
                 <a:latin typeface="Calibri"/>
               </a:rPr>
@@ -23206,7 +23310,7 @@
 </p:sld>
 </file>
 
-<file path=ppt/slides/slide18.xml><?xml version="1.0" encoding="utf-8"?>
+<file path=ppt\slides\slide18.xml><?xml version="1.0" encoding="utf-8"?>
 <p:sld xmlns:a="http://schemas.openxmlformats.org/drawingml/2006/main" xmlns:r="http://schemas.openxmlformats.org/officeDocument/2006/relationships" xmlns:p="http://schemas.openxmlformats.org/presentationml/2006/main">
   <p:cSld>
     <p:spTree>
@@ -23238,7 +23342,7 @@
             <a:avLst/>
           </a:prstGeom>
           <a:solidFill>
-            <a:srgbClr val="1E2761"/>
+            <a:srgbClr val="23242A"/>
           </a:solidFill>
           <a:ln>
             <a:noFill/>
@@ -23297,7 +23401,7 @@
                 </a:solidFill>
                 <a:latin typeface="Calibri"/>
               </a:rPr>
-              <a:t>Critical Path  ·  Cannot Slip</a:t>
+              <a:t>Critical Path  |  Cannot Slip</a:t>
             </a:r>
           </a:p>
         </p:txBody>
@@ -23328,7 +23432,7 @@
             <a:r>
               <a:rPr sz="1200" b="0" i="1">
                 <a:solidFill>
-                  <a:srgbClr val="CADCFC"/>
+                  <a:srgbClr val="C8C9D0"/>
                 </a:solidFill>
                 <a:latin typeface="Calibri"/>
               </a:rPr>
@@ -23352,7 +23456,7 @@
             <a:avLst/>
           </a:prstGeom>
           <a:solidFill>
-            <a:srgbClr val="4CAF50"/>
+            <a:srgbClr val="2E7D32"/>
           </a:solidFill>
           <a:ln>
             <a:noFill/>
@@ -23466,7 +23570,7 @@
             <a:avLst/>
           </a:prstGeom>
           <a:solidFill>
-            <a:srgbClr val="0F1433"/>
+            <a:srgbClr val="16171B"/>
           </a:solidFill>
           <a:ln>
             <a:noFill/>
@@ -23510,7 +23614,7 @@
             <a:avLst/>
           </a:prstGeom>
           <a:solidFill>
-            <a:srgbClr val="2196F3"/>
+            <a:srgbClr val="2C5F8A"/>
           </a:solidFill>
           <a:ln>
             <a:noFill/>
@@ -23624,7 +23728,7 @@
             <a:avLst/>
           </a:prstGeom>
           <a:solidFill>
-            <a:srgbClr val="0F1433"/>
+            <a:srgbClr val="16171B"/>
           </a:solidFill>
           <a:ln>
             <a:noFill/>
@@ -23668,7 +23772,7 @@
             <a:avLst/>
           </a:prstGeom>
           <a:solidFill>
-            <a:srgbClr val="E97132"/>
+            <a:srgbClr val="B26A00"/>
           </a:solidFill>
           <a:ln>
             <a:noFill/>
@@ -23782,7 +23886,7 @@
             <a:avLst/>
           </a:prstGeom>
           <a:solidFill>
-            <a:srgbClr val="0F1433"/>
+            <a:srgbClr val="16171B"/>
           </a:solidFill>
           <a:ln>
             <a:noFill/>
@@ -23826,7 +23930,7 @@
             <a:avLst/>
           </a:prstGeom>
           <a:solidFill>
-            <a:srgbClr val="9C27B0"/>
+            <a:srgbClr val="6A3D9A"/>
           </a:solidFill>
           <a:ln>
             <a:noFill/>
@@ -23951,7 +24055,7 @@
             <a:r>
               <a:rPr sz="3200" b="1" i="0">
                 <a:solidFill>
-                  <a:srgbClr val="0F1433"/>
+                  <a:srgbClr val="16171B"/>
                 </a:solidFill>
                 <a:latin typeface="Calibri"/>
               </a:rPr>
@@ -23975,7 +24079,7 @@
             <a:avLst/>
           </a:prstGeom>
           <a:solidFill>
-            <a:srgbClr val="D4AF37"/>
+            <a:srgbClr val="C9A227"/>
           </a:solidFill>
           <a:ln>
             <a:noFill/>
@@ -24089,7 +24193,7 @@
             <a:avLst/>
           </a:prstGeom>
           <a:solidFill>
-            <a:srgbClr val="E53935"/>
+            <a:srgbClr val="C62828"/>
           </a:solidFill>
           <a:ln>
             <a:noFill/>
@@ -24203,7 +24307,7 @@
             <a:avLst/>
           </a:prstGeom>
           <a:solidFill>
-            <a:srgbClr val="00BCD4"/>
+            <a:srgbClr val="2C5F8A"/>
           </a:solidFill>
           <a:ln>
             <a:noFill/>
@@ -24317,7 +24421,7 @@
             <a:avLst/>
           </a:prstGeom>
           <a:solidFill>
-            <a:srgbClr val="E53935"/>
+            <a:srgbClr val="C62828"/>
           </a:solidFill>
           <a:ln>
             <a:noFill/>
@@ -24431,7 +24535,7 @@
             <a:avLst/>
           </a:prstGeom>
           <a:solidFill>
-            <a:srgbClr val="0F1433"/>
+            <a:srgbClr val="16171B"/>
           </a:solidFill>
           <a:ln>
             <a:noFill/>
@@ -24486,7 +24590,7 @@
             <a:r>
               <a:rPr sz="1300" b="1" i="0">
                 <a:solidFill>
-                  <a:srgbClr val="D4AF37"/>
+                  <a:srgbClr val="C9A227"/>
                 </a:solidFill>
                 <a:latin typeface="Calibri"/>
               </a:rPr>
@@ -24521,7 +24625,7 @@
             <a:r>
               <a:rPr sz="1000" b="0" i="1">
                 <a:solidFill>
-                  <a:srgbClr val="CADCFC"/>
+                  <a:srgbClr val="C8C9D0"/>
                 </a:solidFill>
                 <a:latin typeface="Calibri"/>
               </a:rPr>
@@ -24545,7 +24649,7 @@
             <a:avLst/>
           </a:prstGeom>
           <a:solidFill>
-            <a:srgbClr val="D4AF37"/>
+            <a:srgbClr val="C9A227"/>
           </a:solidFill>
           <a:ln>
             <a:noFill/>
@@ -24635,7 +24739,7 @@
             <a:r>
               <a:rPr sz="900" b="0" i="1">
                 <a:solidFill>
-                  <a:srgbClr val="CADCFC"/>
+                  <a:srgbClr val="C8C9D0"/>
                 </a:solidFill>
                 <a:latin typeface="Calibri"/>
               </a:rPr>
@@ -24705,7 +24809,7 @@
             <a:r>
               <a:rPr sz="900" b="0" i="1">
                 <a:solidFill>
-                  <a:srgbClr val="CADCFC"/>
+                  <a:srgbClr val="C8C9D0"/>
                 </a:solidFill>
                 <a:latin typeface="Calibri"/>
               </a:rPr>
@@ -24775,7 +24879,7 @@
             <a:r>
               <a:rPr sz="900" b="0" i="1">
                 <a:solidFill>
-                  <a:srgbClr val="CADCFC"/>
+                  <a:srgbClr val="C8C9D0"/>
                 </a:solidFill>
                 <a:latin typeface="Calibri"/>
               </a:rPr>
@@ -24845,7 +24949,7 @@
             <a:r>
               <a:rPr sz="900" b="0" i="1">
                 <a:solidFill>
-                  <a:srgbClr val="CADCFC"/>
+                  <a:srgbClr val="C8C9D0"/>
                 </a:solidFill>
                 <a:latin typeface="Calibri"/>
               </a:rPr>
@@ -24915,7 +25019,7 @@
             <a:r>
               <a:rPr sz="900" b="0" i="1">
                 <a:solidFill>
-                  <a:srgbClr val="CADCFC"/>
+                  <a:srgbClr val="C8C9D0"/>
                 </a:solidFill>
                 <a:latin typeface="Calibri"/>
               </a:rPr>
@@ -24985,7 +25089,7 @@
             <a:r>
               <a:rPr sz="900" b="0" i="1">
                 <a:solidFill>
-                  <a:srgbClr val="CADCFC"/>
+                  <a:srgbClr val="C8C9D0"/>
                 </a:solidFill>
                 <a:latin typeface="Calibri"/>
               </a:rPr>
@@ -25009,7 +25113,7 @@
             <a:avLst/>
           </a:prstGeom>
           <a:solidFill>
-            <a:srgbClr val="D4AF37"/>
+            <a:srgbClr val="C9A227"/>
           </a:solidFill>
           <a:ln>
             <a:noFill/>
@@ -25064,7 +25168,7 @@
             <a:r>
               <a:rPr sz="1300" b="1" i="0">
                 <a:solidFill>
-                  <a:srgbClr val="1E2761"/>
+                  <a:srgbClr val="23242A"/>
                 </a:solidFill>
                 <a:latin typeface="Calibri"/>
               </a:rPr>
@@ -25099,7 +25203,7 @@
             <a:r>
               <a:rPr sz="1100" b="0" i="0">
                 <a:solidFill>
-                  <a:srgbClr val="1E2761"/>
+                  <a:srgbClr val="23242A"/>
                 </a:solidFill>
                 <a:latin typeface="Calibri"/>
               </a:rPr>
@@ -25134,7 +25238,7 @@
             <a:r>
               <a:rPr sz="900" b="0" i="0">
                 <a:solidFill>
-                  <a:srgbClr val="606060"/>
+                  <a:srgbClr val="6B6D76"/>
                 </a:solidFill>
                 <a:latin typeface="Calibri"/>
               </a:rPr>
@@ -25151,7 +25255,7 @@
 </p:sld>
 </file>
 
-<file path=ppt/slides/slide19.xml><?xml version="1.0" encoding="utf-8"?>
+<file path=ppt\slides\slide19.xml><?xml version="1.0" encoding="utf-8"?>
 <p:sld xmlns:a="http://schemas.openxmlformats.org/drawingml/2006/main" xmlns:r="http://schemas.openxmlformats.org/officeDocument/2006/relationships" xmlns:p="http://schemas.openxmlformats.org/presentationml/2006/main">
   <p:cSld>
     <p:spTree>
@@ -25183,7 +25287,7 @@
             <a:avLst/>
           </a:prstGeom>
           <a:solidFill>
-            <a:srgbClr val="1E2761"/>
+            <a:srgbClr val="23242A"/>
           </a:solidFill>
           <a:ln>
             <a:noFill/>
@@ -25242,7 +25346,7 @@
                 </a:solidFill>
                 <a:latin typeface="Calibri"/>
               </a:rPr>
-              <a:t>Meeting Cadence  ·  Communication Plan</a:t>
+              <a:t>Meeting Cadence  |  Communication Plan</a:t>
             </a:r>
           </a:p>
         </p:txBody>
@@ -25273,7 +25377,7 @@
             <a:r>
               <a:rPr sz="1200" b="0" i="1">
                 <a:solidFill>
-                  <a:srgbClr val="CADCFC"/>
+                  <a:srgbClr val="C8C9D0"/>
                 </a:solidFill>
                 <a:latin typeface="Calibri"/>
               </a:rPr>
@@ -25297,7 +25401,7 @@
             <a:avLst/>
           </a:prstGeom>
           <a:solidFill>
-            <a:srgbClr val="2196F3"/>
+            <a:srgbClr val="2C5F8A"/>
           </a:solidFill>
           <a:ln>
             <a:noFill/>
@@ -25466,7 +25570,7 @@
             <a:r>
               <a:rPr sz="900" b="0" i="0">
                 <a:solidFill>
-                  <a:srgbClr val="CADCFC"/>
+                  <a:srgbClr val="C8C9D0"/>
                 </a:solidFill>
                 <a:latin typeface="Calibri"/>
               </a:rPr>
@@ -25536,7 +25640,7 @@
             <a:r>
               <a:rPr sz="900" b="0" i="0">
                 <a:solidFill>
-                  <a:srgbClr val="CADCFC"/>
+                  <a:srgbClr val="C8C9D0"/>
                 </a:solidFill>
                 <a:latin typeface="Calibri"/>
               </a:rPr>
@@ -25606,7 +25710,7 @@
             <a:r>
               <a:rPr sz="900" b="0" i="0">
                 <a:solidFill>
-                  <a:srgbClr val="CADCFC"/>
+                  <a:srgbClr val="C8C9D0"/>
                 </a:solidFill>
                 <a:latin typeface="Calibri"/>
               </a:rPr>
@@ -25676,7 +25780,7 @@
             <a:r>
               <a:rPr sz="900" b="0" i="0">
                 <a:solidFill>
-                  <a:srgbClr val="CADCFC"/>
+                  <a:srgbClr val="C8C9D0"/>
                 </a:solidFill>
                 <a:latin typeface="Calibri"/>
               </a:rPr>
@@ -25700,7 +25804,7 @@
             <a:avLst/>
           </a:prstGeom>
           <a:solidFill>
-            <a:srgbClr val="D4AF37"/>
+            <a:srgbClr val="C9A227"/>
           </a:solidFill>
           <a:ln>
             <a:noFill/>
@@ -25869,7 +25973,7 @@
             <a:r>
               <a:rPr sz="900" b="0" i="0">
                 <a:solidFill>
-                  <a:srgbClr val="CADCFC"/>
+                  <a:srgbClr val="C8C9D0"/>
                 </a:solidFill>
                 <a:latin typeface="Calibri"/>
               </a:rPr>
@@ -25939,7 +26043,7 @@
             <a:r>
               <a:rPr sz="900" b="0" i="0">
                 <a:solidFill>
-                  <a:srgbClr val="CADCFC"/>
+                  <a:srgbClr val="C8C9D0"/>
                 </a:solidFill>
                 <a:latin typeface="Calibri"/>
               </a:rPr>
@@ -26009,7 +26113,7 @@
             <a:r>
               <a:rPr sz="900" b="0" i="0">
                 <a:solidFill>
-                  <a:srgbClr val="CADCFC"/>
+                  <a:srgbClr val="C8C9D0"/>
                 </a:solidFill>
                 <a:latin typeface="Calibri"/>
               </a:rPr>
@@ -26079,7 +26183,7 @@
             <a:r>
               <a:rPr sz="900" b="0" i="0">
                 <a:solidFill>
-                  <a:srgbClr val="CADCFC"/>
+                  <a:srgbClr val="C8C9D0"/>
                 </a:solidFill>
                 <a:latin typeface="Calibri"/>
               </a:rPr>
@@ -26103,7 +26207,7 @@
             <a:avLst/>
           </a:prstGeom>
           <a:solidFill>
-            <a:srgbClr val="9C27B0"/>
+            <a:srgbClr val="6A3D9A"/>
           </a:solidFill>
           <a:ln>
             <a:noFill/>
@@ -26272,7 +26376,7 @@
             <a:r>
               <a:rPr sz="900" b="0" i="0">
                 <a:solidFill>
-                  <a:srgbClr val="CADCFC"/>
+                  <a:srgbClr val="C8C9D0"/>
                 </a:solidFill>
                 <a:latin typeface="Calibri"/>
               </a:rPr>
@@ -26342,7 +26446,7 @@
             <a:r>
               <a:rPr sz="900" b="0" i="0">
                 <a:solidFill>
-                  <a:srgbClr val="CADCFC"/>
+                  <a:srgbClr val="C8C9D0"/>
                 </a:solidFill>
                 <a:latin typeface="Calibri"/>
               </a:rPr>
@@ -26412,7 +26516,7 @@
             <a:r>
               <a:rPr sz="900" b="0" i="0">
                 <a:solidFill>
-                  <a:srgbClr val="CADCFC"/>
+                  <a:srgbClr val="C8C9D0"/>
                 </a:solidFill>
                 <a:latin typeface="Calibri"/>
               </a:rPr>
@@ -26482,7 +26586,7 @@
             <a:r>
               <a:rPr sz="900" b="0" i="0">
                 <a:solidFill>
-                  <a:srgbClr val="CADCFC"/>
+                  <a:srgbClr val="C8C9D0"/>
                 </a:solidFill>
                 <a:latin typeface="Calibri"/>
               </a:rPr>
@@ -26552,7 +26656,7 @@
             <a:r>
               <a:rPr sz="900" b="0" i="0">
                 <a:solidFill>
-                  <a:srgbClr val="CADCFC"/>
+                  <a:srgbClr val="C8C9D0"/>
                 </a:solidFill>
                 <a:latin typeface="Calibri"/>
               </a:rPr>
@@ -26587,7 +26691,7 @@
             <a:r>
               <a:rPr sz="900" b="0" i="0">
                 <a:solidFill>
-                  <a:srgbClr val="606060"/>
+                  <a:srgbClr val="6B6D76"/>
                 </a:solidFill>
                 <a:latin typeface="Calibri"/>
               </a:rPr>
@@ -26604,7 +26708,7 @@
 </p:sld>
 </file>
 
-<file path=ppt/slides/slide2.xml><?xml version="1.0" encoding="utf-8"?>
+<file path=ppt\slides\slide2.xml><?xml version="1.0" encoding="utf-8"?>
 <p:sld xmlns:a="http://schemas.openxmlformats.org/drawingml/2006/main" xmlns:r="http://schemas.openxmlformats.org/officeDocument/2006/relationships" xmlns:p="http://schemas.openxmlformats.org/presentationml/2006/main">
   <p:cSld>
     <p:spTree>
@@ -26636,7 +26740,7 @@
             <a:avLst/>
           </a:prstGeom>
           <a:solidFill>
-            <a:srgbClr val="1E2761"/>
+            <a:srgbClr val="23242A"/>
           </a:solidFill>
           <a:ln>
             <a:noFill/>
@@ -26726,7 +26830,7 @@
             <a:r>
               <a:rPr sz="1200" b="0" i="1">
                 <a:solidFill>
-                  <a:srgbClr val="CADCFC"/>
+                  <a:srgbClr val="C8C9D0"/>
                 </a:solidFill>
                 <a:latin typeface="Calibri"/>
               </a:rPr>
@@ -26750,7 +26854,7 @@
             <a:avLst/>
           </a:prstGeom>
           <a:solidFill>
-            <a:srgbClr val="1E2761"/>
+            <a:srgbClr val="23242A"/>
           </a:solidFill>
           <a:ln>
             <a:noFill/>
@@ -26805,7 +26909,7 @@
             <a:r>
               <a:rPr sz="2800" b="1" i="0">
                 <a:solidFill>
-                  <a:srgbClr val="D4AF37"/>
+                  <a:srgbClr val="C9A227"/>
                 </a:solidFill>
                 <a:latin typeface="Calibri"/>
               </a:rPr>
@@ -26875,7 +26979,7 @@
             <a:r>
               <a:rPr sz="900" b="0" i="1">
                 <a:solidFill>
-                  <a:srgbClr val="CADCFC"/>
+                  <a:srgbClr val="C8C9D0"/>
                 </a:solidFill>
                 <a:latin typeface="Calibri"/>
               </a:rPr>
@@ -26899,7 +27003,7 @@
             <a:avLst/>
           </a:prstGeom>
           <a:solidFill>
-            <a:srgbClr val="1E2761"/>
+            <a:srgbClr val="23242A"/>
           </a:solidFill>
           <a:ln>
             <a:noFill/>
@@ -26954,7 +27058,7 @@
             <a:r>
               <a:rPr sz="2800" b="1" i="0">
                 <a:solidFill>
-                  <a:srgbClr val="D4AF37"/>
+                  <a:srgbClr val="C9A227"/>
                 </a:solidFill>
                 <a:latin typeface="Calibri"/>
               </a:rPr>
@@ -27024,7 +27128,7 @@
             <a:r>
               <a:rPr sz="900" b="0" i="1">
                 <a:solidFill>
-                  <a:srgbClr val="CADCFC"/>
+                  <a:srgbClr val="C8C9D0"/>
                 </a:solidFill>
                 <a:latin typeface="Calibri"/>
               </a:rPr>
@@ -27048,7 +27152,7 @@
             <a:avLst/>
           </a:prstGeom>
           <a:solidFill>
-            <a:srgbClr val="1E2761"/>
+            <a:srgbClr val="23242A"/>
           </a:solidFill>
           <a:ln>
             <a:noFill/>
@@ -27103,7 +27207,7 @@
             <a:r>
               <a:rPr sz="2800" b="1" i="0">
                 <a:solidFill>
-                  <a:srgbClr val="D4AF37"/>
+                  <a:srgbClr val="C9A227"/>
                 </a:solidFill>
                 <a:latin typeface="Calibri"/>
               </a:rPr>
@@ -27173,7 +27277,7 @@
             <a:r>
               <a:rPr sz="900" b="0" i="1">
                 <a:solidFill>
-                  <a:srgbClr val="CADCFC"/>
+                  <a:srgbClr val="C8C9D0"/>
                 </a:solidFill>
                 <a:latin typeface="Calibri"/>
               </a:rPr>
@@ -27197,7 +27301,7 @@
             <a:avLst/>
           </a:prstGeom>
           <a:solidFill>
-            <a:srgbClr val="1E2761"/>
+            <a:srgbClr val="23242A"/>
           </a:solidFill>
           <a:ln>
             <a:noFill/>
@@ -27252,7 +27356,7 @@
             <a:r>
               <a:rPr sz="2800" b="1" i="0">
                 <a:solidFill>
-                  <a:srgbClr val="D4AF37"/>
+                  <a:srgbClr val="C9A227"/>
                 </a:solidFill>
                 <a:latin typeface="Calibri"/>
               </a:rPr>
@@ -27322,7 +27426,7 @@
             <a:r>
               <a:rPr sz="900" b="0" i="1">
                 <a:solidFill>
-                  <a:srgbClr val="CADCFC"/>
+                  <a:srgbClr val="C8C9D0"/>
                 </a:solidFill>
                 <a:latin typeface="Calibri"/>
               </a:rPr>
@@ -27346,7 +27450,7 @@
             <a:avLst/>
           </a:prstGeom>
           <a:solidFill>
-            <a:srgbClr val="1E2761"/>
+            <a:srgbClr val="23242A"/>
           </a:solidFill>
           <a:ln>
             <a:noFill/>
@@ -27401,7 +27505,7 @@
             <a:r>
               <a:rPr sz="2800" b="1" i="0">
                 <a:solidFill>
-                  <a:srgbClr val="D4AF37"/>
+                  <a:srgbClr val="C9A227"/>
                 </a:solidFill>
                 <a:latin typeface="Calibri"/>
               </a:rPr>
@@ -27471,7 +27575,7 @@
             <a:r>
               <a:rPr sz="900" b="0" i="1">
                 <a:solidFill>
-                  <a:srgbClr val="CADCFC"/>
+                  <a:srgbClr val="C8C9D0"/>
                 </a:solidFill>
                 <a:latin typeface="Calibri"/>
               </a:rPr>
@@ -27495,7 +27599,7 @@
             <a:avLst/>
           </a:prstGeom>
           <a:solidFill>
-            <a:srgbClr val="F0F0F0"/>
+            <a:srgbClr val="F4F3F0"/>
           </a:solidFill>
           <a:ln>
             <a:noFill/>
@@ -27550,7 +27654,7 @@
             <a:r>
               <a:rPr sz="1700" b="1" i="0">
                 <a:solidFill>
-                  <a:srgbClr val="1E2761"/>
+                  <a:srgbClr val="23242A"/>
                 </a:solidFill>
                 <a:latin typeface="Calibri"/>
               </a:rPr>
@@ -27574,7 +27678,7 @@
             <a:avLst/>
           </a:prstGeom>
           <a:solidFill>
-            <a:srgbClr val="D4AF37"/>
+            <a:srgbClr val="C9A227"/>
           </a:solidFill>
           <a:ln>
             <a:noFill/>
@@ -27629,11 +27733,11 @@
             <a:r>
               <a:rPr sz="2200" b="1" i="0">
                 <a:solidFill>
-                  <a:srgbClr val="1E2761"/>
-                </a:solidFill>
-                <a:latin typeface="Calibri"/>
-              </a:rPr>
-              <a:t>·</a:t>
+                  <a:srgbClr val="23242A"/>
+                </a:solidFill>
+                <a:latin typeface="Calibri"/>
+              </a:rPr>
+              <a:t>  |  </a:t>
             </a:r>
           </a:p>
         </p:txBody>
@@ -27664,7 +27768,7 @@
             <a:r>
               <a:rPr sz="1200" b="1" i="0">
                 <a:solidFill>
-                  <a:srgbClr val="1E2761"/>
+                  <a:srgbClr val="23242A"/>
                 </a:solidFill>
                 <a:latin typeface="Calibri"/>
               </a:rPr>
@@ -27699,7 +27803,7 @@
             <a:r>
               <a:rPr sz="1000" b="0" i="0">
                 <a:solidFill>
-                  <a:srgbClr val="0F1433"/>
+                  <a:srgbClr val="16171B"/>
                 </a:solidFill>
                 <a:latin typeface="Calibri"/>
               </a:rPr>
@@ -27723,7 +27827,7 @@
             <a:avLst/>
           </a:prstGeom>
           <a:solidFill>
-            <a:srgbClr val="D4AF37"/>
+            <a:srgbClr val="C9A227"/>
           </a:solidFill>
           <a:ln>
             <a:noFill/>
@@ -27778,11 +27882,11 @@
             <a:r>
               <a:rPr sz="2200" b="1" i="0">
                 <a:solidFill>
-                  <a:srgbClr val="1E2761"/>
-                </a:solidFill>
-                <a:latin typeface="Calibri"/>
-              </a:rPr>
-              <a:t>·</a:t>
+                  <a:srgbClr val="23242A"/>
+                </a:solidFill>
+                <a:latin typeface="Calibri"/>
+              </a:rPr>
+              <a:t>  |  </a:t>
             </a:r>
           </a:p>
         </p:txBody>
@@ -27813,7 +27917,7 @@
             <a:r>
               <a:rPr sz="1200" b="1" i="0">
                 <a:solidFill>
-                  <a:srgbClr val="1E2761"/>
+                  <a:srgbClr val="23242A"/>
                 </a:solidFill>
                 <a:latin typeface="Calibri"/>
               </a:rPr>
@@ -27848,7 +27952,7 @@
             <a:r>
               <a:rPr sz="1000" b="0" i="0">
                 <a:solidFill>
-                  <a:srgbClr val="0F1433"/>
+                  <a:srgbClr val="16171B"/>
                 </a:solidFill>
                 <a:latin typeface="Calibri"/>
               </a:rPr>
@@ -27872,7 +27976,7 @@
             <a:avLst/>
           </a:prstGeom>
           <a:solidFill>
-            <a:srgbClr val="D4AF37"/>
+            <a:srgbClr val="C9A227"/>
           </a:solidFill>
           <a:ln>
             <a:noFill/>
@@ -27927,11 +28031,11 @@
             <a:r>
               <a:rPr sz="2200" b="1" i="0">
                 <a:solidFill>
-                  <a:srgbClr val="1E2761"/>
-                </a:solidFill>
-                <a:latin typeface="Calibri"/>
-              </a:rPr>
-              <a:t>·</a:t>
+                  <a:srgbClr val="23242A"/>
+                </a:solidFill>
+                <a:latin typeface="Calibri"/>
+              </a:rPr>
+              <a:t>  |  </a:t>
             </a:r>
           </a:p>
         </p:txBody>
@@ -27962,7 +28066,7 @@
             <a:r>
               <a:rPr sz="1200" b="1" i="0">
                 <a:solidFill>
-                  <a:srgbClr val="1E2761"/>
+                  <a:srgbClr val="23242A"/>
                 </a:solidFill>
                 <a:latin typeface="Calibri"/>
               </a:rPr>
@@ -27997,7 +28101,7 @@
             <a:r>
               <a:rPr sz="1000" b="0" i="0">
                 <a:solidFill>
-                  <a:srgbClr val="0F1433"/>
+                  <a:srgbClr val="16171B"/>
                 </a:solidFill>
                 <a:latin typeface="Calibri"/>
               </a:rPr>
@@ -28021,7 +28125,7 @@
             <a:avLst/>
           </a:prstGeom>
           <a:solidFill>
-            <a:srgbClr val="D4AF37"/>
+            <a:srgbClr val="C9A227"/>
           </a:solidFill>
           <a:ln>
             <a:noFill/>
@@ -28076,11 +28180,11 @@
             <a:r>
               <a:rPr sz="2200" b="1" i="0">
                 <a:solidFill>
-                  <a:srgbClr val="1E2761"/>
-                </a:solidFill>
-                <a:latin typeface="Calibri"/>
-              </a:rPr>
-              <a:t>·</a:t>
+                  <a:srgbClr val="23242A"/>
+                </a:solidFill>
+                <a:latin typeface="Calibri"/>
+              </a:rPr>
+              <a:t>  |  </a:t>
             </a:r>
           </a:p>
         </p:txBody>
@@ -28111,7 +28215,7 @@
             <a:r>
               <a:rPr sz="1200" b="1" i="0">
                 <a:solidFill>
-                  <a:srgbClr val="1E2761"/>
+                  <a:srgbClr val="23242A"/>
                 </a:solidFill>
                 <a:latin typeface="Calibri"/>
               </a:rPr>
@@ -28146,7 +28250,7 @@
             <a:r>
               <a:rPr sz="1000" b="0" i="0">
                 <a:solidFill>
-                  <a:srgbClr val="0F1433"/>
+                  <a:srgbClr val="16171B"/>
                 </a:solidFill>
                 <a:latin typeface="Calibri"/>
               </a:rPr>
@@ -28170,7 +28274,7 @@
             <a:avLst/>
           </a:prstGeom>
           <a:solidFill>
-            <a:srgbClr val="D4AF37"/>
+            <a:srgbClr val="C9A227"/>
           </a:solidFill>
           <a:ln>
             <a:noFill/>
@@ -28225,11 +28329,11 @@
             <a:r>
               <a:rPr sz="2200" b="1" i="0">
                 <a:solidFill>
-                  <a:srgbClr val="1E2761"/>
-                </a:solidFill>
-                <a:latin typeface="Calibri"/>
-              </a:rPr>
-              <a:t>·</a:t>
+                  <a:srgbClr val="23242A"/>
+                </a:solidFill>
+                <a:latin typeface="Calibri"/>
+              </a:rPr>
+              <a:t>  |  </a:t>
             </a:r>
           </a:p>
         </p:txBody>
@@ -28260,7 +28364,7 @@
             <a:r>
               <a:rPr sz="1200" b="1" i="0">
                 <a:solidFill>
-                  <a:srgbClr val="1E2761"/>
+                  <a:srgbClr val="23242A"/>
                 </a:solidFill>
                 <a:latin typeface="Calibri"/>
               </a:rPr>
@@ -28295,7 +28399,7 @@
             <a:r>
               <a:rPr sz="1000" b="0" i="0">
                 <a:solidFill>
-                  <a:srgbClr val="0F1433"/>
+                  <a:srgbClr val="16171B"/>
                 </a:solidFill>
                 <a:latin typeface="Calibri"/>
               </a:rPr>
@@ -28319,7 +28423,7 @@
             <a:avLst/>
           </a:prstGeom>
           <a:solidFill>
-            <a:srgbClr val="D4AF37"/>
+            <a:srgbClr val="C9A227"/>
           </a:solidFill>
           <a:ln>
             <a:noFill/>
@@ -28374,11 +28478,11 @@
             <a:r>
               <a:rPr sz="2200" b="1" i="0">
                 <a:solidFill>
-                  <a:srgbClr val="1E2761"/>
-                </a:solidFill>
-                <a:latin typeface="Calibri"/>
-              </a:rPr>
-              <a:t>·</a:t>
+                  <a:srgbClr val="23242A"/>
+                </a:solidFill>
+                <a:latin typeface="Calibri"/>
+              </a:rPr>
+              <a:t>  |  </a:t>
             </a:r>
           </a:p>
         </p:txBody>
@@ -28409,7 +28513,7 @@
             <a:r>
               <a:rPr sz="1200" b="1" i="0">
                 <a:solidFill>
-                  <a:srgbClr val="1E2761"/>
+                  <a:srgbClr val="23242A"/>
                 </a:solidFill>
                 <a:latin typeface="Calibri"/>
               </a:rPr>
@@ -28444,7 +28548,7 @@
             <a:r>
               <a:rPr sz="1000" b="0" i="0">
                 <a:solidFill>
-                  <a:srgbClr val="0F1433"/>
+                  <a:srgbClr val="16171B"/>
                 </a:solidFill>
                 <a:latin typeface="Calibri"/>
               </a:rPr>
@@ -28468,7 +28572,7 @@
             <a:avLst/>
           </a:prstGeom>
           <a:solidFill>
-            <a:srgbClr val="D4AF37"/>
+            <a:srgbClr val="C9A227"/>
           </a:solidFill>
           <a:ln>
             <a:noFill/>
@@ -28523,11 +28627,11 @@
             <a:r>
               <a:rPr sz="2200" b="1" i="0">
                 <a:solidFill>
-                  <a:srgbClr val="1E2761"/>
-                </a:solidFill>
-                <a:latin typeface="Calibri"/>
-              </a:rPr>
-              <a:t>·</a:t>
+                  <a:srgbClr val="23242A"/>
+                </a:solidFill>
+                <a:latin typeface="Calibri"/>
+              </a:rPr>
+              <a:t>  |  </a:t>
             </a:r>
           </a:p>
         </p:txBody>
@@ -28558,7 +28662,7 @@
             <a:r>
               <a:rPr sz="1200" b="1" i="0">
                 <a:solidFill>
-                  <a:srgbClr val="1E2761"/>
+                  <a:srgbClr val="23242A"/>
                 </a:solidFill>
                 <a:latin typeface="Calibri"/>
               </a:rPr>
@@ -28593,7 +28697,7 @@
             <a:r>
               <a:rPr sz="1000" b="0" i="0">
                 <a:solidFill>
-                  <a:srgbClr val="0F1433"/>
+                  <a:srgbClr val="16171B"/>
                 </a:solidFill>
                 <a:latin typeface="Calibri"/>
               </a:rPr>
@@ -28628,7 +28732,7 @@
             <a:r>
               <a:rPr sz="900" b="0" i="0">
                 <a:solidFill>
-                  <a:srgbClr val="606060"/>
+                  <a:srgbClr val="6B6D76"/>
                 </a:solidFill>
                 <a:latin typeface="Calibri"/>
               </a:rPr>
@@ -28645,7 +28749,7 @@
 </p:sld>
 </file>
 
-<file path=ppt/slides/slide20.xml><?xml version="1.0" encoding="utf-8"?>
+<file path=ppt\slides\slide20.xml><?xml version="1.0" encoding="utf-8"?>
 <p:sld xmlns:a="http://schemas.openxmlformats.org/drawingml/2006/main" xmlns:r="http://schemas.openxmlformats.org/officeDocument/2006/relationships" xmlns:p="http://schemas.openxmlformats.org/presentationml/2006/main">
   <p:cSld>
     <p:spTree>
@@ -28677,7 +28781,7 @@
             <a:avLst/>
           </a:prstGeom>
           <a:solidFill>
-            <a:srgbClr val="1E2761"/>
+            <a:srgbClr val="23242A"/>
           </a:solidFill>
           <a:ln>
             <a:noFill/>
@@ -28767,7 +28871,7 @@
             <a:r>
               <a:rPr sz="1200" b="0" i="1">
                 <a:solidFill>
-                  <a:srgbClr val="CADCFC"/>
+                  <a:srgbClr val="C8C9D0"/>
                 </a:solidFill>
                 <a:latin typeface="Calibri"/>
               </a:rPr>
@@ -28791,7 +28895,7 @@
             <a:avLst/>
           </a:prstGeom>
           <a:solidFill>
-            <a:srgbClr val="1E2761"/>
+            <a:srgbClr val="23242A"/>
           </a:solidFill>
           <a:ln>
             <a:noFill/>
@@ -28846,7 +28950,7 @@
             <a:r>
               <a:rPr sz="1400" b="1" i="0">
                 <a:solidFill>
-                  <a:srgbClr val="D4AF37"/>
+                  <a:srgbClr val="C9A227"/>
                 </a:solidFill>
                 <a:latin typeface="Calibri"/>
               </a:rPr>
@@ -28870,7 +28974,7 @@
             <a:avLst/>
           </a:prstGeom>
           <a:solidFill>
-            <a:srgbClr val="F0F0F0"/>
+            <a:srgbClr val="F4F3F0"/>
           </a:solidFill>
           <a:ln>
             <a:noFill/>
@@ -28969,7 +29073,7 @@
             <a:r>
               <a:rPr sz="900" b="0" i="0">
                 <a:solidFill>
-                  <a:srgbClr val="0F1433"/>
+                  <a:srgbClr val="16171B"/>
                 </a:solidFill>
                 <a:latin typeface="Calibri"/>
               </a:rPr>
@@ -28993,7 +29097,7 @@
             <a:avLst/>
           </a:prstGeom>
           <a:solidFill>
-            <a:srgbClr val="F0F0F0"/>
+            <a:srgbClr val="F4F3F0"/>
           </a:solidFill>
           <a:ln>
             <a:noFill/>
@@ -29092,7 +29196,7 @@
             <a:r>
               <a:rPr sz="900" b="0" i="0">
                 <a:solidFill>
-                  <a:srgbClr val="0F1433"/>
+                  <a:srgbClr val="16171B"/>
                 </a:solidFill>
                 <a:latin typeface="Calibri"/>
               </a:rPr>
@@ -29116,7 +29220,7 @@
             <a:avLst/>
           </a:prstGeom>
           <a:solidFill>
-            <a:srgbClr val="F0F0F0"/>
+            <a:srgbClr val="F4F3F0"/>
           </a:solidFill>
           <a:ln>
             <a:noFill/>
@@ -29215,7 +29319,7 @@
             <a:r>
               <a:rPr sz="900" b="0" i="0">
                 <a:solidFill>
-                  <a:srgbClr val="0F1433"/>
+                  <a:srgbClr val="16171B"/>
                 </a:solidFill>
                 <a:latin typeface="Calibri"/>
               </a:rPr>
@@ -29239,7 +29343,7 @@
             <a:avLst/>
           </a:prstGeom>
           <a:solidFill>
-            <a:srgbClr val="F0F0F0"/>
+            <a:srgbClr val="F4F3F0"/>
           </a:solidFill>
           <a:ln>
             <a:noFill/>
@@ -29338,7 +29442,7 @@
             <a:r>
               <a:rPr sz="900" b="0" i="0">
                 <a:solidFill>
-                  <a:srgbClr val="0F1433"/>
+                  <a:srgbClr val="16171B"/>
                 </a:solidFill>
                 <a:latin typeface="Calibri"/>
               </a:rPr>
@@ -29362,7 +29466,7 @@
             <a:avLst/>
           </a:prstGeom>
           <a:solidFill>
-            <a:srgbClr val="F0F0F0"/>
+            <a:srgbClr val="F4F3F0"/>
           </a:solidFill>
           <a:ln>
             <a:noFill/>
@@ -29461,7 +29565,7 @@
             <a:r>
               <a:rPr sz="900" b="0" i="0">
                 <a:solidFill>
-                  <a:srgbClr val="0F1433"/>
+                  <a:srgbClr val="16171B"/>
                 </a:solidFill>
                 <a:latin typeface="Calibri"/>
               </a:rPr>
@@ -29485,7 +29589,7 @@
             <a:avLst/>
           </a:prstGeom>
           <a:solidFill>
-            <a:srgbClr val="1E2761"/>
+            <a:srgbClr val="23242A"/>
           </a:solidFill>
           <a:ln>
             <a:noFill/>
@@ -29540,7 +29644,7 @@
             <a:r>
               <a:rPr sz="1400" b="1" i="0">
                 <a:solidFill>
-                  <a:srgbClr val="D4AF37"/>
+                  <a:srgbClr val="C9A227"/>
                 </a:solidFill>
                 <a:latin typeface="Calibri"/>
               </a:rPr>
@@ -29564,7 +29668,7 @@
             <a:avLst/>
           </a:prstGeom>
           <a:solidFill>
-            <a:srgbClr val="F0F0F0"/>
+            <a:srgbClr val="F4F3F0"/>
           </a:solidFill>
           <a:ln>
             <a:noFill/>
@@ -29663,7 +29767,7 @@
             <a:r>
               <a:rPr sz="900" b="0" i="0">
                 <a:solidFill>
-                  <a:srgbClr val="0F1433"/>
+                  <a:srgbClr val="16171B"/>
                 </a:solidFill>
                 <a:latin typeface="Calibri"/>
               </a:rPr>
@@ -29687,7 +29791,7 @@
             <a:avLst/>
           </a:prstGeom>
           <a:solidFill>
-            <a:srgbClr val="F0F0F0"/>
+            <a:srgbClr val="F4F3F0"/>
           </a:solidFill>
           <a:ln>
             <a:noFill/>
@@ -29786,7 +29890,7 @@
             <a:r>
               <a:rPr sz="900" b="0" i="0">
                 <a:solidFill>
-                  <a:srgbClr val="0F1433"/>
+                  <a:srgbClr val="16171B"/>
                 </a:solidFill>
                 <a:latin typeface="Calibri"/>
               </a:rPr>
@@ -29810,7 +29914,7 @@
             <a:avLst/>
           </a:prstGeom>
           <a:solidFill>
-            <a:srgbClr val="F0F0F0"/>
+            <a:srgbClr val="F4F3F0"/>
           </a:solidFill>
           <a:ln>
             <a:noFill/>
@@ -29909,7 +30013,7 @@
             <a:r>
               <a:rPr sz="900" b="0" i="0">
                 <a:solidFill>
-                  <a:srgbClr val="0F1433"/>
+                  <a:srgbClr val="16171B"/>
                 </a:solidFill>
                 <a:latin typeface="Calibri"/>
               </a:rPr>
@@ -29933,7 +30037,7 @@
             <a:avLst/>
           </a:prstGeom>
           <a:solidFill>
-            <a:srgbClr val="F0F0F0"/>
+            <a:srgbClr val="F4F3F0"/>
           </a:solidFill>
           <a:ln>
             <a:noFill/>
@@ -30032,7 +30136,7 @@
             <a:r>
               <a:rPr sz="900" b="0" i="0">
                 <a:solidFill>
-                  <a:srgbClr val="0F1433"/>
+                  <a:srgbClr val="16171B"/>
                 </a:solidFill>
                 <a:latin typeface="Calibri"/>
               </a:rPr>
@@ -30056,7 +30160,7 @@
             <a:avLst/>
           </a:prstGeom>
           <a:solidFill>
-            <a:srgbClr val="F0F0F0"/>
+            <a:srgbClr val="F4F3F0"/>
           </a:solidFill>
           <a:ln>
             <a:noFill/>
@@ -30155,7 +30259,7 @@
             <a:r>
               <a:rPr sz="900" b="0" i="0">
                 <a:solidFill>
-                  <a:srgbClr val="0F1433"/>
+                  <a:srgbClr val="16171B"/>
                 </a:solidFill>
                 <a:latin typeface="Calibri"/>
               </a:rPr>
@@ -30179,7 +30283,7 @@
             <a:avLst/>
           </a:prstGeom>
           <a:solidFill>
-            <a:srgbClr val="1E2761"/>
+            <a:srgbClr val="23242A"/>
           </a:solidFill>
           <a:ln>
             <a:noFill/>
@@ -30234,7 +30338,7 @@
             <a:r>
               <a:rPr sz="1400" b="1" i="0">
                 <a:solidFill>
-                  <a:srgbClr val="D4AF37"/>
+                  <a:srgbClr val="C9A227"/>
                 </a:solidFill>
                 <a:latin typeface="Calibri"/>
               </a:rPr>
@@ -30258,7 +30362,7 @@
             <a:avLst/>
           </a:prstGeom>
           <a:solidFill>
-            <a:srgbClr val="F0F0F0"/>
+            <a:srgbClr val="F4F3F0"/>
           </a:solidFill>
           <a:ln>
             <a:noFill/>
@@ -30357,7 +30461,7 @@
             <a:r>
               <a:rPr sz="900" b="0" i="0">
                 <a:solidFill>
-                  <a:srgbClr val="0F1433"/>
+                  <a:srgbClr val="16171B"/>
                 </a:solidFill>
                 <a:latin typeface="Calibri"/>
               </a:rPr>
@@ -30381,7 +30485,7 @@
             <a:avLst/>
           </a:prstGeom>
           <a:solidFill>
-            <a:srgbClr val="F0F0F0"/>
+            <a:srgbClr val="F4F3F0"/>
           </a:solidFill>
           <a:ln>
             <a:noFill/>
@@ -30480,7 +30584,7 @@
             <a:r>
               <a:rPr sz="900" b="0" i="0">
                 <a:solidFill>
-                  <a:srgbClr val="0F1433"/>
+                  <a:srgbClr val="16171B"/>
                 </a:solidFill>
                 <a:latin typeface="Calibri"/>
               </a:rPr>
@@ -30504,7 +30608,7 @@
             <a:avLst/>
           </a:prstGeom>
           <a:solidFill>
-            <a:srgbClr val="F0F0F0"/>
+            <a:srgbClr val="F4F3F0"/>
           </a:solidFill>
           <a:ln>
             <a:noFill/>
@@ -30603,7 +30707,7 @@
             <a:r>
               <a:rPr sz="900" b="0" i="0">
                 <a:solidFill>
-                  <a:srgbClr val="0F1433"/>
+                  <a:srgbClr val="16171B"/>
                 </a:solidFill>
                 <a:latin typeface="Calibri"/>
               </a:rPr>
@@ -30627,7 +30731,7 @@
             <a:avLst/>
           </a:prstGeom>
           <a:solidFill>
-            <a:srgbClr val="F0F0F0"/>
+            <a:srgbClr val="F4F3F0"/>
           </a:solidFill>
           <a:ln>
             <a:noFill/>
@@ -30726,7 +30830,7 @@
             <a:r>
               <a:rPr sz="900" b="0" i="0">
                 <a:solidFill>
-                  <a:srgbClr val="0F1433"/>
+                  <a:srgbClr val="16171B"/>
                 </a:solidFill>
                 <a:latin typeface="Calibri"/>
               </a:rPr>
@@ -30750,7 +30854,7 @@
             <a:avLst/>
           </a:prstGeom>
           <a:solidFill>
-            <a:srgbClr val="F0F0F0"/>
+            <a:srgbClr val="F4F3F0"/>
           </a:solidFill>
           <a:ln>
             <a:noFill/>
@@ -30849,7 +30953,7 @@
             <a:r>
               <a:rPr sz="900" b="0" i="0">
                 <a:solidFill>
-                  <a:srgbClr val="0F1433"/>
+                  <a:srgbClr val="16171B"/>
                 </a:solidFill>
                 <a:latin typeface="Calibri"/>
               </a:rPr>
@@ -30873,7 +30977,7 @@
             <a:avLst/>
           </a:prstGeom>
           <a:solidFill>
-            <a:srgbClr val="1E2761"/>
+            <a:srgbClr val="23242A"/>
           </a:solidFill>
           <a:ln>
             <a:noFill/>
@@ -30928,7 +31032,7 @@
             <a:r>
               <a:rPr sz="1400" b="1" i="0">
                 <a:solidFill>
-                  <a:srgbClr val="D4AF37"/>
+                  <a:srgbClr val="C9A227"/>
                 </a:solidFill>
                 <a:latin typeface="Calibri"/>
               </a:rPr>
@@ -30952,7 +31056,7 @@
             <a:avLst/>
           </a:prstGeom>
           <a:solidFill>
-            <a:srgbClr val="F0F0F0"/>
+            <a:srgbClr val="F4F3F0"/>
           </a:solidFill>
           <a:ln>
             <a:noFill/>
@@ -31051,7 +31155,7 @@
             <a:r>
               <a:rPr sz="900" b="0" i="0">
                 <a:solidFill>
-                  <a:srgbClr val="0F1433"/>
+                  <a:srgbClr val="16171B"/>
                 </a:solidFill>
                 <a:latin typeface="Calibri"/>
               </a:rPr>
@@ -31075,7 +31179,7 @@
             <a:avLst/>
           </a:prstGeom>
           <a:solidFill>
-            <a:srgbClr val="F0F0F0"/>
+            <a:srgbClr val="F4F3F0"/>
           </a:solidFill>
           <a:ln>
             <a:noFill/>
@@ -31174,7 +31278,7 @@
             <a:r>
               <a:rPr sz="900" b="0" i="0">
                 <a:solidFill>
-                  <a:srgbClr val="0F1433"/>
+                  <a:srgbClr val="16171B"/>
                 </a:solidFill>
                 <a:latin typeface="Calibri"/>
               </a:rPr>
@@ -31198,7 +31302,7 @@
             <a:avLst/>
           </a:prstGeom>
           <a:solidFill>
-            <a:srgbClr val="F0F0F0"/>
+            <a:srgbClr val="F4F3F0"/>
           </a:solidFill>
           <a:ln>
             <a:noFill/>
@@ -31297,7 +31401,7 @@
             <a:r>
               <a:rPr sz="900" b="0" i="0">
                 <a:solidFill>
-                  <a:srgbClr val="0F1433"/>
+                  <a:srgbClr val="16171B"/>
                 </a:solidFill>
                 <a:latin typeface="Calibri"/>
               </a:rPr>
@@ -31321,7 +31425,7 @@
             <a:avLst/>
           </a:prstGeom>
           <a:solidFill>
-            <a:srgbClr val="F0F0F0"/>
+            <a:srgbClr val="F4F3F0"/>
           </a:solidFill>
           <a:ln>
             <a:noFill/>
@@ -31420,7 +31524,7 @@
             <a:r>
               <a:rPr sz="900" b="0" i="0">
                 <a:solidFill>
-                  <a:srgbClr val="0F1433"/>
+                  <a:srgbClr val="16171B"/>
                 </a:solidFill>
                 <a:latin typeface="Calibri"/>
               </a:rPr>
@@ -31444,7 +31548,7 @@
             <a:avLst/>
           </a:prstGeom>
           <a:solidFill>
-            <a:srgbClr val="F0F0F0"/>
+            <a:srgbClr val="F4F3F0"/>
           </a:solidFill>
           <a:ln>
             <a:noFill/>
@@ -31543,7 +31647,7 @@
             <a:r>
               <a:rPr sz="900" b="0" i="0">
                 <a:solidFill>
-                  <a:srgbClr val="0F1433"/>
+                  <a:srgbClr val="16171B"/>
                 </a:solidFill>
                 <a:latin typeface="Calibri"/>
               </a:rPr>
@@ -31567,7 +31671,7 @@
             <a:avLst/>
           </a:prstGeom>
           <a:solidFill>
-            <a:srgbClr val="1E2761"/>
+            <a:srgbClr val="23242A"/>
           </a:solidFill>
           <a:ln>
             <a:noFill/>
@@ -31622,7 +31726,7 @@
             <a:r>
               <a:rPr sz="1400" b="1" i="0">
                 <a:solidFill>
-                  <a:srgbClr val="D4AF37"/>
+                  <a:srgbClr val="C9A227"/>
                 </a:solidFill>
                 <a:latin typeface="Calibri"/>
               </a:rPr>
@@ -31646,7 +31750,7 @@
             <a:avLst/>
           </a:prstGeom>
           <a:solidFill>
-            <a:srgbClr val="F0F0F0"/>
+            <a:srgbClr val="F4F3F0"/>
           </a:solidFill>
           <a:ln>
             <a:noFill/>
@@ -31745,7 +31849,7 @@
             <a:r>
               <a:rPr sz="900" b="0" i="0">
                 <a:solidFill>
-                  <a:srgbClr val="0F1433"/>
+                  <a:srgbClr val="16171B"/>
                 </a:solidFill>
                 <a:latin typeface="Calibri"/>
               </a:rPr>
@@ -31769,7 +31873,7 @@
             <a:avLst/>
           </a:prstGeom>
           <a:solidFill>
-            <a:srgbClr val="F0F0F0"/>
+            <a:srgbClr val="F4F3F0"/>
           </a:solidFill>
           <a:ln>
             <a:noFill/>
@@ -31868,7 +31972,7 @@
             <a:r>
               <a:rPr sz="900" b="0" i="0">
                 <a:solidFill>
-                  <a:srgbClr val="0F1433"/>
+                  <a:srgbClr val="16171B"/>
                 </a:solidFill>
                 <a:latin typeface="Calibri"/>
               </a:rPr>
@@ -31892,7 +31996,7 @@
             <a:avLst/>
           </a:prstGeom>
           <a:solidFill>
-            <a:srgbClr val="F0F0F0"/>
+            <a:srgbClr val="F4F3F0"/>
           </a:solidFill>
           <a:ln>
             <a:noFill/>
@@ -31991,7 +32095,7 @@
             <a:r>
               <a:rPr sz="900" b="0" i="0">
                 <a:solidFill>
-                  <a:srgbClr val="0F1433"/>
+                  <a:srgbClr val="16171B"/>
                 </a:solidFill>
                 <a:latin typeface="Calibri"/>
               </a:rPr>
@@ -32015,7 +32119,7 @@
             <a:avLst/>
           </a:prstGeom>
           <a:solidFill>
-            <a:srgbClr val="F0F0F0"/>
+            <a:srgbClr val="F4F3F0"/>
           </a:solidFill>
           <a:ln>
             <a:noFill/>
@@ -32114,7 +32218,7 @@
             <a:r>
               <a:rPr sz="900" b="0" i="0">
                 <a:solidFill>
-                  <a:srgbClr val="0F1433"/>
+                  <a:srgbClr val="16171B"/>
                 </a:solidFill>
                 <a:latin typeface="Calibri"/>
               </a:rPr>
@@ -32138,7 +32242,7 @@
             <a:avLst/>
           </a:prstGeom>
           <a:solidFill>
-            <a:srgbClr val="F0F0F0"/>
+            <a:srgbClr val="F4F3F0"/>
           </a:solidFill>
           <a:ln>
             <a:noFill/>
@@ -32237,7 +32341,7 @@
             <a:r>
               <a:rPr sz="900" b="0" i="0">
                 <a:solidFill>
-                  <a:srgbClr val="0F1433"/>
+                  <a:srgbClr val="16171B"/>
                 </a:solidFill>
                 <a:latin typeface="Calibri"/>
               </a:rPr>
@@ -32272,7 +32376,7 @@
             <a:r>
               <a:rPr sz="900" b="0" i="0">
                 <a:solidFill>
-                  <a:srgbClr val="606060"/>
+                  <a:srgbClr val="6B6D76"/>
                 </a:solidFill>
                 <a:latin typeface="Calibri"/>
               </a:rPr>
@@ -32289,7 +32393,7 @@
 </p:sld>
 </file>
 
-<file path=ppt/slides/slide21.xml><?xml version="1.0" encoding="utf-8"?>
+<file path=ppt\slides\slide21.xml><?xml version="1.0" encoding="utf-8"?>
 <p:sld xmlns:a="http://schemas.openxmlformats.org/drawingml/2006/main" xmlns:r="http://schemas.openxmlformats.org/officeDocument/2006/relationships" xmlns:p="http://schemas.openxmlformats.org/presentationml/2006/main">
   <p:cSld>
     <p:spTree>
@@ -32321,7 +32425,7 @@
             <a:avLst/>
           </a:prstGeom>
           <a:solidFill>
-            <a:srgbClr val="1E2761"/>
+            <a:srgbClr val="23242A"/>
           </a:solidFill>
           <a:ln>
             <a:noFill/>
@@ -32411,7 +32515,7 @@
             <a:r>
               <a:rPr sz="1200" b="0" i="1">
                 <a:solidFill>
-                  <a:srgbClr val="CADCFC"/>
+                  <a:srgbClr val="C8C9D0"/>
                 </a:solidFill>
                 <a:latin typeface="Calibri"/>
               </a:rPr>
@@ -32435,7 +32539,7 @@
             <a:avLst/>
           </a:prstGeom>
           <a:solidFill>
-            <a:srgbClr val="F0F0F0"/>
+            <a:srgbClr val="F4F3F0"/>
           </a:solidFill>
           <a:ln>
             <a:noFill/>
@@ -32479,7 +32583,7 @@
             <a:avLst/>
           </a:prstGeom>
           <a:solidFill>
-            <a:srgbClr val="4CAF50"/>
+            <a:srgbClr val="2E7D32"/>
           </a:solidFill>
           <a:ln>
             <a:noFill/>
@@ -32569,7 +32673,7 @@
             <a:r>
               <a:rPr sz="1500" b="1" i="0">
                 <a:solidFill>
-                  <a:srgbClr val="1E2761"/>
+                  <a:srgbClr val="23242A"/>
                 </a:solidFill>
                 <a:latin typeface="Calibri"/>
               </a:rPr>
@@ -32604,7 +32708,7 @@
             <a:r>
               <a:rPr sz="1000" b="0" i="0">
                 <a:solidFill>
-                  <a:srgbClr val="0F1433"/>
+                  <a:srgbClr val="16171B"/>
                 </a:solidFill>
                 <a:latin typeface="Calibri"/>
               </a:rPr>
@@ -32628,7 +32732,7 @@
             <a:avLst/>
           </a:prstGeom>
           <a:solidFill>
-            <a:srgbClr val="F0F0F0"/>
+            <a:srgbClr val="F4F3F0"/>
           </a:solidFill>
           <a:ln>
             <a:noFill/>
@@ -32672,7 +32776,7 @@
             <a:avLst/>
           </a:prstGeom>
           <a:solidFill>
-            <a:srgbClr val="2196F3"/>
+            <a:srgbClr val="2C5F8A"/>
           </a:solidFill>
           <a:ln>
             <a:noFill/>
@@ -32762,7 +32866,7 @@
             <a:r>
               <a:rPr sz="1500" b="1" i="0">
                 <a:solidFill>
-                  <a:srgbClr val="1E2761"/>
+                  <a:srgbClr val="23242A"/>
                 </a:solidFill>
                 <a:latin typeface="Calibri"/>
               </a:rPr>
@@ -32797,7 +32901,7 @@
             <a:r>
               <a:rPr sz="1000" b="0" i="0">
                 <a:solidFill>
-                  <a:srgbClr val="0F1433"/>
+                  <a:srgbClr val="16171B"/>
                 </a:solidFill>
                 <a:latin typeface="Calibri"/>
               </a:rPr>
@@ -32821,7 +32925,7 @@
             <a:avLst/>
           </a:prstGeom>
           <a:solidFill>
-            <a:srgbClr val="F0F0F0"/>
+            <a:srgbClr val="F4F3F0"/>
           </a:solidFill>
           <a:ln>
             <a:noFill/>
@@ -32865,7 +32969,7 @@
             <a:avLst/>
           </a:prstGeom>
           <a:solidFill>
-            <a:srgbClr val="9C27B0"/>
+            <a:srgbClr val="6A3D9A"/>
           </a:solidFill>
           <a:ln>
             <a:noFill/>
@@ -32955,7 +33059,7 @@
             <a:r>
               <a:rPr sz="1500" b="1" i="0">
                 <a:solidFill>
-                  <a:srgbClr val="1E2761"/>
+                  <a:srgbClr val="23242A"/>
                 </a:solidFill>
                 <a:latin typeface="Calibri"/>
               </a:rPr>
@@ -32990,7 +33094,7 @@
             <a:r>
               <a:rPr sz="1000" b="0" i="0">
                 <a:solidFill>
-                  <a:srgbClr val="0F1433"/>
+                  <a:srgbClr val="16171B"/>
                 </a:solidFill>
                 <a:latin typeface="Calibri"/>
               </a:rPr>
@@ -33014,7 +33118,7 @@
             <a:avLst/>
           </a:prstGeom>
           <a:solidFill>
-            <a:srgbClr val="F0F0F0"/>
+            <a:srgbClr val="F4F3F0"/>
           </a:solidFill>
           <a:ln>
             <a:noFill/>
@@ -33058,7 +33162,7 @@
             <a:avLst/>
           </a:prstGeom>
           <a:solidFill>
-            <a:srgbClr val="E97132"/>
+            <a:srgbClr val="B26A00"/>
           </a:solidFill>
           <a:ln>
             <a:noFill/>
@@ -33148,7 +33252,7 @@
             <a:r>
               <a:rPr sz="1500" b="1" i="0">
                 <a:solidFill>
-                  <a:srgbClr val="1E2761"/>
+                  <a:srgbClr val="23242A"/>
                 </a:solidFill>
                 <a:latin typeface="Calibri"/>
               </a:rPr>
@@ -33183,7 +33287,7 @@
             <a:r>
               <a:rPr sz="1000" b="0" i="0">
                 <a:solidFill>
-                  <a:srgbClr val="0F1433"/>
+                  <a:srgbClr val="16171B"/>
                 </a:solidFill>
                 <a:latin typeface="Calibri"/>
               </a:rPr>
@@ -33207,7 +33311,7 @@
             <a:avLst/>
           </a:prstGeom>
           <a:solidFill>
-            <a:srgbClr val="F0F0F0"/>
+            <a:srgbClr val="F4F3F0"/>
           </a:solidFill>
           <a:ln>
             <a:noFill/>
@@ -33251,7 +33355,7 @@
             <a:avLst/>
           </a:prstGeom>
           <a:solidFill>
-            <a:srgbClr val="E53935"/>
+            <a:srgbClr val="C62828"/>
           </a:solidFill>
           <a:ln>
             <a:noFill/>
@@ -33341,7 +33445,7 @@
             <a:r>
               <a:rPr sz="1500" b="1" i="0">
                 <a:solidFill>
-                  <a:srgbClr val="1E2761"/>
+                  <a:srgbClr val="23242A"/>
                 </a:solidFill>
                 <a:latin typeface="Calibri"/>
               </a:rPr>
@@ -33376,7 +33480,7 @@
             <a:r>
               <a:rPr sz="1000" b="0" i="0">
                 <a:solidFill>
-                  <a:srgbClr val="0F1433"/>
+                  <a:srgbClr val="16171B"/>
                 </a:solidFill>
                 <a:latin typeface="Calibri"/>
               </a:rPr>
@@ -33400,7 +33504,7 @@
             <a:avLst/>
           </a:prstGeom>
           <a:solidFill>
-            <a:srgbClr val="F0F0F0"/>
+            <a:srgbClr val="F4F3F0"/>
           </a:solidFill>
           <a:ln>
             <a:noFill/>
@@ -33444,7 +33548,7 @@
             <a:avLst/>
           </a:prstGeom>
           <a:solidFill>
-            <a:srgbClr val="D4AF37"/>
+            <a:srgbClr val="C9A227"/>
           </a:solidFill>
           <a:ln>
             <a:noFill/>
@@ -33534,7 +33638,7 @@
             <a:r>
               <a:rPr sz="1500" b="1" i="0">
                 <a:solidFill>
-                  <a:srgbClr val="1E2761"/>
+                  <a:srgbClr val="23242A"/>
                 </a:solidFill>
                 <a:latin typeface="Calibri"/>
               </a:rPr>
@@ -33569,7 +33673,7 @@
             <a:r>
               <a:rPr sz="1000" b="0" i="0">
                 <a:solidFill>
-                  <a:srgbClr val="0F1433"/>
+                  <a:srgbClr val="16171B"/>
                 </a:solidFill>
                 <a:latin typeface="Calibri"/>
               </a:rPr>
@@ -33593,7 +33697,7 @@
             <a:avLst/>
           </a:prstGeom>
           <a:solidFill>
-            <a:srgbClr val="1E2761"/>
+            <a:srgbClr val="23242A"/>
           </a:solidFill>
           <a:ln>
             <a:noFill/>
@@ -33648,7 +33752,7 @@
             <a:r>
               <a:rPr sz="1200" b="0" i="1">
                 <a:solidFill>
-                  <a:srgbClr val="D4AF37"/>
+                  <a:srgbClr val="C9A227"/>
                 </a:solidFill>
                 <a:latin typeface="Calibri"/>
               </a:rPr>
@@ -33683,7 +33787,7 @@
             <a:r>
               <a:rPr sz="900" b="0" i="0">
                 <a:solidFill>
-                  <a:srgbClr val="606060"/>
+                  <a:srgbClr val="6B6D76"/>
                 </a:solidFill>
                 <a:latin typeface="Calibri"/>
               </a:rPr>
@@ -33700,7 +33804,7 @@
 </p:sld>
 </file>
 
-<file path=ppt/slides/slide22.xml><?xml version="1.0" encoding="utf-8"?>
+<file path=ppt\slides\slide22.xml><?xml version="1.0" encoding="utf-8"?>
 <p:sld xmlns:a="http://schemas.openxmlformats.org/drawingml/2006/main" xmlns:r="http://schemas.openxmlformats.org/officeDocument/2006/relationships" xmlns:p="http://schemas.openxmlformats.org/presentationml/2006/main">
   <p:cSld>
     <p:spTree>
@@ -33732,7 +33836,7 @@
             <a:avLst/>
           </a:prstGeom>
           <a:solidFill>
-            <a:srgbClr val="0F1433"/>
+            <a:srgbClr val="16171B"/>
           </a:solidFill>
           <a:ln>
             <a:noFill/>
@@ -33787,7 +33891,7 @@
             <a:r>
               <a:rPr sz="1400" b="1" i="0">
                 <a:solidFill>
-                  <a:srgbClr val="D4AF37"/>
+                  <a:srgbClr val="C9A227"/>
                 </a:solidFill>
                 <a:latin typeface="Calibri"/>
               </a:rPr>
@@ -33857,7 +33961,7 @@
             <a:r>
               <a:rPr sz="1500" b="0" i="1">
                 <a:solidFill>
-                  <a:srgbClr val="CADCFC"/>
+                  <a:srgbClr val="C8C9D0"/>
                 </a:solidFill>
                 <a:latin typeface="Calibri"/>
               </a:rPr>
@@ -33881,7 +33985,7 @@
             <a:avLst/>
           </a:prstGeom>
           <a:solidFill>
-            <a:srgbClr val="D4AF37"/>
+            <a:srgbClr val="C9A227"/>
           </a:solidFill>
           <a:ln>
             <a:noFill/>
@@ -33936,7 +34040,7 @@
             <a:r>
               <a:rPr sz="1400" b="1" i="0">
                 <a:solidFill>
-                  <a:srgbClr val="D4AF37"/>
+                  <a:srgbClr val="C9A227"/>
                 </a:solidFill>
                 <a:latin typeface="Calibri"/>
               </a:rPr>
@@ -33971,7 +34075,7 @@
             <a:r>
               <a:rPr sz="1000" b="0" i="1">
                 <a:solidFill>
-                  <a:srgbClr val="CADCFC"/>
+                  <a:srgbClr val="C8C9D0"/>
                 </a:solidFill>
                 <a:latin typeface="Calibri"/>
               </a:rPr>
@@ -34006,7 +34110,7 @@
             <a:r>
               <a:rPr sz="1100" b="1" i="0">
                 <a:solidFill>
-                  <a:srgbClr val="D4AF37"/>
+                  <a:srgbClr val="C9A227"/>
                 </a:solidFill>
                 <a:latin typeface="Calibri"/>
               </a:rPr>
@@ -34045,7 +34149,7 @@
                 </a:solidFill>
                 <a:latin typeface="Calibri"/>
               </a:rPr>
-              <a:t>Cover + Overview  ·  Strategic context, 5 modules, 4 phases, 8 KPIs</a:t>
+              <a:t>Cover + Overview  |  Strategic context, 5 modules, 4 phases, 8 KPIs</a:t>
             </a:r>
           </a:p>
         </p:txBody>
@@ -34076,7 +34180,7 @@
             <a:r>
               <a:rPr sz="1100" b="1" i="0">
                 <a:solidFill>
-                  <a:srgbClr val="D4AF37"/>
+                  <a:srgbClr val="C9A227"/>
                 </a:solidFill>
                 <a:latin typeface="Calibri"/>
               </a:rPr>
@@ -34115,7 +34219,7 @@
                 </a:solidFill>
                 <a:latin typeface="Calibri"/>
               </a:rPr>
-              <a:t>Programme Timeline  ·  40-week Gantt with phase, module, integration tracks</a:t>
+              <a:t>Programme Timeline  |  40-week Gantt with phase, module, integration tracks</a:t>
             </a:r>
           </a:p>
         </p:txBody>
@@ -34146,7 +34250,7 @@
             <a:r>
               <a:rPr sz="1100" b="1" i="0">
                 <a:solidFill>
-                  <a:srgbClr val="D4AF37"/>
+                  <a:srgbClr val="C9A227"/>
                 </a:solidFill>
                 <a:latin typeface="Calibri"/>
               </a:rPr>
@@ -34185,7 +34289,7 @@
                 </a:solidFill>
                 <a:latin typeface="Calibri"/>
               </a:rPr>
-              <a:t>Task Register (MASTER)  ·  93 tasks with owner, software, hardware, deliverables</a:t>
+              <a:t>Task Register (MASTER)  |  93 tasks with owner, software, hardware, deliverables</a:t>
             </a:r>
           </a:p>
         </p:txBody>
@@ -34216,7 +34320,7 @@
             <a:r>
               <a:rPr sz="1100" b="1" i="0">
                 <a:solidFill>
-                  <a:srgbClr val="D4AF37"/>
+                  <a:srgbClr val="C9A227"/>
                 </a:solidFill>
                 <a:latin typeface="Calibri"/>
               </a:rPr>
@@ -34255,7 +34359,7 @@
                 </a:solidFill>
                 <a:latin typeface="Calibri"/>
               </a:rPr>
-              <a:t>Team Roster  ·  Software Stack (40+)  ·  Hardware + Infra (20 items)</a:t>
+              <a:t>Team Roster  |  Software Stack (40+)  |  Hardware + Infra (20 items)</a:t>
             </a:r>
           </a:p>
         </p:txBody>
@@ -34286,7 +34390,7 @@
             <a:r>
               <a:rPr sz="1100" b="1" i="0">
                 <a:solidFill>
-                  <a:srgbClr val="D4AF37"/>
+                  <a:srgbClr val="C9A227"/>
                 </a:solidFill>
                 <a:latin typeface="Calibri"/>
               </a:rPr>
@@ -34325,7 +34429,7 @@
                 </a:solidFill>
                 <a:latin typeface="Calibri"/>
               </a:rPr>
-              <a:t>Integrations Register (10)  ·  KSA Compliance (25 controls)</a:t>
+              <a:t>Integrations Register (10)  |  KSA Compliance (25 controls)</a:t>
             </a:r>
           </a:p>
         </p:txBody>
@@ -34356,7 +34460,7 @@
             <a:r>
               <a:rPr sz="1100" b="1" i="0">
                 <a:solidFill>
-                  <a:srgbClr val="D4AF37"/>
+                  <a:srgbClr val="C9A227"/>
                 </a:solidFill>
                 <a:latin typeface="Calibri"/>
               </a:rPr>
@@ -34395,7 +34499,7 @@
                 </a:solidFill>
                 <a:latin typeface="Calibri"/>
               </a:rPr>
-              <a:t>Deliverables (25)  ·  Quality Gates (6)  ·  Risk Register (25)</a:t>
+              <a:t>Deliverables (25)  |  Quality Gates (6)  |  Risk Register (25)</a:t>
             </a:r>
           </a:p>
         </p:txBody>
@@ -34426,7 +34530,7 @@
             <a:r>
               <a:rPr sz="1100" b="1" i="0">
                 <a:solidFill>
-                  <a:srgbClr val="D4AF37"/>
+                  <a:srgbClr val="C9A227"/>
                 </a:solidFill>
                 <a:latin typeface="Calibri"/>
               </a:rPr>
@@ -34465,7 +34569,7 @@
                 </a:solidFill>
                 <a:latin typeface="Calibri"/>
               </a:rPr>
-              <a:t>Year 2-5 Maintenance model  ·  Meeting Cadence (18 types)</a:t>
+              <a:t>Year 2-5 Maintenance model  |  Meeting Cadence (18 types)</a:t>
             </a:r>
           </a:p>
         </p:txBody>
@@ -34485,7 +34589,7 @@
             <a:avLst/>
           </a:prstGeom>
           <a:solidFill>
-            <a:srgbClr val="1E2761"/>
+            <a:srgbClr val="23242A"/>
           </a:solidFill>
           <a:ln>
             <a:noFill/>
@@ -34540,7 +34644,7 @@
             <a:r>
               <a:rPr sz="1100" b="0" i="1">
                 <a:solidFill>
-                  <a:srgbClr val="CADCFC"/>
+                  <a:srgbClr val="C8C9D0"/>
                 </a:solidFill>
                 <a:latin typeface="Calibri"/>
               </a:rPr>
@@ -34575,7 +34679,7 @@
             <a:r>
               <a:rPr sz="900" b="0" i="0">
                 <a:solidFill>
-                  <a:srgbClr val="606060"/>
+                  <a:srgbClr val="6B6D76"/>
                 </a:solidFill>
                 <a:latin typeface="Calibri"/>
               </a:rPr>
@@ -34592,7 +34696,7 @@
 </p:sld>
 </file>
 
-<file path=ppt/slides/slide3.xml><?xml version="1.0" encoding="utf-8"?>
+<file path=ppt\slides\slide3.xml><?xml version="1.0" encoding="utf-8"?>
 <p:sld xmlns:a="http://schemas.openxmlformats.org/drawingml/2006/main" xmlns:r="http://schemas.openxmlformats.org/officeDocument/2006/relationships" xmlns:p="http://schemas.openxmlformats.org/presentationml/2006/main">
   <p:cSld>
     <p:spTree>
@@ -34624,7 +34728,7 @@
             <a:avLst/>
           </a:prstGeom>
           <a:solidFill>
-            <a:srgbClr val="1E2761"/>
+            <a:srgbClr val="23242A"/>
           </a:solidFill>
           <a:ln>
             <a:noFill/>
@@ -34714,7 +34818,7 @@
             <a:r>
               <a:rPr sz="1200" b="0" i="1">
                 <a:solidFill>
-                  <a:srgbClr val="CADCFC"/>
+                  <a:srgbClr val="C8C9D0"/>
                 </a:solidFill>
                 <a:latin typeface="Calibri"/>
               </a:rPr>
@@ -34738,7 +34842,7 @@
             <a:avLst/>
           </a:prstGeom>
           <a:solidFill>
-            <a:srgbClr val="F0F0F0"/>
+            <a:srgbClr val="F4F3F0"/>
           </a:solidFill>
           <a:ln>
             <a:noFill/>
@@ -34793,7 +34897,7 @@
             <a:r>
               <a:rPr sz="1300" b="1" i="0">
                 <a:solidFill>
-                  <a:srgbClr val="D4AF37"/>
+                  <a:srgbClr val="C9A227"/>
                 </a:solidFill>
                 <a:latin typeface="Calibri"/>
               </a:rPr>
@@ -34828,7 +34932,7 @@
             <a:r>
               <a:rPr sz="2600" b="1" i="0">
                 <a:solidFill>
-                  <a:srgbClr val="1E2761"/>
+                  <a:srgbClr val="23242A"/>
                 </a:solidFill>
                 <a:latin typeface="Calibri"/>
               </a:rPr>
@@ -34863,7 +34967,7 @@
             <a:r>
               <a:rPr sz="1300" b="0" i="1">
                 <a:solidFill>
-                  <a:srgbClr val="606060"/>
+                  <a:srgbClr val="6B6D76"/>
                 </a:solidFill>
                 <a:latin typeface="Calibri"/>
               </a:rPr>
@@ -34898,7 +35002,7 @@
             <a:r>
               <a:rPr sz="1200" b="1" i="0">
                 <a:solidFill>
-                  <a:srgbClr val="0F1433"/>
+                  <a:srgbClr val="16171B"/>
                 </a:solidFill>
                 <a:latin typeface="Calibri"/>
               </a:rPr>
@@ -34933,7 +35037,7 @@
             <a:r>
               <a:rPr sz="1100" b="0" i="0">
                 <a:solidFill>
-                  <a:srgbClr val="0F1433"/>
+                  <a:srgbClr val="16171B"/>
                 </a:solidFill>
                 <a:latin typeface="Calibri"/>
               </a:rPr>
@@ -34995,7 +35099,7 @@
             <a:r>
               <a:rPr sz="1200" b="1" i="0">
                 <a:solidFill>
-                  <a:srgbClr val="0F1433"/>
+                  <a:srgbClr val="16171B"/>
                 </a:solidFill>
                 <a:latin typeface="Calibri"/>
               </a:rPr>
@@ -35030,7 +35134,7 @@
             <a:r>
               <a:rPr sz="1100" b="0" i="0">
                 <a:solidFill>
-                  <a:srgbClr val="0F1433"/>
+                  <a:srgbClr val="16171B"/>
                 </a:solidFill>
                 <a:latin typeface="Calibri"/>
               </a:rPr>
@@ -35065,7 +35169,7 @@
             <a:r>
               <a:rPr sz="1100" b="0" i="0">
                 <a:solidFill>
-                  <a:srgbClr val="0F1433"/>
+                  <a:srgbClr val="16171B"/>
                 </a:solidFill>
                 <a:latin typeface="Calibri"/>
               </a:rPr>
@@ -35100,7 +35204,7 @@
             <a:r>
               <a:rPr sz="1100" b="0" i="0">
                 <a:solidFill>
-                  <a:srgbClr val="0F1433"/>
+                  <a:srgbClr val="16171B"/>
                 </a:solidFill>
                 <a:latin typeface="Calibri"/>
               </a:rPr>
@@ -35162,7 +35266,7 @@
             <a:r>
               <a:rPr sz="1200" b="1" i="0">
                 <a:solidFill>
-                  <a:srgbClr val="0F1433"/>
+                  <a:srgbClr val="16171B"/>
                 </a:solidFill>
                 <a:latin typeface="Calibri"/>
               </a:rPr>
@@ -35197,7 +35301,7 @@
             <a:r>
               <a:rPr sz="1100" b="0" i="0">
                 <a:solidFill>
-                  <a:srgbClr val="0F1433"/>
+                  <a:srgbClr val="16171B"/>
                 </a:solidFill>
                 <a:latin typeface="Calibri"/>
               </a:rPr>
@@ -35232,7 +35336,7 @@
             <a:r>
               <a:rPr sz="1100" b="0" i="0">
                 <a:solidFill>
-                  <a:srgbClr val="0F1433"/>
+                  <a:srgbClr val="16171B"/>
                 </a:solidFill>
                 <a:latin typeface="Calibri"/>
               </a:rPr>
@@ -35256,7 +35360,7 @@
             <a:avLst/>
           </a:prstGeom>
           <a:solidFill>
-            <a:srgbClr val="1E2761"/>
+            <a:srgbClr val="23242A"/>
           </a:solidFill>
           <a:ln>
             <a:noFill/>
@@ -35311,7 +35415,7 @@
             <a:r>
               <a:rPr sz="1300" b="1" i="0">
                 <a:solidFill>
-                  <a:srgbClr val="D4AF37"/>
+                  <a:srgbClr val="C9A227"/>
                 </a:solidFill>
                 <a:latin typeface="Calibri"/>
               </a:rPr>
@@ -35381,7 +35485,7 @@
             <a:r>
               <a:rPr sz="1300" b="0" i="1">
                 <a:solidFill>
-                  <a:srgbClr val="CADCFC"/>
+                  <a:srgbClr val="C8C9D0"/>
                 </a:solidFill>
                 <a:latin typeface="Calibri"/>
               </a:rPr>
@@ -35416,7 +35520,7 @@
             <a:r>
               <a:rPr sz="1200" b="1" i="0">
                 <a:solidFill>
-                  <a:srgbClr val="CADCFC"/>
+                  <a:srgbClr val="C8C9D0"/>
                 </a:solidFill>
                 <a:latin typeface="Calibri"/>
               </a:rPr>
@@ -35451,7 +35555,7 @@
             <a:r>
               <a:rPr sz="1200" b="1" i="0">
                 <a:solidFill>
-                  <a:srgbClr val="D4AF37"/>
+                  <a:srgbClr val="C9A227"/>
                 </a:solidFill>
                 <a:latin typeface="Calibri"/>
               </a:rPr>
@@ -35548,7 +35652,7 @@
             <a:r>
               <a:rPr sz="1200" b="1" i="0">
                 <a:solidFill>
-                  <a:srgbClr val="CADCFC"/>
+                  <a:srgbClr val="C8C9D0"/>
                 </a:solidFill>
                 <a:latin typeface="Calibri"/>
               </a:rPr>
@@ -35583,7 +35687,7 @@
             <a:r>
               <a:rPr sz="1200" b="1" i="0">
                 <a:solidFill>
-                  <a:srgbClr val="D4AF37"/>
+                  <a:srgbClr val="C9A227"/>
                 </a:solidFill>
                 <a:latin typeface="Calibri"/>
               </a:rPr>
@@ -35750,7 +35854,7 @@
             <a:r>
               <a:rPr sz="1200" b="1" i="0">
                 <a:solidFill>
-                  <a:srgbClr val="CADCFC"/>
+                  <a:srgbClr val="C8C9D0"/>
                 </a:solidFill>
                 <a:latin typeface="Calibri"/>
               </a:rPr>
@@ -35785,7 +35889,7 @@
             <a:r>
               <a:rPr sz="1200" b="1" i="0">
                 <a:solidFill>
-                  <a:srgbClr val="D4AF37"/>
+                  <a:srgbClr val="C9A227"/>
                 </a:solidFill>
                 <a:latin typeface="Calibri"/>
               </a:rPr>
@@ -35925,7 +36029,7 @@
             <a:r>
               <a:rPr sz="900" b="0" i="1">
                 <a:solidFill>
-                  <a:srgbClr val="606060"/>
+                  <a:srgbClr val="6B6D76"/>
                 </a:solidFill>
                 <a:latin typeface="Calibri"/>
               </a:rPr>
@@ -35960,7 +36064,7 @@
             <a:r>
               <a:rPr sz="900" b="0" i="0">
                 <a:solidFill>
-                  <a:srgbClr val="606060"/>
+                  <a:srgbClr val="6B6D76"/>
                 </a:solidFill>
                 <a:latin typeface="Calibri"/>
               </a:rPr>
@@ -35977,7 +36081,7 @@
 </p:sld>
 </file>
 
-<file path=ppt/slides/slide4.xml><?xml version="1.0" encoding="utf-8"?>
+<file path=ppt\slides\slide4.xml><?xml version="1.0" encoding="utf-8"?>
 <p:sld xmlns:a="http://schemas.openxmlformats.org/drawingml/2006/main" xmlns:r="http://schemas.openxmlformats.org/officeDocument/2006/relationships" xmlns:p="http://schemas.openxmlformats.org/presentationml/2006/main">
   <p:cSld>
     <p:spTree>
@@ -36009,7 +36113,7 @@
             <a:avLst/>
           </a:prstGeom>
           <a:solidFill>
-            <a:srgbClr val="1E2761"/>
+            <a:srgbClr val="23242A"/>
           </a:solidFill>
           <a:ln>
             <a:noFill/>
@@ -36099,7 +36203,7 @@
             <a:r>
               <a:rPr sz="1200" b="0" i="1">
                 <a:solidFill>
-                  <a:srgbClr val="CADCFC"/>
+                  <a:srgbClr val="C8C9D0"/>
                 </a:solidFill>
                 <a:latin typeface="Calibri"/>
               </a:rPr>
@@ -36123,7 +36227,7 @@
             <a:avLst/>
           </a:prstGeom>
           <a:solidFill>
-            <a:srgbClr val="F0F0F0"/>
+            <a:srgbClr val="F4F3F0"/>
           </a:solidFill>
           <a:ln>
             <a:noFill/>
@@ -36167,7 +36271,7 @@
             <a:avLst/>
           </a:prstGeom>
           <a:solidFill>
-            <a:srgbClr val="2196F3"/>
+            <a:srgbClr val="2C5F8A"/>
           </a:solidFill>
           <a:ln>
             <a:noFill/>
@@ -36257,7 +36361,7 @@
             <a:r>
               <a:rPr sz="1300" b="1" i="0">
                 <a:solidFill>
-                  <a:srgbClr val="1E2761"/>
+                  <a:srgbClr val="23242A"/>
                 </a:solidFill>
                 <a:latin typeface="Calibri"/>
               </a:rPr>
@@ -36292,7 +36396,7 @@
             <a:r>
               <a:rPr sz="1000" b="0" i="0">
                 <a:solidFill>
-                  <a:srgbClr val="0F1433"/>
+                  <a:srgbClr val="16171B"/>
                 </a:solidFill>
                 <a:latin typeface="Calibri"/>
               </a:rPr>
@@ -36316,7 +36420,7 @@
             <a:avLst/>
           </a:prstGeom>
           <a:solidFill>
-            <a:srgbClr val="F0F0F0"/>
+            <a:srgbClr val="F4F3F0"/>
           </a:solidFill>
           <a:ln>
             <a:noFill/>
@@ -36360,7 +36464,7 @@
             <a:avLst/>
           </a:prstGeom>
           <a:solidFill>
-            <a:srgbClr val="D4AF37"/>
+            <a:srgbClr val="C9A227"/>
           </a:solidFill>
           <a:ln>
             <a:noFill/>
@@ -36450,7 +36554,7 @@
             <a:r>
               <a:rPr sz="1300" b="1" i="0">
                 <a:solidFill>
-                  <a:srgbClr val="1E2761"/>
+                  <a:srgbClr val="23242A"/>
                 </a:solidFill>
                 <a:latin typeface="Calibri"/>
               </a:rPr>
@@ -36485,7 +36589,7 @@
             <a:r>
               <a:rPr sz="1000" b="0" i="0">
                 <a:solidFill>
-                  <a:srgbClr val="0F1433"/>
+                  <a:srgbClr val="16171B"/>
                 </a:solidFill>
                 <a:latin typeface="Calibri"/>
               </a:rPr>
@@ -36509,7 +36613,7 @@
             <a:avLst/>
           </a:prstGeom>
           <a:solidFill>
-            <a:srgbClr val="F0F0F0"/>
+            <a:srgbClr val="F4F3F0"/>
           </a:solidFill>
           <a:ln>
             <a:noFill/>
@@ -36553,7 +36657,7 @@
             <a:avLst/>
           </a:prstGeom>
           <a:solidFill>
-            <a:srgbClr val="4CAF50"/>
+            <a:srgbClr val="2E7D32"/>
           </a:solidFill>
           <a:ln>
             <a:noFill/>
@@ -36643,7 +36747,7 @@
             <a:r>
               <a:rPr sz="1300" b="1" i="0">
                 <a:solidFill>
-                  <a:srgbClr val="1E2761"/>
+                  <a:srgbClr val="23242A"/>
                 </a:solidFill>
                 <a:latin typeface="Calibri"/>
               </a:rPr>
@@ -36678,7 +36782,7 @@
             <a:r>
               <a:rPr sz="1000" b="0" i="0">
                 <a:solidFill>
-                  <a:srgbClr val="0F1433"/>
+                  <a:srgbClr val="16171B"/>
                 </a:solidFill>
                 <a:latin typeface="Calibri"/>
               </a:rPr>
@@ -36702,7 +36806,7 @@
             <a:avLst/>
           </a:prstGeom>
           <a:solidFill>
-            <a:srgbClr val="F0F0F0"/>
+            <a:srgbClr val="F4F3F0"/>
           </a:solidFill>
           <a:ln>
             <a:noFill/>
@@ -36746,7 +36850,7 @@
             <a:avLst/>
           </a:prstGeom>
           <a:solidFill>
-            <a:srgbClr val="9C27B0"/>
+            <a:srgbClr val="6A3D9A"/>
           </a:solidFill>
           <a:ln>
             <a:noFill/>
@@ -36836,7 +36940,7 @@
             <a:r>
               <a:rPr sz="1300" b="1" i="0">
                 <a:solidFill>
-                  <a:srgbClr val="1E2761"/>
+                  <a:srgbClr val="23242A"/>
                 </a:solidFill>
                 <a:latin typeface="Calibri"/>
               </a:rPr>
@@ -36871,7 +36975,7 @@
             <a:r>
               <a:rPr sz="1000" b="0" i="0">
                 <a:solidFill>
-                  <a:srgbClr val="0F1433"/>
+                  <a:srgbClr val="16171B"/>
                 </a:solidFill>
                 <a:latin typeface="Calibri"/>
               </a:rPr>
@@ -36895,7 +36999,7 @@
             <a:avLst/>
           </a:prstGeom>
           <a:solidFill>
-            <a:srgbClr val="F0F0F0"/>
+            <a:srgbClr val="F4F3F0"/>
           </a:solidFill>
           <a:ln>
             <a:noFill/>
@@ -36939,7 +37043,7 @@
             <a:avLst/>
           </a:prstGeom>
           <a:solidFill>
-            <a:srgbClr val="E53935"/>
+            <a:srgbClr val="C62828"/>
           </a:solidFill>
           <a:ln>
             <a:noFill/>
@@ -37029,7 +37133,7 @@
             <a:r>
               <a:rPr sz="1300" b="1" i="0">
                 <a:solidFill>
-                  <a:srgbClr val="1E2761"/>
+                  <a:srgbClr val="23242A"/>
                 </a:solidFill>
                 <a:latin typeface="Calibri"/>
               </a:rPr>
@@ -37064,7 +37168,7 @@
             <a:r>
               <a:rPr sz="1000" b="0" i="0">
                 <a:solidFill>
-                  <a:srgbClr val="0F1433"/>
+                  <a:srgbClr val="16171B"/>
                 </a:solidFill>
                 <a:latin typeface="Calibri"/>
               </a:rPr>
@@ -37088,7 +37192,7 @@
             <a:avLst/>
           </a:prstGeom>
           <a:solidFill>
-            <a:srgbClr val="F0F0F0"/>
+            <a:srgbClr val="F4F3F0"/>
           </a:solidFill>
           <a:ln>
             <a:noFill/>
@@ -37132,7 +37236,7 @@
             <a:avLst/>
           </a:prstGeom>
           <a:solidFill>
-            <a:srgbClr val="E97132"/>
+            <a:srgbClr val="B26A00"/>
           </a:solidFill>
           <a:ln>
             <a:noFill/>
@@ -37222,7 +37326,7 @@
             <a:r>
               <a:rPr sz="1300" b="1" i="0">
                 <a:solidFill>
-                  <a:srgbClr val="1E2761"/>
+                  <a:srgbClr val="23242A"/>
                 </a:solidFill>
                 <a:latin typeface="Calibri"/>
               </a:rPr>
@@ -37257,7 +37361,7 @@
             <a:r>
               <a:rPr sz="1000" b="0" i="0">
                 <a:solidFill>
-                  <a:srgbClr val="0F1433"/>
+                  <a:srgbClr val="16171B"/>
                 </a:solidFill>
                 <a:latin typeface="Calibri"/>
               </a:rPr>
@@ -37292,7 +37396,7 @@
             <a:r>
               <a:rPr sz="900" b="0" i="0">
                 <a:solidFill>
-                  <a:srgbClr val="606060"/>
+                  <a:srgbClr val="6B6D76"/>
                 </a:solidFill>
                 <a:latin typeface="Calibri"/>
               </a:rPr>
@@ -37309,7 +37413,7 @@
 </p:sld>
 </file>
 
-<file path=ppt/slides/slide5.xml><?xml version="1.0" encoding="utf-8"?>
+<file path=ppt\slides\slide5.xml><?xml version="1.0" encoding="utf-8"?>
 <p:sld xmlns:a="http://schemas.openxmlformats.org/drawingml/2006/main" xmlns:r="http://schemas.openxmlformats.org/officeDocument/2006/relationships" xmlns:p="http://schemas.openxmlformats.org/presentationml/2006/main">
   <p:cSld>
     <p:spTree>
@@ -37341,7 +37445,7 @@
             <a:avLst/>
           </a:prstGeom>
           <a:solidFill>
-            <a:srgbClr val="1E2761"/>
+            <a:srgbClr val="23242A"/>
           </a:solidFill>
           <a:ln>
             <a:noFill/>
@@ -37431,7 +37535,7 @@
             <a:r>
               <a:rPr sz="1200" b="0" i="1">
                 <a:solidFill>
-                  <a:srgbClr val="CADCFC"/>
+                  <a:srgbClr val="C8C9D0"/>
                 </a:solidFill>
                 <a:latin typeface="Calibri"/>
               </a:rPr>
@@ -37455,7 +37559,7 @@
             <a:avLst/>
           </a:prstGeom>
           <a:solidFill>
-            <a:srgbClr val="2196F3"/>
+            <a:srgbClr val="2C5F8A"/>
           </a:solidFill>
           <a:ln>
             <a:noFill/>
@@ -37534,7 +37638,7 @@
             <a:avLst/>
           </a:prstGeom>
           <a:solidFill>
-            <a:srgbClr val="F0F0F0"/>
+            <a:srgbClr val="F4F3F0"/>
           </a:solidFill>
           <a:ln>
             <a:noFill/>
@@ -37589,7 +37693,7 @@
             <a:r>
               <a:rPr sz="1400" b="1" i="0">
                 <a:solidFill>
-                  <a:srgbClr val="1E2761"/>
+                  <a:srgbClr val="23242A"/>
                 </a:solidFill>
                 <a:latin typeface="Calibri"/>
               </a:rPr>
@@ -37624,7 +37728,7 @@
             <a:r>
               <a:rPr sz="1100" b="0" i="0">
                 <a:solidFill>
-                  <a:srgbClr val="0F1433"/>
+                  <a:srgbClr val="16171B"/>
                 </a:solidFill>
                 <a:latin typeface="Calibri"/>
               </a:rPr>
@@ -37648,7 +37752,7 @@
             <a:avLst/>
           </a:prstGeom>
           <a:solidFill>
-            <a:srgbClr val="4CAF50"/>
+            <a:srgbClr val="2E7D32"/>
           </a:solidFill>
           <a:ln>
             <a:noFill/>
@@ -37727,7 +37831,7 @@
             <a:avLst/>
           </a:prstGeom>
           <a:solidFill>
-            <a:srgbClr val="F0F0F0"/>
+            <a:srgbClr val="F4F3F0"/>
           </a:solidFill>
           <a:ln>
             <a:noFill/>
@@ -37782,7 +37886,7 @@
             <a:r>
               <a:rPr sz="1400" b="1" i="0">
                 <a:solidFill>
-                  <a:srgbClr val="1E2761"/>
+                  <a:srgbClr val="23242A"/>
                 </a:solidFill>
                 <a:latin typeface="Calibri"/>
               </a:rPr>
@@ -37817,7 +37921,7 @@
             <a:r>
               <a:rPr sz="1100" b="0" i="0">
                 <a:solidFill>
-                  <a:srgbClr val="0F1433"/>
+                  <a:srgbClr val="16171B"/>
                 </a:solidFill>
                 <a:latin typeface="Calibri"/>
               </a:rPr>
@@ -37841,7 +37945,7 @@
             <a:avLst/>
           </a:prstGeom>
           <a:solidFill>
-            <a:srgbClr val="E97132"/>
+            <a:srgbClr val="B26A00"/>
           </a:solidFill>
           <a:ln>
             <a:noFill/>
@@ -37920,7 +38024,7 @@
             <a:avLst/>
           </a:prstGeom>
           <a:solidFill>
-            <a:srgbClr val="F0F0F0"/>
+            <a:srgbClr val="F4F3F0"/>
           </a:solidFill>
           <a:ln>
             <a:noFill/>
@@ -37975,7 +38079,7 @@
             <a:r>
               <a:rPr sz="1400" b="1" i="0">
                 <a:solidFill>
-                  <a:srgbClr val="1E2761"/>
+                  <a:srgbClr val="23242A"/>
                 </a:solidFill>
                 <a:latin typeface="Calibri"/>
               </a:rPr>
@@ -38010,7 +38114,7 @@
             <a:r>
               <a:rPr sz="1100" b="0" i="0">
                 <a:solidFill>
-                  <a:srgbClr val="0F1433"/>
+                  <a:srgbClr val="16171B"/>
                 </a:solidFill>
                 <a:latin typeface="Calibri"/>
               </a:rPr>
@@ -38034,7 +38138,7 @@
             <a:avLst/>
           </a:prstGeom>
           <a:solidFill>
-            <a:srgbClr val="9C27B0"/>
+            <a:srgbClr val="6A3D9A"/>
           </a:solidFill>
           <a:ln>
             <a:noFill/>
@@ -38113,7 +38217,7 @@
             <a:avLst/>
           </a:prstGeom>
           <a:solidFill>
-            <a:srgbClr val="F0F0F0"/>
+            <a:srgbClr val="F4F3F0"/>
           </a:solidFill>
           <a:ln>
             <a:noFill/>
@@ -38168,7 +38272,7 @@
             <a:r>
               <a:rPr sz="1400" b="1" i="0">
                 <a:solidFill>
-                  <a:srgbClr val="1E2761"/>
+                  <a:srgbClr val="23242A"/>
                 </a:solidFill>
                 <a:latin typeface="Calibri"/>
               </a:rPr>
@@ -38203,7 +38307,7 @@
             <a:r>
               <a:rPr sz="1100" b="0" i="0">
                 <a:solidFill>
-                  <a:srgbClr val="0F1433"/>
+                  <a:srgbClr val="16171B"/>
                 </a:solidFill>
                 <a:latin typeface="Calibri"/>
               </a:rPr>
@@ -38227,7 +38331,7 @@
             <a:avLst/>
           </a:prstGeom>
           <a:solidFill>
-            <a:srgbClr val="E53935"/>
+            <a:srgbClr val="C62828"/>
           </a:solidFill>
           <a:ln>
             <a:noFill/>
@@ -38306,7 +38410,7 @@
             <a:avLst/>
           </a:prstGeom>
           <a:solidFill>
-            <a:srgbClr val="F0F0F0"/>
+            <a:srgbClr val="F4F3F0"/>
           </a:solidFill>
           <a:ln>
             <a:noFill/>
@@ -38361,7 +38465,7 @@
             <a:r>
               <a:rPr sz="1400" b="1" i="0">
                 <a:solidFill>
-                  <a:srgbClr val="1E2761"/>
+                  <a:srgbClr val="23242A"/>
                 </a:solidFill>
                 <a:latin typeface="Calibri"/>
               </a:rPr>
@@ -38396,7 +38500,7 @@
             <a:r>
               <a:rPr sz="1100" b="0" i="0">
                 <a:solidFill>
-                  <a:srgbClr val="0F1433"/>
+                  <a:srgbClr val="16171B"/>
                 </a:solidFill>
                 <a:latin typeface="Calibri"/>
               </a:rPr>
@@ -38431,7 +38535,7 @@
             <a:r>
               <a:rPr sz="900" b="0" i="0">
                 <a:solidFill>
-                  <a:srgbClr val="606060"/>
+                  <a:srgbClr val="6B6D76"/>
                 </a:solidFill>
                 <a:latin typeface="Calibri"/>
               </a:rPr>
@@ -38448,7 +38552,7 @@
 </p:sld>
 </file>
 
-<file path=ppt/slides/slide6.xml><?xml version="1.0" encoding="utf-8"?>
+<file path=ppt\slides\slide6.xml><?xml version="1.0" encoding="utf-8"?>
 <p:sld xmlns:a="http://schemas.openxmlformats.org/drawingml/2006/main" xmlns:r="http://schemas.openxmlformats.org/officeDocument/2006/relationships" xmlns:p="http://schemas.openxmlformats.org/presentationml/2006/main">
   <p:cSld>
     <p:spTree>
@@ -38480,7 +38584,7 @@
             <a:avLst/>
           </a:prstGeom>
           <a:solidFill>
-            <a:srgbClr val="1E2761"/>
+            <a:srgbClr val="23242A"/>
           </a:solidFill>
           <a:ln>
             <a:noFill/>
@@ -38570,7 +38674,7 @@
             <a:r>
               <a:rPr sz="1200" b="0" i="1">
                 <a:solidFill>
-                  <a:srgbClr val="CADCFC"/>
+                  <a:srgbClr val="C8C9D0"/>
                 </a:solidFill>
                 <a:latin typeface="Calibri"/>
               </a:rPr>
@@ -38594,7 +38698,7 @@
             <a:avLst/>
           </a:prstGeom>
           <a:solidFill>
-            <a:srgbClr val="2196F3"/>
+            <a:srgbClr val="2C5F8A"/>
           </a:solidFill>
           <a:ln>
             <a:noFill/>
@@ -38912,7 +39016,7 @@
             <a:r>
               <a:rPr sz="1100" b="1" i="0">
                 <a:solidFill>
-                  <a:srgbClr val="2196F3"/>
+                  <a:srgbClr val="2C5F8A"/>
                 </a:solidFill>
                 <a:latin typeface="Calibri"/>
               </a:rPr>
@@ -38936,7 +39040,7 @@
             <a:avLst/>
           </a:prstGeom>
           <a:solidFill>
-            <a:srgbClr val="4CAF50"/>
+            <a:srgbClr val="2E7D32"/>
           </a:solidFill>
           <a:ln>
             <a:noFill/>
@@ -39254,7 +39358,7 @@
             <a:r>
               <a:rPr sz="1100" b="1" i="0">
                 <a:solidFill>
-                  <a:srgbClr val="4CAF50"/>
+                  <a:srgbClr val="2E7D32"/>
                 </a:solidFill>
                 <a:latin typeface="Calibri"/>
               </a:rPr>
@@ -39278,7 +39382,7 @@
             <a:avLst/>
           </a:prstGeom>
           <a:solidFill>
-            <a:srgbClr val="D4AF37"/>
+            <a:srgbClr val="C9A227"/>
           </a:solidFill>
           <a:ln>
             <a:noFill/>
@@ -39596,7 +39700,7 @@
             <a:r>
               <a:rPr sz="1100" b="1" i="0">
                 <a:solidFill>
-                  <a:srgbClr val="D4AF37"/>
+                  <a:srgbClr val="C9A227"/>
                 </a:solidFill>
                 <a:latin typeface="Calibri"/>
               </a:rPr>
@@ -39620,7 +39724,7 @@
             <a:avLst/>
           </a:prstGeom>
           <a:solidFill>
-            <a:srgbClr val="E97132"/>
+            <a:srgbClr val="B26A00"/>
           </a:solidFill>
           <a:ln>
             <a:noFill/>
@@ -39938,7 +40042,7 @@
             <a:r>
               <a:rPr sz="1100" b="1" i="0">
                 <a:solidFill>
-                  <a:srgbClr val="E97132"/>
+                  <a:srgbClr val="B26A00"/>
                 </a:solidFill>
                 <a:latin typeface="Calibri"/>
               </a:rPr>
@@ -39973,7 +40077,7 @@
             <a:r>
               <a:rPr sz="900" b="0" i="0">
                 <a:solidFill>
-                  <a:srgbClr val="606060"/>
+                  <a:srgbClr val="6B6D76"/>
                 </a:solidFill>
                 <a:latin typeface="Calibri"/>
               </a:rPr>
@@ -39990,7 +40094,7 @@
 </p:sld>
 </file>
 
-<file path=ppt/slides/slide7.xml><?xml version="1.0" encoding="utf-8"?>
+<file path=ppt\slides\slide7.xml><?xml version="1.0" encoding="utf-8"?>
 <p:sld xmlns:a="http://schemas.openxmlformats.org/drawingml/2006/main" xmlns:r="http://schemas.openxmlformats.org/officeDocument/2006/relationships" xmlns:p="http://schemas.openxmlformats.org/presentationml/2006/main">
   <p:cSld>
     <p:spTree>
@@ -40022,7 +40126,7 @@
             <a:avLst/>
           </a:prstGeom>
           <a:solidFill>
-            <a:srgbClr val="1E2761"/>
+            <a:srgbClr val="23242A"/>
           </a:solidFill>
           <a:ln>
             <a:noFill/>
@@ -40112,7 +40216,7 @@
             <a:r>
               <a:rPr sz="1200" b="0" i="1">
                 <a:solidFill>
-                  <a:srgbClr val="CADCFC"/>
+                  <a:srgbClr val="C8C9D0"/>
                 </a:solidFill>
                 <a:latin typeface="Calibri"/>
               </a:rPr>
@@ -40147,7 +40251,7 @@
             <a:r>
               <a:rPr sz="800" b="1" i="0">
                 <a:solidFill>
-                  <a:srgbClr val="1E2761"/>
+                  <a:srgbClr val="23242A"/>
                 </a:solidFill>
                 <a:latin typeface="Calibri"/>
               </a:rPr>
@@ -40171,7 +40275,7 @@
             <a:avLst/>
           </a:prstGeom>
           <a:solidFill>
-            <a:srgbClr val="F0F0F0"/>
+            <a:srgbClr val="F4F3F0"/>
           </a:solidFill>
           <a:ln>
             <a:noFill/>
@@ -40226,7 +40330,7 @@
             <a:r>
               <a:rPr sz="800" b="1" i="0">
                 <a:solidFill>
-                  <a:srgbClr val="1E2761"/>
+                  <a:srgbClr val="23242A"/>
                 </a:solidFill>
                 <a:latin typeface="Calibri"/>
               </a:rPr>
@@ -40250,7 +40354,7 @@
             <a:avLst/>
           </a:prstGeom>
           <a:solidFill>
-            <a:srgbClr val="F0F0F0"/>
+            <a:srgbClr val="F4F3F0"/>
           </a:solidFill>
           <a:ln>
             <a:noFill/>
@@ -40305,7 +40409,7 @@
             <a:r>
               <a:rPr sz="800" b="1" i="0">
                 <a:solidFill>
-                  <a:srgbClr val="1E2761"/>
+                  <a:srgbClr val="23242A"/>
                 </a:solidFill>
                 <a:latin typeface="Calibri"/>
               </a:rPr>
@@ -40329,7 +40433,7 @@
             <a:avLst/>
           </a:prstGeom>
           <a:solidFill>
-            <a:srgbClr val="F0F0F0"/>
+            <a:srgbClr val="F4F3F0"/>
           </a:solidFill>
           <a:ln>
             <a:noFill/>
@@ -40384,7 +40488,7 @@
             <a:r>
               <a:rPr sz="800" b="1" i="0">
                 <a:solidFill>
-                  <a:srgbClr val="1E2761"/>
+                  <a:srgbClr val="23242A"/>
                 </a:solidFill>
                 <a:latin typeface="Calibri"/>
               </a:rPr>
@@ -40408,7 +40512,7 @@
             <a:avLst/>
           </a:prstGeom>
           <a:solidFill>
-            <a:srgbClr val="F0F0F0"/>
+            <a:srgbClr val="F4F3F0"/>
           </a:solidFill>
           <a:ln>
             <a:noFill/>
@@ -40463,7 +40567,7 @@
             <a:r>
               <a:rPr sz="800" b="1" i="0">
                 <a:solidFill>
-                  <a:srgbClr val="1E2761"/>
+                  <a:srgbClr val="23242A"/>
                 </a:solidFill>
                 <a:latin typeface="Calibri"/>
               </a:rPr>
@@ -40487,7 +40591,7 @@
             <a:avLst/>
           </a:prstGeom>
           <a:solidFill>
-            <a:srgbClr val="F0F0F0"/>
+            <a:srgbClr val="F4F3F0"/>
           </a:solidFill>
           <a:ln>
             <a:noFill/>
@@ -40542,7 +40646,7 @@
             <a:r>
               <a:rPr sz="800" b="1" i="0">
                 <a:solidFill>
-                  <a:srgbClr val="1E2761"/>
+                  <a:srgbClr val="23242A"/>
                 </a:solidFill>
                 <a:latin typeface="Calibri"/>
               </a:rPr>
@@ -40566,7 +40670,7 @@
             <a:avLst/>
           </a:prstGeom>
           <a:solidFill>
-            <a:srgbClr val="F0F0F0"/>
+            <a:srgbClr val="F4F3F0"/>
           </a:solidFill>
           <a:ln>
             <a:noFill/>
@@ -40621,7 +40725,7 @@
             <a:r>
               <a:rPr sz="800" b="1" i="0">
                 <a:solidFill>
-                  <a:srgbClr val="1E2761"/>
+                  <a:srgbClr val="23242A"/>
                 </a:solidFill>
                 <a:latin typeface="Calibri"/>
               </a:rPr>
@@ -40645,7 +40749,7 @@
             <a:avLst/>
           </a:prstGeom>
           <a:solidFill>
-            <a:srgbClr val="F0F0F0"/>
+            <a:srgbClr val="F4F3F0"/>
           </a:solidFill>
           <a:ln>
             <a:noFill/>
@@ -40700,7 +40804,7 @@
             <a:r>
               <a:rPr sz="800" b="1" i="0">
                 <a:solidFill>
-                  <a:srgbClr val="1E2761"/>
+                  <a:srgbClr val="23242A"/>
                 </a:solidFill>
                 <a:latin typeface="Calibri"/>
               </a:rPr>
@@ -40724,7 +40828,7 @@
             <a:avLst/>
           </a:prstGeom>
           <a:solidFill>
-            <a:srgbClr val="F0F0F0"/>
+            <a:srgbClr val="F4F3F0"/>
           </a:solidFill>
           <a:ln>
             <a:noFill/>
@@ -40779,7 +40883,7 @@
             <a:r>
               <a:rPr sz="800" b="1" i="0">
                 <a:solidFill>
-                  <a:srgbClr val="1E2761"/>
+                  <a:srgbClr val="23242A"/>
                 </a:solidFill>
                 <a:latin typeface="Calibri"/>
               </a:rPr>
@@ -40803,7 +40907,7 @@
             <a:avLst/>
           </a:prstGeom>
           <a:solidFill>
-            <a:srgbClr val="F0F0F0"/>
+            <a:srgbClr val="F4F3F0"/>
           </a:solidFill>
           <a:ln>
             <a:noFill/>
@@ -40858,7 +40962,7 @@
             <a:r>
               <a:rPr sz="800" b="1" i="0">
                 <a:solidFill>
-                  <a:srgbClr val="1E2761"/>
+                  <a:srgbClr val="23242A"/>
                 </a:solidFill>
                 <a:latin typeface="Calibri"/>
               </a:rPr>
@@ -40882,7 +40986,7 @@
             <a:avLst/>
           </a:prstGeom>
           <a:solidFill>
-            <a:srgbClr val="F0F0F0"/>
+            <a:srgbClr val="F4F3F0"/>
           </a:solidFill>
           <a:ln>
             <a:noFill/>
@@ -40937,7 +41041,7 @@
             <a:r>
               <a:rPr sz="800" b="1" i="0">
                 <a:solidFill>
-                  <a:srgbClr val="1E2761"/>
+                  <a:srgbClr val="23242A"/>
                 </a:solidFill>
                 <a:latin typeface="Calibri"/>
               </a:rPr>
@@ -40961,7 +41065,7 @@
             <a:avLst/>
           </a:prstGeom>
           <a:solidFill>
-            <a:srgbClr val="F0F0F0"/>
+            <a:srgbClr val="F4F3F0"/>
           </a:solidFill>
           <a:ln>
             <a:noFill/>
@@ -41016,7 +41120,7 @@
             <a:r>
               <a:rPr sz="1000" b="1" i="0">
                 <a:solidFill>
-                  <a:srgbClr val="1E2761"/>
+                  <a:srgbClr val="23242A"/>
                 </a:solidFill>
                 <a:latin typeface="Calibri"/>
               </a:rPr>
@@ -41040,7 +41144,7 @@
             <a:avLst/>
           </a:prstGeom>
           <a:solidFill>
-            <a:srgbClr val="2196F3"/>
+            <a:srgbClr val="2C5F8A"/>
           </a:solidFill>
           <a:ln>
             <a:noFill/>
@@ -41130,7 +41234,7 @@
             <a:r>
               <a:rPr sz="1000" b="1" i="0">
                 <a:solidFill>
-                  <a:srgbClr val="1E2761"/>
+                  <a:srgbClr val="23242A"/>
                 </a:solidFill>
                 <a:latin typeface="Calibri"/>
               </a:rPr>
@@ -41154,7 +41258,7 @@
             <a:avLst/>
           </a:prstGeom>
           <a:solidFill>
-            <a:srgbClr val="4CAF50"/>
+            <a:srgbClr val="2E7D32"/>
           </a:solidFill>
           <a:ln>
             <a:noFill/>
@@ -41244,7 +41348,7 @@
             <a:r>
               <a:rPr sz="1000" b="1" i="0">
                 <a:solidFill>
-                  <a:srgbClr val="1E2761"/>
+                  <a:srgbClr val="23242A"/>
                 </a:solidFill>
                 <a:latin typeface="Calibri"/>
               </a:rPr>
@@ -41268,7 +41372,7 @@
             <a:avLst/>
           </a:prstGeom>
           <a:solidFill>
-            <a:srgbClr val="D4AF37"/>
+            <a:srgbClr val="C9A227"/>
           </a:solidFill>
           <a:ln>
             <a:noFill/>
@@ -41358,7 +41462,7 @@
             <a:r>
               <a:rPr sz="1000" b="1" i="0">
                 <a:solidFill>
-                  <a:srgbClr val="1E2761"/>
+                  <a:srgbClr val="23242A"/>
                 </a:solidFill>
                 <a:latin typeface="Calibri"/>
               </a:rPr>
@@ -41382,7 +41486,7 @@
             <a:avLst/>
           </a:prstGeom>
           <a:solidFill>
-            <a:srgbClr val="E97132"/>
+            <a:srgbClr val="B26A00"/>
           </a:solidFill>
           <a:ln>
             <a:noFill/>
@@ -41472,7 +41576,7 @@
             <a:r>
               <a:rPr sz="1000" b="1" i="0">
                 <a:solidFill>
-                  <a:srgbClr val="1E2761"/>
+                  <a:srgbClr val="23242A"/>
                 </a:solidFill>
                 <a:latin typeface="Calibri"/>
               </a:rPr>
@@ -41496,7 +41600,7 @@
             <a:avLst/>
           </a:prstGeom>
           <a:solidFill>
-            <a:srgbClr val="9C27B0"/>
+            <a:srgbClr val="6A3D9A"/>
           </a:solidFill>
           <a:ln>
             <a:noFill/>
@@ -41586,7 +41690,7 @@
             <a:r>
               <a:rPr sz="1000" b="1" i="0">
                 <a:solidFill>
-                  <a:srgbClr val="1E2761"/>
+                  <a:srgbClr val="23242A"/>
                 </a:solidFill>
                 <a:latin typeface="Calibri"/>
               </a:rPr>
@@ -41610,7 +41714,7 @@
             <a:avLst/>
           </a:prstGeom>
           <a:solidFill>
-            <a:srgbClr val="E53935"/>
+            <a:srgbClr val="C62828"/>
           </a:solidFill>
           <a:ln>
             <a:noFill/>
@@ -41700,7 +41804,7 @@
             <a:r>
               <a:rPr sz="1000" b="1" i="0">
                 <a:solidFill>
-                  <a:srgbClr val="1E2761"/>
+                  <a:srgbClr val="23242A"/>
                 </a:solidFill>
                 <a:latin typeface="Calibri"/>
               </a:rPr>
@@ -41724,7 +41828,7 @@
             <a:avLst/>
           </a:prstGeom>
           <a:solidFill>
-            <a:srgbClr val="606060"/>
+            <a:srgbClr val="6B6D76"/>
           </a:solidFill>
           <a:ln>
             <a:noFill/>
@@ -41803,7 +41907,7 @@
             <a:avLst/>
           </a:prstGeom>
           <a:solidFill>
-            <a:srgbClr val="D4AF37"/>
+            <a:srgbClr val="C9A227"/>
           </a:solidFill>
           <a:ln>
             <a:noFill/>
@@ -41858,7 +41962,7 @@
             <a:r>
               <a:rPr sz="1000" b="1" i="0">
                 <a:solidFill>
-                  <a:srgbClr val="1E2761"/>
+                  <a:srgbClr val="23242A"/>
                 </a:solidFill>
                 <a:latin typeface="Calibri"/>
               </a:rPr>
@@ -41882,7 +41986,7 @@
             <a:avLst/>
           </a:prstGeom>
           <a:solidFill>
-            <a:srgbClr val="D4AF37"/>
+            <a:srgbClr val="C9A227"/>
           </a:solidFill>
           <a:ln>
             <a:noFill/>
@@ -41972,7 +42076,7 @@
             <a:r>
               <a:rPr sz="800" b="0" i="0">
                 <a:solidFill>
-                  <a:srgbClr val="1E2761"/>
+                  <a:srgbClr val="23242A"/>
                 </a:solidFill>
                 <a:latin typeface="Calibri"/>
               </a:rPr>
@@ -41996,7 +42100,7 @@
             <a:avLst/>
           </a:prstGeom>
           <a:solidFill>
-            <a:srgbClr val="D4AF37"/>
+            <a:srgbClr val="C9A227"/>
           </a:solidFill>
           <a:ln>
             <a:noFill/>
@@ -42086,7 +42190,7 @@
             <a:r>
               <a:rPr sz="800" b="0" i="0">
                 <a:solidFill>
-                  <a:srgbClr val="1E2761"/>
+                  <a:srgbClr val="23242A"/>
                 </a:solidFill>
                 <a:latin typeface="Calibri"/>
               </a:rPr>
@@ -42110,7 +42214,7 @@
             <a:avLst/>
           </a:prstGeom>
           <a:solidFill>
-            <a:srgbClr val="D4AF37"/>
+            <a:srgbClr val="C9A227"/>
           </a:solidFill>
           <a:ln>
             <a:noFill/>
@@ -42200,7 +42304,7 @@
             <a:r>
               <a:rPr sz="800" b="0" i="0">
                 <a:solidFill>
-                  <a:srgbClr val="1E2761"/>
+                  <a:srgbClr val="23242A"/>
                 </a:solidFill>
                 <a:latin typeface="Calibri"/>
               </a:rPr>
@@ -42224,7 +42328,7 @@
             <a:avLst/>
           </a:prstGeom>
           <a:solidFill>
-            <a:srgbClr val="D4AF37"/>
+            <a:srgbClr val="C9A227"/>
           </a:solidFill>
           <a:ln>
             <a:noFill/>
@@ -42314,7 +42418,7 @@
             <a:r>
               <a:rPr sz="800" b="0" i="0">
                 <a:solidFill>
-                  <a:srgbClr val="1E2761"/>
+                  <a:srgbClr val="23242A"/>
                 </a:solidFill>
                 <a:latin typeface="Calibri"/>
               </a:rPr>
@@ -42338,7 +42442,7 @@
             <a:avLst/>
           </a:prstGeom>
           <a:solidFill>
-            <a:srgbClr val="D4AF37"/>
+            <a:srgbClr val="C9A227"/>
           </a:solidFill>
           <a:ln>
             <a:noFill/>
@@ -42428,7 +42532,7 @@
             <a:r>
               <a:rPr sz="800" b="0" i="0">
                 <a:solidFill>
-                  <a:srgbClr val="1E2761"/>
+                  <a:srgbClr val="23242A"/>
                 </a:solidFill>
                 <a:latin typeface="Calibri"/>
               </a:rPr>
@@ -42452,7 +42556,7 @@
             <a:avLst/>
           </a:prstGeom>
           <a:solidFill>
-            <a:srgbClr val="E53935"/>
+            <a:srgbClr val="C62828"/>
           </a:solidFill>
           <a:ln>
             <a:noFill/>
@@ -42542,7 +42646,7 @@
             <a:r>
               <a:rPr sz="800" b="0" i="0">
                 <a:solidFill>
-                  <a:srgbClr val="1E2761"/>
+                  <a:srgbClr val="23242A"/>
                 </a:solidFill>
                 <a:latin typeface="Calibri"/>
               </a:rPr>
@@ -42577,7 +42681,7 @@
             <a:r>
               <a:rPr sz="900" b="0" i="1">
                 <a:solidFill>
-                  <a:srgbClr val="606060"/>
+                  <a:srgbClr val="6B6D76"/>
                 </a:solidFill>
                 <a:latin typeface="Calibri"/>
               </a:rPr>
@@ -42612,7 +42716,7 @@
             <a:r>
               <a:rPr sz="900" b="0" i="0">
                 <a:solidFill>
-                  <a:srgbClr val="606060"/>
+                  <a:srgbClr val="6B6D76"/>
                 </a:solidFill>
                 <a:latin typeface="Calibri"/>
               </a:rPr>
@@ -42629,7 +42733,7 @@
 </p:sld>
 </file>
 
-<file path=ppt/slides/slide8.xml><?xml version="1.0" encoding="utf-8"?>
+<file path=ppt\slides\slide8.xml><?xml version="1.0" encoding="utf-8"?>
 <p:sld xmlns:a="http://schemas.openxmlformats.org/drawingml/2006/main" xmlns:r="http://schemas.openxmlformats.org/officeDocument/2006/relationships" xmlns:p="http://schemas.openxmlformats.org/presentationml/2006/main">
   <p:cSld>
     <p:spTree>
@@ -42661,7 +42765,7 @@
             <a:avLst/>
           </a:prstGeom>
           <a:solidFill>
-            <a:srgbClr val="1E2761"/>
+            <a:srgbClr val="23242A"/>
           </a:solidFill>
           <a:ln>
             <a:noFill/>
@@ -42720,7 +42824,7 @@
                 </a:solidFill>
                 <a:latin typeface="Calibri"/>
               </a:rPr>
-              <a:t>Team Composition  ·  7 Lean Roles</a:t>
+              <a:t>Team Composition  |  7 Lean Roles</a:t>
             </a:r>
           </a:p>
         </p:txBody>
@@ -42751,7 +42855,7 @@
             <a:r>
               <a:rPr sz="1200" b="0" i="1">
                 <a:solidFill>
-                  <a:srgbClr val="CADCFC"/>
+                  <a:srgbClr val="C8C9D0"/>
                 </a:solidFill>
                 <a:latin typeface="Calibri"/>
               </a:rPr>
@@ -42775,7 +42879,7 @@
             <a:avLst/>
           </a:prstGeom>
           <a:solidFill>
-            <a:srgbClr val="F0F0F0"/>
+            <a:srgbClr val="F4F3F0"/>
           </a:solidFill>
           <a:ln>
             <a:noFill/>
@@ -42819,7 +42923,7 @@
             <a:avLst/>
           </a:prstGeom>
           <a:solidFill>
-            <a:srgbClr val="1E2761"/>
+            <a:srgbClr val="23242A"/>
           </a:solidFill>
           <a:ln>
             <a:noFill/>
@@ -42909,7 +43013,7 @@
             <a:r>
               <a:rPr sz="1300" b="1" i="0">
                 <a:solidFill>
-                  <a:srgbClr val="1E2761"/>
+                  <a:srgbClr val="23242A"/>
                 </a:solidFill>
                 <a:latin typeface="Calibri"/>
               </a:rPr>
@@ -42944,7 +43048,7 @@
             <a:r>
               <a:rPr sz="1000" b="0" i="1">
                 <a:solidFill>
-                  <a:srgbClr val="606060"/>
+                  <a:srgbClr val="6B6D76"/>
                 </a:solidFill>
                 <a:latin typeface="Calibri"/>
               </a:rPr>
@@ -42968,7 +43072,7 @@
             <a:avLst/>
           </a:prstGeom>
           <a:solidFill>
-            <a:srgbClr val="1E2761"/>
+            <a:srgbClr val="23242A"/>
           </a:solidFill>
           <a:ln>
             <a:noFill/>
@@ -43023,7 +43127,7 @@
             <a:r>
               <a:rPr sz="1000" b="1" i="0">
                 <a:solidFill>
-                  <a:srgbClr val="D4AF37"/>
+                  <a:srgbClr val="C9A227"/>
                 </a:solidFill>
                 <a:latin typeface="Calibri"/>
               </a:rPr>
@@ -43093,7 +43197,7 @@
             <a:r>
               <a:rPr sz="1000" b="0" i="0">
                 <a:solidFill>
-                  <a:srgbClr val="0F1433"/>
+                  <a:srgbClr val="16171B"/>
                 </a:solidFill>
                 <a:latin typeface="Calibri"/>
               </a:rPr>
@@ -43117,7 +43221,7 @@
             <a:avLst/>
           </a:prstGeom>
           <a:solidFill>
-            <a:srgbClr val="F0F0F0"/>
+            <a:srgbClr val="F4F3F0"/>
           </a:solidFill>
           <a:ln>
             <a:noFill/>
@@ -43161,7 +43265,7 @@
             <a:avLst/>
           </a:prstGeom>
           <a:solidFill>
-            <a:srgbClr val="D4AF37"/>
+            <a:srgbClr val="C9A227"/>
           </a:solidFill>
           <a:ln>
             <a:noFill/>
@@ -43251,7 +43355,7 @@
             <a:r>
               <a:rPr sz="1300" b="1" i="0">
                 <a:solidFill>
-                  <a:srgbClr val="1E2761"/>
+                  <a:srgbClr val="23242A"/>
                 </a:solidFill>
                 <a:latin typeface="Calibri"/>
               </a:rPr>
@@ -43286,7 +43390,7 @@
             <a:r>
               <a:rPr sz="1000" b="0" i="1">
                 <a:solidFill>
-                  <a:srgbClr val="606060"/>
+                  <a:srgbClr val="6B6D76"/>
                 </a:solidFill>
                 <a:latin typeface="Calibri"/>
               </a:rPr>
@@ -43310,7 +43414,7 @@
             <a:avLst/>
           </a:prstGeom>
           <a:solidFill>
-            <a:srgbClr val="1E2761"/>
+            <a:srgbClr val="23242A"/>
           </a:solidFill>
           <a:ln>
             <a:noFill/>
@@ -43365,7 +43469,7 @@
             <a:r>
               <a:rPr sz="1000" b="1" i="0">
                 <a:solidFill>
-                  <a:srgbClr val="D4AF37"/>
+                  <a:srgbClr val="C9A227"/>
                 </a:solidFill>
                 <a:latin typeface="Calibri"/>
               </a:rPr>
@@ -43435,7 +43539,7 @@
             <a:r>
               <a:rPr sz="1000" b="0" i="0">
                 <a:solidFill>
-                  <a:srgbClr val="0F1433"/>
+                  <a:srgbClr val="16171B"/>
                 </a:solidFill>
                 <a:latin typeface="Calibri"/>
               </a:rPr>
@@ -43459,7 +43563,7 @@
             <a:avLst/>
           </a:prstGeom>
           <a:solidFill>
-            <a:srgbClr val="F0F0F0"/>
+            <a:srgbClr val="F4F3F0"/>
           </a:solidFill>
           <a:ln>
             <a:noFill/>
@@ -43503,7 +43607,7 @@
             <a:avLst/>
           </a:prstGeom>
           <a:solidFill>
-            <a:srgbClr val="2196F3"/>
+            <a:srgbClr val="2C5F8A"/>
           </a:solidFill>
           <a:ln>
             <a:noFill/>
@@ -43593,7 +43697,7 @@
             <a:r>
               <a:rPr sz="1300" b="1" i="0">
                 <a:solidFill>
-                  <a:srgbClr val="1E2761"/>
+                  <a:srgbClr val="23242A"/>
                 </a:solidFill>
                 <a:latin typeface="Calibri"/>
               </a:rPr>
@@ -43628,7 +43732,7 @@
             <a:r>
               <a:rPr sz="1000" b="0" i="1">
                 <a:solidFill>
-                  <a:srgbClr val="606060"/>
+                  <a:srgbClr val="6B6D76"/>
                 </a:solidFill>
                 <a:latin typeface="Calibri"/>
               </a:rPr>
@@ -43652,7 +43756,7 @@
             <a:avLst/>
           </a:prstGeom>
           <a:solidFill>
-            <a:srgbClr val="1E2761"/>
+            <a:srgbClr val="23242A"/>
           </a:solidFill>
           <a:ln>
             <a:noFill/>
@@ -43707,7 +43811,7 @@
             <a:r>
               <a:rPr sz="1000" b="1" i="0">
                 <a:solidFill>
-                  <a:srgbClr val="D4AF37"/>
+                  <a:srgbClr val="C9A227"/>
                 </a:solidFill>
                 <a:latin typeface="Calibri"/>
               </a:rPr>
@@ -43777,7 +43881,7 @@
             <a:r>
               <a:rPr sz="1000" b="0" i="0">
                 <a:solidFill>
-                  <a:srgbClr val="0F1433"/>
+                  <a:srgbClr val="16171B"/>
                 </a:solidFill>
                 <a:latin typeface="Calibri"/>
               </a:rPr>
@@ -43801,7 +43905,7 @@
             <a:avLst/>
           </a:prstGeom>
           <a:solidFill>
-            <a:srgbClr val="F0F0F0"/>
+            <a:srgbClr val="F4F3F0"/>
           </a:solidFill>
           <a:ln>
             <a:noFill/>
@@ -43845,7 +43949,7 @@
             <a:avLst/>
           </a:prstGeom>
           <a:solidFill>
-            <a:srgbClr val="9C27B0"/>
+            <a:srgbClr val="6A3D9A"/>
           </a:solidFill>
           <a:ln>
             <a:noFill/>
@@ -43935,7 +44039,7 @@
             <a:r>
               <a:rPr sz="1300" b="1" i="0">
                 <a:solidFill>
-                  <a:srgbClr val="1E2761"/>
+                  <a:srgbClr val="23242A"/>
                 </a:solidFill>
                 <a:latin typeface="Calibri"/>
               </a:rPr>
@@ -43970,7 +44074,7 @@
             <a:r>
               <a:rPr sz="1000" b="0" i="1">
                 <a:solidFill>
-                  <a:srgbClr val="606060"/>
+                  <a:srgbClr val="6B6D76"/>
                 </a:solidFill>
                 <a:latin typeface="Calibri"/>
               </a:rPr>
@@ -43994,7 +44098,7 @@
             <a:avLst/>
           </a:prstGeom>
           <a:solidFill>
-            <a:srgbClr val="1E2761"/>
+            <a:srgbClr val="23242A"/>
           </a:solidFill>
           <a:ln>
             <a:noFill/>
@@ -44049,7 +44153,7 @@
             <a:r>
               <a:rPr sz="1000" b="1" i="0">
                 <a:solidFill>
-                  <a:srgbClr val="D4AF37"/>
+                  <a:srgbClr val="C9A227"/>
                 </a:solidFill>
                 <a:latin typeface="Calibri"/>
               </a:rPr>
@@ -44119,7 +44223,7 @@
             <a:r>
               <a:rPr sz="1000" b="0" i="0">
                 <a:solidFill>
-                  <a:srgbClr val="0F1433"/>
+                  <a:srgbClr val="16171B"/>
                 </a:solidFill>
                 <a:latin typeface="Calibri"/>
               </a:rPr>
@@ -44143,7 +44247,7 @@
             <a:avLst/>
           </a:prstGeom>
           <a:solidFill>
-            <a:srgbClr val="F0F0F0"/>
+            <a:srgbClr val="F4F3F0"/>
           </a:solidFill>
           <a:ln>
             <a:noFill/>
@@ -44187,7 +44291,7 @@
             <a:avLst/>
           </a:prstGeom>
           <a:solidFill>
-            <a:srgbClr val="E53935"/>
+            <a:srgbClr val="C62828"/>
           </a:solidFill>
           <a:ln>
             <a:noFill/>
@@ -44277,7 +44381,7 @@
             <a:r>
               <a:rPr sz="1300" b="1" i="0">
                 <a:solidFill>
-                  <a:srgbClr val="1E2761"/>
+                  <a:srgbClr val="23242A"/>
                 </a:solidFill>
                 <a:latin typeface="Calibri"/>
               </a:rPr>
@@ -44312,7 +44416,7 @@
             <a:r>
               <a:rPr sz="1000" b="0" i="1">
                 <a:solidFill>
-                  <a:srgbClr val="606060"/>
+                  <a:srgbClr val="6B6D76"/>
                 </a:solidFill>
                 <a:latin typeface="Calibri"/>
               </a:rPr>
@@ -44336,7 +44440,7 @@
             <a:avLst/>
           </a:prstGeom>
           <a:solidFill>
-            <a:srgbClr val="1E2761"/>
+            <a:srgbClr val="23242A"/>
           </a:solidFill>
           <a:ln>
             <a:noFill/>
@@ -44391,7 +44495,7 @@
             <a:r>
               <a:rPr sz="1000" b="1" i="0">
                 <a:solidFill>
-                  <a:srgbClr val="D4AF37"/>
+                  <a:srgbClr val="C9A227"/>
                 </a:solidFill>
                 <a:latin typeface="Calibri"/>
               </a:rPr>
@@ -44461,7 +44565,7 @@
             <a:r>
               <a:rPr sz="1000" b="0" i="0">
                 <a:solidFill>
-                  <a:srgbClr val="0F1433"/>
+                  <a:srgbClr val="16171B"/>
                 </a:solidFill>
                 <a:latin typeface="Calibri"/>
               </a:rPr>
@@ -44485,7 +44589,7 @@
             <a:avLst/>
           </a:prstGeom>
           <a:solidFill>
-            <a:srgbClr val="F0F0F0"/>
+            <a:srgbClr val="F4F3F0"/>
           </a:solidFill>
           <a:ln>
             <a:noFill/>
@@ -44529,7 +44633,7 @@
             <a:avLst/>
           </a:prstGeom>
           <a:solidFill>
-            <a:srgbClr val="4CAF50"/>
+            <a:srgbClr val="2E7D32"/>
           </a:solidFill>
           <a:ln>
             <a:noFill/>
@@ -44619,7 +44723,7 @@
             <a:r>
               <a:rPr sz="1300" b="1" i="0">
                 <a:solidFill>
-                  <a:srgbClr val="1E2761"/>
+                  <a:srgbClr val="23242A"/>
                 </a:solidFill>
                 <a:latin typeface="Calibri"/>
               </a:rPr>
@@ -44654,7 +44758,7 @@
             <a:r>
               <a:rPr sz="1000" b="0" i="1">
                 <a:solidFill>
-                  <a:srgbClr val="606060"/>
+                  <a:srgbClr val="6B6D76"/>
                 </a:solidFill>
                 <a:latin typeface="Calibri"/>
               </a:rPr>
@@ -44678,7 +44782,7 @@
             <a:avLst/>
           </a:prstGeom>
           <a:solidFill>
-            <a:srgbClr val="1E2761"/>
+            <a:srgbClr val="23242A"/>
           </a:solidFill>
           <a:ln>
             <a:noFill/>
@@ -44733,7 +44837,7 @@
             <a:r>
               <a:rPr sz="1000" b="1" i="0">
                 <a:solidFill>
-                  <a:srgbClr val="D4AF37"/>
+                  <a:srgbClr val="C9A227"/>
                 </a:solidFill>
                 <a:latin typeface="Calibri"/>
               </a:rPr>
@@ -44803,7 +44907,7 @@
             <a:r>
               <a:rPr sz="1000" b="0" i="0">
                 <a:solidFill>
-                  <a:srgbClr val="0F1433"/>
+                  <a:srgbClr val="16171B"/>
                 </a:solidFill>
                 <a:latin typeface="Calibri"/>
               </a:rPr>
@@ -44827,7 +44931,7 @@
             <a:avLst/>
           </a:prstGeom>
           <a:solidFill>
-            <a:srgbClr val="F0F0F0"/>
+            <a:srgbClr val="F4F3F0"/>
           </a:solidFill>
           <a:ln>
             <a:noFill/>
@@ -44871,7 +44975,7 @@
             <a:avLst/>
           </a:prstGeom>
           <a:solidFill>
-            <a:srgbClr val="E97132"/>
+            <a:srgbClr val="B26A00"/>
           </a:solidFill>
           <a:ln>
             <a:noFill/>
@@ -44961,7 +45065,7 @@
             <a:r>
               <a:rPr sz="1300" b="1" i="0">
                 <a:solidFill>
-                  <a:srgbClr val="1E2761"/>
+                  <a:srgbClr val="23242A"/>
                 </a:solidFill>
                 <a:latin typeface="Calibri"/>
               </a:rPr>
@@ -44996,7 +45100,7 @@
             <a:r>
               <a:rPr sz="1000" b="0" i="1">
                 <a:solidFill>
-                  <a:srgbClr val="606060"/>
+                  <a:srgbClr val="6B6D76"/>
                 </a:solidFill>
                 <a:latin typeface="Calibri"/>
               </a:rPr>
@@ -45020,7 +45124,7 @@
             <a:avLst/>
           </a:prstGeom>
           <a:solidFill>
-            <a:srgbClr val="1E2761"/>
+            <a:srgbClr val="23242A"/>
           </a:solidFill>
           <a:ln>
             <a:noFill/>
@@ -45075,7 +45179,7 @@
             <a:r>
               <a:rPr sz="1000" b="1" i="0">
                 <a:solidFill>
-                  <a:srgbClr val="D4AF37"/>
+                  <a:srgbClr val="C9A227"/>
                 </a:solidFill>
                 <a:latin typeface="Calibri"/>
               </a:rPr>
@@ -45145,7 +45249,7 @@
             <a:r>
               <a:rPr sz="1000" b="0" i="0">
                 <a:solidFill>
-                  <a:srgbClr val="0F1433"/>
+                  <a:srgbClr val="16171B"/>
                 </a:solidFill>
                 <a:latin typeface="Calibri"/>
               </a:rPr>
@@ -45169,7 +45273,7 @@
             <a:avLst/>
           </a:prstGeom>
           <a:solidFill>
-            <a:srgbClr val="1E2761"/>
+            <a:srgbClr val="23242A"/>
           </a:solidFill>
           <a:ln>
             <a:noFill/>
@@ -45224,7 +45328,7 @@
             <a:r>
               <a:rPr sz="1300" b="1" i="0">
                 <a:solidFill>
-                  <a:srgbClr val="D4AF37"/>
+                  <a:srgbClr val="C9A227"/>
                 </a:solidFill>
                 <a:latin typeface="Calibri"/>
               </a:rPr>
@@ -45294,7 +45398,7 @@
             <a:r>
               <a:rPr sz="1100" b="0" i="0">
                 <a:solidFill>
-                  <a:srgbClr val="CADCFC"/>
+                  <a:srgbClr val="C8C9D0"/>
                 </a:solidFill>
                 <a:latin typeface="Calibri"/>
               </a:rPr>
@@ -45364,7 +45468,7 @@
             <a:r>
               <a:rPr sz="1100" b="0" i="0">
                 <a:solidFill>
-                  <a:srgbClr val="CADCFC"/>
+                  <a:srgbClr val="C8C9D0"/>
                 </a:solidFill>
                 <a:latin typeface="Calibri"/>
               </a:rPr>
@@ -45399,7 +45503,7 @@
             <a:r>
               <a:rPr sz="900" b="0" i="0">
                 <a:solidFill>
-                  <a:srgbClr val="606060"/>
+                  <a:srgbClr val="6B6D76"/>
                 </a:solidFill>
                 <a:latin typeface="Calibri"/>
               </a:rPr>
@@ -45416,7 +45520,7 @@
 </p:sld>
 </file>
 
-<file path=ppt/slides/slide9.xml><?xml version="1.0" encoding="utf-8"?>
+<file path=ppt\slides\slide9.xml><?xml version="1.0" encoding="utf-8"?>
 <p:sld xmlns:a="http://schemas.openxmlformats.org/drawingml/2006/main" xmlns:r="http://schemas.openxmlformats.org/officeDocument/2006/relationships" xmlns:p="http://schemas.openxmlformats.org/presentationml/2006/main">
   <p:cSld>
     <p:spTree>
@@ -45448,7 +45552,7 @@
             <a:avLst/>
           </a:prstGeom>
           <a:solidFill>
-            <a:srgbClr val="1E2761"/>
+            <a:srgbClr val="23242A"/>
           </a:solidFill>
           <a:ln>
             <a:noFill/>
@@ -45538,7 +45642,7 @@
             <a:r>
               <a:rPr sz="1200" b="0" i="1">
                 <a:solidFill>
-                  <a:srgbClr val="CADCFC"/>
+                  <a:srgbClr val="C8C9D0"/>
                 </a:solidFill>
                 <a:latin typeface="Calibri"/>
               </a:rPr>
@@ -45562,7 +45666,7 @@
             <a:avLst/>
           </a:prstGeom>
           <a:solidFill>
-            <a:srgbClr val="2196F3"/>
+            <a:srgbClr val="2C5F8A"/>
           </a:solidFill>
           <a:ln>
             <a:noFill/>
@@ -45825,7 +45929,7 @@
             <a:avLst/>
           </a:prstGeom>
           <a:solidFill>
-            <a:srgbClr val="9C27B0"/>
+            <a:srgbClr val="6A3D9A"/>
           </a:solidFill>
           <a:ln>
             <a:noFill/>
@@ -46088,7 +46192,7 @@
             <a:avLst/>
           </a:prstGeom>
           <a:solidFill>
-            <a:srgbClr val="4CAF50"/>
+            <a:srgbClr val="2E7D32"/>
           </a:solidFill>
           <a:ln>
             <a:noFill/>
@@ -46421,7 +46525,7 @@
             <a:avLst/>
           </a:prstGeom>
           <a:solidFill>
-            <a:srgbClr val="D4AF37"/>
+            <a:srgbClr val="C9A227"/>
           </a:solidFill>
           <a:ln>
             <a:noFill/>
@@ -46719,7 +46823,7 @@
             <a:avLst/>
           </a:prstGeom>
           <a:solidFill>
-            <a:srgbClr val="E53935"/>
+            <a:srgbClr val="C62828"/>
           </a:solidFill>
           <a:ln>
             <a:noFill/>
@@ -47017,7 +47121,7 @@
             <a:avLst/>
           </a:prstGeom>
           <a:solidFill>
-            <a:srgbClr val="E97132"/>
+            <a:srgbClr val="B26A00"/>
           </a:solidFill>
           <a:ln>
             <a:noFill/>
@@ -47326,7 +47430,7 @@
             <a:r>
               <a:rPr sz="900" b="0" i="0">
                 <a:solidFill>
-                  <a:srgbClr val="606060"/>
+                  <a:srgbClr val="6B6D76"/>
                 </a:solidFill>
                 <a:latin typeface="Calibri"/>
               </a:rPr>
@@ -47343,7 +47447,11 @@
 </p:sld>
 </file>
 
-<file path=ppt/theme/theme1.xml><?xml version="1.0" encoding="utf-8"?>
+<file path=ppt\tableStyles.xml><?xml version="1.0" encoding="utf-8"?>
+<a:tblStyleLst xmlns:a="http://schemas.openxmlformats.org/drawingml/2006/main" def="{5C22544A-7EE6-4342-B048-85BDC9FD1C3A}"/>
+</file>
+
+<file path=ppt\theme\theme1.xml><?xml version="1.0" encoding="utf-8"?>
 <a:theme xmlns:a="http://schemas.openxmlformats.org/drawingml/2006/main" name="Office Theme">
   <a:themeElements>
     <a:clrScheme name="Office">
@@ -47661,4 +47769,38 @@
   </a:objectDefaults>
   <a:extraClrSchemeLst/>
 </a:theme>
+</file>
+
+<file path=ppt\viewProps.xml><?xml version="1.0" encoding="utf-8"?>
+<p:viewPr xmlns:a="http://schemas.openxmlformats.org/drawingml/2006/main" xmlns:r="http://schemas.openxmlformats.org/officeDocument/2006/relationships" xmlns:p="http://schemas.openxmlformats.org/presentationml/2006/main" lastView="sldThumbnailView">
+  <p:normalViewPr>
+    <p:restoredLeft sz="15620"/>
+    <p:restoredTop sz="94660"/>
+  </p:normalViewPr>
+  <p:slideViewPr>
+    <p:cSldViewPr snapToGrid="0" snapToObjects="1">
+      <p:cViewPr varScale="1">
+        <p:scale>
+          <a:sx n="105" d="100"/>
+          <a:sy n="105" d="100"/>
+        </p:scale>
+        <p:origin x="798" y="96"/>
+      </p:cViewPr>
+      <p:guideLst>
+        <p:guide orient="horz" pos="2160"/>
+        <p:guide pos="2880"/>
+      </p:guideLst>
+    </p:cSldViewPr>
+  </p:slideViewPr>
+  <p:notesTextViewPr>
+    <p:cViewPr>
+      <p:scale>
+        <a:sx n="100" d="100"/>
+        <a:sy n="100" d="100"/>
+      </p:scale>
+      <p:origin x="0" y="0"/>
+    </p:cViewPr>
+  </p:notesTextViewPr>
+  <p:gridSpacing cx="76200" cy="76200"/>
+</p:viewPr>
 </file>